--- a/Curso Gas B/12 - UNE 60670 - Recintos de contadores/12 - UNE 60670 - Recintos de contadores - Vídeo 1.pptx
+++ b/Curso Gas B/12 - UNE 60670 - Recintos de contadores/12 - UNE 60670 - Recintos de contadores - Vídeo 1.pptx
@@ -29,6 +29,7 @@
     <p:sldId id="277" r:id="rId29"/>
     <p:sldId id="278" r:id="rId30"/>
     <p:sldId id="279" r:id="rId31"/>
+    <p:sldId id="280" r:id="rId32"/>
   </p:sldIdLst>
   <p:sldSz cx="12191695" cy="6858000" type="screen4x3"/>
   <p:notesSz cx="6858000" cy="9144000"/>
@@ -600,12 +601,12 @@
           <a:lstStyle/>
           <a:p>
             <a:r>
-              <a:t>N1: ¿Centralizar es siempre juntarlos todos en un solo cuarto?</a:t>
-            </a:r>
-          </a:p>
-          <a:p>
-            <a:r>
-              <a:t>N2: No siempre. Puedes centralizar de forma total, metiendo todos los contadores en un local técnico o en un armario, o de forma parcial, repartiéndolos por plantas en armarios o en conductos técnicos que hay en cada rellano. Los recintos pueden venir prefabricados o hacerse con obra de fábrica, eso sí, enlucida por dentro para que quede una superficie lisa. Y sea cual sea, tiene que ser accesible desde las zonas comunes, y con los medios que exige la prevención de riesgos laborales para que el operario de la compañía pueda trabajar con seguridad. En resumen: total en un sitio, parcial repartido, pero siempre accesible desde lo común.</a:t>
+              <a:t>N1: En un edificio viejo no siempre hay hueco común. ¿Entonces qué?</a:t>
+            </a:r>
+          </a:p>
+          <a:p>
+            <a:r>
+              <a:t>N2: La norma te da un orden de mejor a peor, y hay que respetarlo. Lo primero, intentar centralizar en zona común, que es lo ideal. Si no se puede, entonces sí se admite meter el contador dentro de la vivienda, pero con una condición importante: la llave de usuario de esa instalación tiene que quedar accesible desde la zona comunitaria, con grado dos, para que la compañía pueda cortar el gas sin entrar en tu casa. Y si ni siquiera eso es posible, hace falta autorización expresa de la distribuidora, que además puede exigirte un obturador de cierre. Lo que nunca puedes hacer es meter el contador dentro porque es más cómodo: dentro de la vivienda es siempre la última opción.</a:t>
             </a:r>
           </a:p>
         </p:txBody>
@@ -675,12 +676,12 @@
           <a:lstStyle/>
           <a:p>
             <a:r>
-              <a:t>N1: ¿Tiene truco cómo se abre la puerta del cuarto de contadores?</a:t>
-            </a:r>
-          </a:p>
-          <a:p>
-            <a:r>
-              <a:t>N2: Tiene truco y muy preguntado. Primero, la puerta abre hacia afuera. ¿Por qué? Porque si dentro hay una fuga y algo la empuja, una puerta que abre hacia dentro te bloquearía; hacia afuera, no. Segundo, lleva cerradura con llave normalizada por la compañía, para que solo entre quien debe. Y tercero, un detalle clave del local técnico, que es el cuarto en el que una persona entra: se tiene que poder abrir desde dentro sin necesidad de llave. Imagina que estás dentro haciendo una lectura y hay un escape: tienes que poder salir de un empujón, sin buscar la llave. Eso es seguridad de las personas, no burocracia.</a:t>
+              <a:t>N1: ¿Centralizar es siempre juntarlos todos en un solo cuarto?</a:t>
+            </a:r>
+          </a:p>
+          <a:p>
+            <a:r>
+              <a:t>N2: No siempre. Puedes centralizar de forma total, metiendo todos los contadores en un local técnico o en un armario, o de forma parcial, repartiéndolos por plantas en armarios o en conductos técnicos que hay en cada rellano. Los recintos pueden venir prefabricados o hacerse con obra de fábrica, eso sí, enlucida por dentro para que quede una superficie lisa. Y sea cual sea, tiene que ser accesible desde las zonas comunes, y con los medios que exige la prevención de riesgos laborales para que el operario de la compañía pueda trabajar con seguridad. En resumen: total en un sitio, parcial repartido, pero siempre accesible desde lo común.</a:t>
             </a:r>
           </a:p>
         </p:txBody>
@@ -750,12 +751,12 @@
           <a:lstStyle/>
           <a:p>
             <a:r>
-              <a:t>N1: Con tantas llaves juntas, ¿cómo sé cuál es de cada vivienda?</a:t>
-            </a:r>
-          </a:p>
-          <a:p>
-            <a:r>
-              <a:t>N2: Por la placa identificativa. Junto a cada llave de contador, o de usuario, hay que poner una placa grabada de forma indeleble, o sea, que no se borre con el tiempo, indicando a qué vivienda pertenece: piso y puerta. Y esa placa tiene que ser metálica o de plástico rígido, nada de una pegatina que se despegue. ¿Por qué tanto rigor? Porque si te equivocas de llave puedes cortarle el gas a quien no toca, o peor, abrir una que no debías. La instalación eléctrica que a veces hay dentro, como conversores o electroválvulas, se trata como un local con posible presencia de gas, así que se ajusta al reglamento de baja tensión. La avería típica sin placas claras es el operario cerrando la llave equivocada.</a:t>
+              <a:t>N1: ¿Tiene truco cómo se abre la puerta del cuarto de contadores?</a:t>
+            </a:r>
+          </a:p>
+          <a:p>
+            <a:r>
+              <a:t>N2: Tiene truco y muy preguntado. Primero, la puerta abre hacia afuera. ¿Por qué? Porque si dentro hay una fuga y algo la empuja, una puerta que abre hacia dentro te bloquearía; hacia afuera, no. Segundo, lleva cerradura con llave normalizada por la compañía, para que solo entre quien debe. Y tercero, un detalle clave del local técnico, que es el cuarto en el que una persona entra: se tiene que poder abrir desde dentro sin necesidad de llave. Imagina que estás dentro haciendo una lectura y hay un escape: tienes que poder salir de un empujón, sin buscar la llave. Eso es seguridad de las personas, no burocracia.</a:t>
             </a:r>
           </a:p>
         </p:txBody>
@@ -825,12 +826,12 @@
           <a:lstStyle/>
           <a:p>
             <a:r>
-              <a:t>N1: ¿Los carteles son de verdad obligatorios o es por poner algo?</a:t>
-            </a:r>
-          </a:p>
-          <a:p>
-            <a:r>
-              <a:t>N2: Son obligatorios y evitan sustos. Dentro del recinto, cuando hay más de dos contadores, tiene que haber un cartel legible con las normas de maniobra: prohibido fumar o encender fuego, asegúrate de que la llave es la que toca, y no abras una llave sin comprobar que las demás de esa instalación están cerradas. Todo eso es para que nadie abra o cierre a lo loco. Y fuera, en la puerta, otro cartel bien claro que dice Contadores de gas, para que cualquiera sepa lo que hay ahí detrás. Recuerda el umbral que preguntan: los carteles de maniobra del interior son obligatorios a partir de más de dos contadores.</a:t>
+              <a:t>N1: Con tantas llaves juntas, ¿cómo sé cuál es de cada vivienda?</a:t>
+            </a:r>
+          </a:p>
+          <a:p>
+            <a:r>
+              <a:t>N2: Por la placa identificativa. Junto a cada llave de contador, o de usuario, hay que poner una placa grabada de forma indeleble, o sea, que no se borre con el tiempo, indicando a qué vivienda pertenece: piso y puerta. Y esa placa tiene que ser metálica o de plástico rígido, nada de una pegatina que se despegue. ¿Por qué tanto rigor? Porque si te equivocas de llave puedes cortarle el gas a quien no toca, o peor, abrir una que no debías. La instalación eléctrica que a veces hay dentro, como conversores o electroválvulas, se trata como un local con posible presencia de gas, así que se ajusta al reglamento de baja tensión. La avería típica sin placas claras es el operario cerrando la llave equivocada.</a:t>
             </a:r>
           </a:p>
         </p:txBody>
@@ -900,12 +901,12 @@
           <a:lstStyle/>
           <a:p>
             <a:r>
-              <a:t>N1: ¿Qué es eso del conducto técnico? No me lo imagino.</a:t>
-            </a:r>
-          </a:p>
-          <a:p>
-            <a:r>
-              <a:t>N2: Imagínate un patinillo, un hueco vertical que sube recto por todo el edificio, y en cada rellano tiene una puertecita con el contador de esa planta a la vista. Eso es el conducto técnico. Como sube en vertical, se aprovecha para que el aire tire. Por eso, al atravesar el forjado, es decir el suelo, de cada planta, hay que dejar cien centímetros cuadrados de hueco libre como mínimo, para que ese tiro de aire funcione. Y ojo: si ese hueco es mayor de cuatrocientos centímetros cuadrados, hay que taparlo con una reja desmontable capaz de aguantar el peso de una persona, no vaya alguien a colarse por él. Además, la puerta de cada planta tiene que ser estanca respecto al rellano: sin ranuras y con junta, para que un escape no invada la escalera.</a:t>
+              <a:t>N1: ¿Los carteles son de verdad obligatorios o es por poner algo?</a:t>
+            </a:r>
+          </a:p>
+          <a:p>
+            <a:r>
+              <a:t>N2: Son obligatorios y evitan sustos. Dentro del recinto, cuando hay más de dos contadores, tiene que haber un cartel legible con las normas de maniobra: prohibido fumar o encender fuego, asegúrate de que la llave es la que toca, y no abras una llave sin comprobar que las demás de esa instalación están cerradas. Todo eso es para que nadie abra o cierre a lo loco. Y fuera, en la puerta, otro cartel bien claro que dice Contadores de gas, para que cualquiera sepa lo que hay ahí detrás. Recuerda el umbral que preguntan: los carteles de maniobra del interior son obligatorios a partir de más de dos contadores.</a:t>
             </a:r>
           </a:p>
         </p:txBody>
@@ -975,12 +976,12 @@
           <a:lstStyle/>
           <a:p>
             <a:r>
-              <a:t>N1: ¿Por qué hacen falta dos rejillas, una arriba y otra abajo?</a:t>
-            </a:r>
-          </a:p>
-          <a:p>
-            <a:r>
-              <a:t>N2: Para que el aire circule de verdad. Si solo pones una, el aire no se mueve; con dos, entra por una y sale por la otra, y así el recinto se renueva. Ahora las cotas, que caen mucho. La abertura de abajo: su borde de arriba tiene que quedar como mucho a cincuenta centímetros del suelo del recinto. Y una condición extra si el gas es pesado, o sea GLP: además su borde de abajo tiene que estar como mucho a quince centímetros del suelo, porque el butano se arrastra por el suelo y hay que recogerlo a ras. La abertura de arriba: su borde superior a menos de treinta centímetros del techo, y su borde inferior a menos de cincuenta centímetros del techo. Piensa siempre: pesado, se recoge abajo pegado al suelo.</a:t>
+              <a:t>N1: ¿Qué es eso del conducto técnico? No me lo imagino.</a:t>
+            </a:r>
+          </a:p>
+          <a:p>
+            <a:r>
+              <a:t>N2: Imagínate un patinillo, un hueco vertical que sube recto por todo el edificio, y en cada rellano tiene una puertecita con el contador de esa planta a la vista. Eso es el conducto técnico. Como sube en vertical, se aprovecha para que el aire tire. Por eso, al atravesar el forjado, es decir el suelo, de cada planta, hay que dejar cien centímetros cuadrados de hueco libre como mínimo, para que ese tiro de aire funcione. Y ojo: si ese hueco es mayor de cuatrocientos centímetros cuadrados, hay que taparlo con una reja desmontable capaz de aguantar el peso de una persona, no vaya alguien a colarse por él. Además, la puerta de cada planta tiene que ser estanca respecto al rellano: sin ranuras y con junta, para que un escape no invada la escalera.</a:t>
             </a:r>
           </a:p>
         </p:txBody>
@@ -1050,12 +1051,12 @@
           <a:lstStyle/>
           <a:p>
             <a:r>
-              <a:t>N1: ¿Qué diferencia hay entre ventilación directa e indirecta?</a:t>
-            </a:r>
-          </a:p>
-          <a:p>
-            <a:r>
-              <a:t>N2: La directa da directamente al exterior o a un patio de ventilación: es la buena, la que preferimos. La indirecta da a un local común, un portal o un vestíbulo, que a su vez sí sale al exterior; esta solo se admite en los casos en que la tabla de superficies lo permite con su cifra concreta. Y aquí van dos recargos que caen en el examen. Uno: si la ventilación se hace por un conducto de más de tres metros de largo, hay que aumentar la superficie un cincuenta por ciento, porque un conducto largo tira peor. Y con gas pesado, nunca uses la indirecta a través de espacios que comuniquen con niveles más bajos, porque el GLP se te iría hacia abajo. Las rejillas, siempre fijas.</a:t>
+              <a:t>N1: ¿Por qué hacen falta dos rejillas, una arriba y otra abajo?</a:t>
+            </a:r>
+          </a:p>
+          <a:p>
+            <a:r>
+              <a:t>N2: Para que el aire circule de verdad. Si solo pones una, el aire no se mueve; con dos, entra por una y sale por la otra, y así el recinto se renueva. Ahora las cotas, que caen mucho. La abertura de abajo: su borde de arriba tiene que quedar como mucho a cincuenta centímetros del suelo del recinto. Y una condición extra si el gas es pesado, o sea GLP: además su borde de abajo tiene que estar como mucho a quince centímetros del suelo, porque el butano se arrastra por el suelo y hay que recogerlo a ras. La abertura de arriba: su borde superior a menos de treinta centímetros del techo, y su borde inferior a menos de cincuenta centímetros del techo. Piensa siempre: pesado, se recoge abajo pegado al suelo.</a:t>
             </a:r>
           </a:p>
         </p:txBody>
@@ -1125,12 +1126,12 @@
           <a:lstStyle/>
           <a:p>
             <a:r>
-              <a:t>N1: ¿Hay que memorizar las superficies de la tabla?</a:t>
-            </a:r>
-          </a:p>
-          <a:p>
-            <a:r>
-              <a:t>N2: Al menos las de referencia, sí. Quédate con estas: el local técnico, ese cuarto de contadores en el que entra una persona, ventila con doscientos centímetros cuadrados arriba y abajo. Un armario pequeño, de hasta dos contadores, con solo cinco centímetros cuadrados; pero si tiene más de dos contadores, sube a cincuenta si es exterior, o a doscientos si es interior. Y el conducto técnico, ciento cincuenta. Caso especial muy preguntado: si el recinto está en un semisótano, la puerta tiene que ser estanca, la superficie de ventilación se aumenta un cincuenta por ciento, y no se permite la ventilación indirecta. En semisótano, todo más exigente, porque estás bajo el nivel del suelo.</a:t>
+              <a:t>N1: ¿Qué diferencia hay entre ventilación directa e indirecta?</a:t>
+            </a:r>
+          </a:p>
+          <a:p>
+            <a:r>
+              <a:t>N2: La directa da directamente al exterior o a un patio de ventilación: es la buena, la que preferimos. La indirecta da a un local común, un portal o un vestíbulo, que a su vez sí sale al exterior; esta solo se admite en los casos en que la tabla de superficies lo permite con su cifra concreta. Y aquí van dos recargos que caen en el examen. Uno: si la ventilación se hace por un conducto de más de tres metros de largo, hay que aumentar la superficie un cincuenta por ciento, porque un conducto largo tira peor. Y con gas pesado, nunca uses la indirecta a través de espacios que comuniquen con niveles más bajos, porque el GLP se te iría hacia abajo. Las rejillas, siempre fijas.</a:t>
             </a:r>
           </a:p>
         </p:txBody>
@@ -1200,12 +1201,12 @@
           <a:lstStyle/>
           <a:p>
             <a:r>
-              <a:t>N1: Si el cuarto es solo para gas, ¿qué pinta ahí un tubo de agua?</a:t>
-            </a:r>
-          </a:p>
-          <a:p>
-            <a:r>
-              <a:t>N2: A veces no queda más remedio que un tubo o un cable ajeno cruce el recinto, y la norma lo tolera a regañadientes, con condiciones. Ese tubo que atraviesa no puede llevar juntas desmontables, porque cada junta es un punto que puede fallar, y sus entradas y salidas del recinto tienen que ser estancas. Si es de plomo o de plástico, además va envainado, metido dentro de otro conducto. Y si es un cable de electricidad, tiene que ir en una vaina continua de acero. Y una regla de oro: esa conducción jamás puede tapar una rejilla de ventilación ni estorbar para manejar las llaves y los contadores. Menos puntos de fallo y ventilación siempre libre.</a:t>
+              <a:t>N1: ¿Hay que memorizar las superficies de la tabla?</a:t>
+            </a:r>
+          </a:p>
+          <a:p>
+            <a:r>
+              <a:t>N2: Al menos las de referencia, sí. Quédate con estas: el local técnico, ese cuarto de contadores en el que entra una persona, ventila con doscientos centímetros cuadrados arriba y abajo. Un armario pequeño, de hasta dos contadores, con solo cinco centímetros cuadrados; pero si tiene más de dos contadores, sube a cincuenta si es exterior, o a doscientos si es interior. Y el conducto técnico, ciento cincuenta. Caso especial muy preguntado: si el recinto está en un semisótano, la puerta tiene que ser estanca, la superficie de ventilación se aumenta un cincuenta por ciento, y no se permite la ventilación indirecta. En semisótano, todo más exigente, porque estás bajo el nivel del suelo.</a:t>
             </a:r>
           </a:p>
         </p:txBody>
@@ -1275,12 +1276,12 @@
           <a:lstStyle/>
           <a:p>
             <a:r>
-              <a:t>N1: Cuando empotro el armario del contador, ¿me preocupo de algo?</a:t>
-            </a:r>
-          </a:p>
-          <a:p>
-            <a:r>
-              <a:t>N2: Sí, de sellarlo bien. El armario o nicho de un solo contador va preferentemente en la fachada o en el muro límite de la propiedad, y con espacio de sobra para el contador y sus accesorios y para poder leer y mantener. Ahora, si lo empotras en el muro, entre la caja y el hueco de la pared quedan intersticios, huecos, y hay que rellenarlos con mortero de cemento. ¿Por qué? Para que el gas no tenga por dónde colarse hacia el interior del muro o del edificio. En cuanto al material, tienes tres opciones: metálico, obra de fábrica enlucida por dentro, o plástico de una clase de reacción al fuego que en pantalla ves como ce ese tres de cero, que significa poco combustible, poco humo y sin goteo ardiendo.</a:t>
+              <a:t>N1: Si el cuarto es solo para gas, ¿qué pinta ahí un tubo de agua?</a:t>
+            </a:r>
+          </a:p>
+          <a:p>
+            <a:r>
+              <a:t>N2: A veces no queda más remedio que un tubo o un cable ajeno cruce el recinto, y la norma lo tolera a regañadientes, con condiciones. Ese tubo que atraviesa no puede llevar juntas desmontables, porque cada junta es un punto que puede fallar, y sus entradas y salidas del recinto tienen que ser estancas. Si es de plomo o de plástico, además va envainado, metido dentro de otro conducto. Y si es un cable de electricidad, tiene que ir en una vaina continua de acero. Y una regla de oro: esa conducción jamás puede tapar una rejilla de ventilación ni estorbar para manejar las llaves y los contadores. Menos puntos de fallo y ventilación siempre libre.</a:t>
             </a:r>
           </a:p>
         </p:txBody>
@@ -1425,12 +1426,12 @@
           <a:lstStyle/>
           <a:p>
             <a:r>
-              <a:t>N1: Si el contador acaba en la cocina, ¿qué distancias respeto?</a:t>
-            </a:r>
-          </a:p>
-          <a:p>
-            <a:r>
-              <a:t>N2: Estas son de las cifras que más caen, grábatelas. El totalizador, la ruedecita de lectura, a un metro con setenta como máximo, para leerlo de pie sin subirte a nada. Cuarenta centímetros de separación entre el contador y los fuegos de la cocina, porque el calor directo de la llama envejece y deforma el contador y sus juntas, y a la larga eso es una fuga. Veinte centímetros respecto a mecanismos eléctricos, es decir enchufes, interruptores y puntos de luz, y también respecto a calderas y calentadores, porque una chispa junto a una posible fuga es una explosión esperando. Y si el local tiene poca ventilación, se le exige una abertura permanente de cinco centímetros cuadrados: arriba para gas ligero, abajo para gas pesado.</a:t>
+              <a:t>N1: Cuando empotro el armario del contador, ¿me preocupo de algo?</a:t>
+            </a:r>
+          </a:p>
+          <a:p>
+            <a:r>
+              <a:t>N2: Sí, de sellarlo bien. El armario o nicho de un solo contador va preferentemente en la fachada o en el muro límite de la propiedad, y con espacio de sobra para el contador y sus accesorios y para poder leer y mantener. Ahora, si lo empotras en el muro, entre la caja y el hueco de la pared quedan intersticios, huecos, y hay que rellenarlos con mortero de cemento. ¿Por qué? Para que el gas no tenga por dónde colarse hacia el interior del muro o del edificio. En cuanto al material, tienes tres opciones: metálico, obra de fábrica enlucida por dentro, o plástico de una clase de reacción al fuego que en pantalla ves como ce ese tres de cero, que significa poco combustible, poco humo y sin goteo ardiendo.</a:t>
             </a:r>
           </a:p>
         </p:txBody>
@@ -1500,12 +1501,12 @@
           <a:lstStyle/>
           <a:p>
             <a:r>
-              <a:t>N1: ¿Hay sitios donde esté directamente prohibido el contador?</a:t>
-            </a:r>
-          </a:p>
-          <a:p>
-            <a:r>
-              <a:t>N2: Sí, y son de sentido común una vez lo piensas. Nunca en dormitorios ni en cuartos de baño o de ducha. En un dormitorio, porque duermes ahí y no te enterarías de una fuga; en el baño, por la humedad y por ser un espacio pequeño y cerrado. La única excepción es un local que no tenga esas dependencias separadas y que tenga un volumen grande, de más de setenta y cinco metros cúbicos, porque ahí hay aire de sobra. Tampoco se pone nunca debajo de la proyección vertical de un fregadero o pila de lavar, porque el agua que cae por encima corroe y avería el contador. Y si por lo que sea no puedes respetar las distancias, intercalas una pantalla de protección, que puede ser incluso el lateral de un mueble que lo tape.</a:t>
+              <a:t>N1: Si el contador acaba en la cocina, ¿qué distancias respeto?</a:t>
+            </a:r>
+          </a:p>
+          <a:p>
+            <a:r>
+              <a:t>N2: Estas son de las cifras que más caen, grábatelas. El totalizador, la ruedecita de lectura, a un metro con setenta como máximo, para leerlo de pie sin subirte a nada. Cuarenta centímetros de separación entre el contador y los fuegos de la cocina, porque el calor directo de la llama envejece y deforma el contador y sus juntas, y a la larga eso es una fuga. Veinte centímetros respecto a mecanismos eléctricos, es decir enchufes, interruptores y puntos de luz, y también respecto a calderas y calentadores, porque una chispa junto a una posible fuga es una explosión esperando. Y si el local tiene poca ventilación, se le exige una abertura permanente de cinco centímetros cuadrados: arriba para gas ligero, abajo para gas pesado.</a:t>
             </a:r>
           </a:p>
         </p:txBody>
@@ -1575,12 +1576,12 @@
           <a:lstStyle/>
           <a:p>
             <a:r>
-              <a:t>N1: Y si el contador se queda a la intemperie, ¿cambia algo?</a:t>
-            </a:r>
-          </a:p>
-          <a:p>
-            <a:r>
-              <a:t>N2: Cambia el soporte. Si el contador queda al aire libre, a la intemperie o en el alféizar de una ventana, aguanta sol, lluvia y frío, así que necesita un soporte reforzado, el que cumple la norma de soportes a la intemperie. Si en cambio está techado, en un balcón o una terraza cubiertos, ya no sufre tanto y basta con el soporte normal, el mismo que se usa en interiores y recintos. En pantalla ves los códigos exactos de esas dos normas de soportes. Y lo que no cambia es la altura de lectura: el totalizador, igual que dentro de casa, a un metro con setenta como máximo, para leerlo de pie sin escaleras.</a:t>
+              <a:t>N1: ¿Hay sitios donde esté directamente prohibido el contador?</a:t>
+            </a:r>
+          </a:p>
+          <a:p>
+            <a:r>
+              <a:t>N2: Sí, y son de sentido común una vez lo piensas. Nunca en dormitorios ni en cuartos de baño o de ducha. En un dormitorio, porque duermes ahí y no te enterarías de una fuga; en el baño, por la humedad y por ser un espacio pequeño y cerrado. La única excepción es un local que no tenga esas dependencias separadas y que tenga un volumen grande, de más de setenta y cinco metros cúbicos, porque ahí hay aire de sobra. Tampoco se pone nunca debajo de la proyección vertical de un fregadero o pila de lavar, porque el agua que cae por encima corroe y avería el contador. Y si por lo que sea no puedes respetar las distancias, intercalas una pantalla de protección, que puede ser incluso el lateral de un mueble que lo tape.</a:t>
             </a:r>
           </a:p>
         </p:txBody>
@@ -1650,12 +1651,12 @@
           <a:lstStyle/>
           <a:p>
             <a:r>
-              <a:t>N1: Cuando termino el montaje, ¿qué papeles se firman?</a:t>
-            </a:r>
-          </a:p>
-          <a:p>
-            <a:r>
-              <a:t>N2: El montaje se refleja en el certificado de instalación de gas. Hay dos modelos que debes distinguir: el ce dos, para la instalación común, que es el montante que alimenta a todos los contadores del bloque; y el ce tres, para cada instalación individual, que lista los aparatos de esa vivienda y su potencia. Lo firma el instalador habilitado con el sello de su empresa, y se le entrega una copia al titular, mientras el distribuidor archiva su ejemplar a disposición de la administración de la comunidad autónoma. Y el broche final lo pone el distribuidor: cuando comprueba que el recinto cumple, precinta el equipo de medida. La idea que te llevas: sin recinto conforme, no hay precinto, y sin precinto no hay gas.</a:t>
+              <a:t>N1: Y si el contador se queda a la intemperie, ¿cambia algo?</a:t>
+            </a:r>
+          </a:p>
+          <a:p>
+            <a:r>
+              <a:t>N2: Cambia el soporte. Si el contador queda al aire libre, a la intemperie o en el alféizar de una ventana, aguanta sol, lluvia y frío, así que necesita un soporte reforzado, el que cumple la norma de soportes a la intemperie. Si en cambio está techado, en un balcón o una terraza cubiertos, ya no sufre tanto y basta con el soporte normal, el mismo que se usa en interiores y recintos. En pantalla ves los códigos exactos de esas dos normas de soportes. Y lo que no cambia es la altura de lectura: el totalizador, igual que dentro de casa, a un metro con setenta como máximo, para leerlo de pie sin escaleras.</a:t>
             </a:r>
           </a:p>
         </p:txBody>
@@ -1725,6 +1726,81 @@
           <a:lstStyle/>
           <a:p>
             <a:r>
+              <a:t>N1: Cuando termino el montaje, ¿qué papeles se firman?</a:t>
+            </a:r>
+          </a:p>
+          <a:p>
+            <a:r>
+              <a:t>N2: El montaje se refleja en el certificado de instalación de gas. Hay dos modelos que debes distinguir: el ce dos, para la instalación común, que es el montante que alimenta a todos los contadores del bloque; y el ce tres, para cada instalación individual, que lista los aparatos de esa vivienda y su potencia. Lo firma el instalador habilitado con el sello de su empresa, y se le entrega una copia al titular, mientras el distribuidor archiva su ejemplar a disposición de la administración de la comunidad autónoma. Y el broche final lo pone el distribuidor: cuando comprueba que el recinto cumple, precinta el equipo de medida. La idea que te llevas: sin recinto conforme, no hay precinto, y sin precinto no hay gas.</a:t>
+            </a:r>
+          </a:p>
+        </p:txBody>
+      </p:sp>
+      <p:sp>
+        <p:nvSpPr>
+          <p:cNvPr id="4" name="Slide Number Placeholder 3"/>
+          <p:cNvSpPr>
+            <a:spLocks noGrp="1"/>
+          </p:cNvSpPr>
+          <p:nvPr>
+            <p:ph type="sldNum" idx="5" sz="quarter"/>
+          </p:nvPr>
+        </p:nvSpPr>
+        <p:spPr/>
+      </p:sp>
+    </p:spTree>
+  </p:cSld>
+  <p:clrMapOvr>
+    <a:masterClrMapping/>
+  </p:clrMapOvr>
+</p:notes>
+</file>
+
+<file path=ppt/notesSlides/notesSlide25.xml><?xml version="1.0" encoding="utf-8"?>
+<p:notes xmlns:a="http://schemas.openxmlformats.org/drawingml/2006/main" xmlns:p="http://schemas.openxmlformats.org/presentationml/2006/main" xmlns:r="http://schemas.openxmlformats.org/officeDocument/2006/relationships">
+  <p:cSld>
+    <p:spTree>
+      <p:nvGrpSpPr>
+        <p:cNvPr id="1" name=""/>
+        <p:cNvGrpSpPr/>
+        <p:nvPr/>
+      </p:nvGrpSpPr>
+      <p:grpSpPr>
+        <a:xfrm>
+          <a:off x="0" y="0"/>
+          <a:ext cx="0" cy="0"/>
+          <a:chOff x="0" y="0"/>
+          <a:chExt cx="0" cy="0"/>
+        </a:xfrm>
+      </p:grpSpPr>
+      <p:sp>
+        <p:nvSpPr>
+          <p:cNvPr id="2" name="Slide Image Placeholder 1"/>
+          <p:cNvSpPr>
+            <a:spLocks noGrp="1"/>
+          </p:cNvSpPr>
+          <p:nvPr>
+            <p:ph type="sldImg" idx="2"/>
+          </p:nvPr>
+        </p:nvSpPr>
+        <p:spPr/>
+      </p:sp>
+      <p:sp>
+        <p:nvSpPr>
+          <p:cNvPr id="3" name="Notes Placeholder 2"/>
+          <p:cNvSpPr>
+            <a:spLocks noGrp="1"/>
+          </p:cNvSpPr>
+          <p:nvPr>
+            <p:ph type="body" idx="3" sz="quarter"/>
+          </p:nvPr>
+        </p:nvSpPr>
+        <p:spPr/>
+        <p:txBody>
+          <a:bodyPr/>
+          <a:lstStyle/>
+          <a:p>
+            <a:r>
               <a:t>N1: Cerramos fuerte. Si tuviera que quedarme con lo esencial, ¿qué es?</a:t>
             </a:r>
           </a:p>
@@ -1808,16 +1884,7 @@
         <p:txBody>
           <a:bodyPr/>
           <a:lstStyle/>
-          <a:p>
-            <a:r>
-              <a:t>N1: Si el contador lo pone la compañía, ¿qué me toca controlar a mí?</a:t>
-            </a:r>
-          </a:p>
-          <a:p>
-            <a:r>
-              <a:t>N2: Muy buena pregunta, porque aquí está la clave del tema. El contador, ese aparato que cuenta metros cúbicos, lo fabrica y lo instala la compañía distribuidora. A ti, como instalador, lo que te van a examinar y lo que montas es el habitáculo, es decir, la caja donde vive el contador. Por eso la Parte 5 va de medidas, de ventilación, de puertas y de carteles del recinto. Y ojo, la UNE 60670 completa es como un libro de trece capítulos que cubren las instalaciones de gas hasta cinco bar; este que estudiamos es el capítulo, la parte, número cinco. Ejemplo de obra: cuando cuelgas un armario de contador en una fachada, no estás tocando el contador, estás preparando su casa para que la compañía luego lo enchufe.</a:t>
-            </a:r>
-          </a:p>
+          <a:p/>
         </p:txBody>
       </p:sp>
       <p:sp>
@@ -1885,12 +1952,12 @@
           <a:lstStyle/>
           <a:p>
             <a:r>
-              <a:t>N1: ¿Y cómo sé qué contador toca en cada sitio?</a:t>
-            </a:r>
-          </a:p>
-          <a:p>
-            <a:r>
-              <a:t>N2: No lo eliges a ojo. Para acertar con el tipo de contador y su tamaño hay que mirar dos cosas: qué gas es, porque no pesa igual el gas natural que el butano, y cuánto se va a consumir, que es lo que llamamos los consumos previsibles. Y siempre partiendo de un mínimo, el grado de gasificación uno, que es como el nivel de equipamiento de gas más básico que se supone en una vivienda. Como esto afecta al suministro de la red, la norma te obliga a hablarlo con la empresa distribuidora antes. En la práctica: no montas nada por tu cuenta sin consultar, porque quien conoce la presión y el caudal de esa acometida es la compañía.</a:t>
+              <a:t>N1: Si el contador lo pone la compañía, ¿qué me toca controlar a mí?</a:t>
+            </a:r>
+          </a:p>
+          <a:p>
+            <a:r>
+              <a:t>N2: Muy buena pregunta, porque aquí está la clave del tema. El contador, ese aparato que cuenta metros cúbicos, lo fabrica y lo instala la compañía distribuidora. A ti, como instalador, lo que te van a examinar y lo que montas es el habitáculo, es decir, la caja donde vive el contador. Por eso la Parte 5 va de medidas, de ventilación, de puertas y de carteles del recinto. Y ojo, la UNE 60670 completa es como un libro de trece capítulos que cubren las instalaciones de gas hasta cinco bar; este que estudiamos es el capítulo, la parte, número cinco. Ejemplo de obra: cuando cuelgas un armario de contador en una fachada, no estás tocando el contador, estás preparando su casa para que la compañía luego lo enchufe.</a:t>
             </a:r>
           </a:p>
         </p:txBody>
@@ -1960,12 +2027,12 @@
           <a:lstStyle/>
           <a:p>
             <a:r>
-              <a:t>N1: ¿Por qué unos gases pueden ir más abajo que otros?</a:t>
-            </a:r>
-          </a:p>
-          <a:p>
-            <a:r>
-              <a:t>N2: Todo depende de si el gas flota o pesa. El gas natural es más ligero que el aire: si se escapa, sube hacia arriba, así que arriba es fácil de ventilar. Por eso no lo bajamos por debajo del semisótano. El GLP, que es el butano y el propano, es más pesado que el aire: si se escapa, se arrastra por el suelo y se acumula en el hueco más bajo que encuentre, formando una bolsa peligrosa. Por eso con GLP no bajamos por debajo del nivel de la planta baja. La chuleta que te llevas es sencilla: ligero puede llegar al semisótano; pesado, solo de planta baja hacia arriba. Ejemplo real: un contador de butano en un sótano es un fallo grave, porque una fuga se quedaría estancada abajo esperando una chispa.</a:t>
+              <a:t>N1: ¿Y cómo sé qué contador toca en cada sitio?</a:t>
+            </a:r>
+          </a:p>
+          <a:p>
+            <a:r>
+              <a:t>N2: No lo eliges a ojo. Para acertar con el tipo de contador y su tamaño hay que mirar dos cosas: qué gas es, porque no pesa igual el gas natural que el butano, y cuánto se va a consumir, que es lo que llamamos los consumos previsibles. Y siempre partiendo de un mínimo, el grado de gasificación uno, que es como el nivel de equipamiento de gas más básico que se supone en una vivienda. Como esto afecta al suministro de la red, la norma te obliga a hablarlo con la empresa distribuidora antes. En la práctica: no montas nada por tu cuenta sin consultar, porque quien conoce la presión y el caudal de esa acometida es la compañía.</a:t>
             </a:r>
           </a:p>
         </p:txBody>
@@ -2035,12 +2102,12 @@
           <a:lstStyle/>
           <a:p>
             <a:r>
-              <a:t>N1: ¿Puedo aprovechar el cuarto del contador para guardar cosas?</a:t>
-            </a:r>
-          </a:p>
-          <a:p>
-            <a:r>
-              <a:t>N2: No. El recinto, sea local técnico, armario, nicho o conducto, está reservado en exclusiva para instalaciones de gas. Nada de trasteros ni de meter la caldera de la comunidad ahí. La razón es de seguridad: cuantas menos cosas ajenas, menos fuentes de riesgo y más fácil ventilar. Segundo detalle, el totalizador. El totalizador es la ruedecita de números que hay que leer, y se pone por debajo de dos metros para que el lector lo vea sin subirse a nada. Solo en los módulos prefabricados se permite subirlo hasta dos metros con cuarenta, pero con una condición: que dejes una escalera o algo parecido para poder leer. Sin escalera, ese dos con cuarenta no vale.</a:t>
+              <a:t>N1: ¿Por qué unos gases pueden ir más abajo que otros?</a:t>
+            </a:r>
+          </a:p>
+          <a:p>
+            <a:r>
+              <a:t>N2: Todo depende de si el gas flota o pesa. El gas natural es más ligero que el aire: si se escapa, sube hacia arriba, así que arriba es fácil de ventilar. Por eso no lo bajamos por debajo del semisótano. El GLP, que es el butano y el propano, es más pesado que el aire: si se escapa, se arrastra por el suelo y se acumula en el hueco más bajo que encuentre, formando una bolsa peligrosa. Por eso con GLP no bajamos por debajo del nivel de la planta baja. La chuleta que te llevas es sencilla: ligero puede llegar al semisótano; pesado, solo de planta baja hacia arriba. Ejemplo real: un contador de butano en un sótano es un fallo grave, porque una fuga se quedaría estancada abajo esperando una chispa.</a:t>
             </a:r>
           </a:p>
         </p:txBody>
@@ -2110,12 +2177,12 @@
           <a:lstStyle/>
           <a:p>
             <a:r>
-              <a:t>N1: En un edificio de pisos nuevo, ¿dónde van todos los contadores?</a:t>
-            </a:r>
-          </a:p>
-          <a:p>
-            <a:r>
-              <a:t>N2: En obra nueva y en fincas de varios vecinos, los contadores se juntan todos en un mismo sitio: eso es centralizar. Y ese sitio va en zonas comunitarias del edificio, el portal, un cuarto común, no dentro de las casas. Además tiene que tener accesibilidad de grado dos, que significa que la compañía llega al contador con facilidad, sin depender de que el vecino le abra. Solo de forma excepcional y con el permiso de la distribuidora se admite el grado tres, que es peor acceso, y ahí con un tope: no bajar por debajo de la planta baja. Idea que te llevas: bloque de pisos igual a contadores centralizados y accesibles desde zona común.</a:t>
+              <a:t>N1: ¿Puedo aprovechar el cuarto del contador para guardar cosas?</a:t>
+            </a:r>
+          </a:p>
+          <a:p>
+            <a:r>
+              <a:t>N2: No. El recinto, sea local técnico, armario, nicho o conducto, está reservado en exclusiva para instalaciones de gas. Nada de trasteros ni de meter la caldera de la comunidad ahí. La razón es de seguridad: cuantas menos cosas ajenas, menos fuentes de riesgo y más fácil ventilar. Segundo detalle, el totalizador. El totalizador es la ruedecita de números que hay que leer, y se pone por debajo de dos metros para que el lector lo vea sin subirse a nada. Solo en los módulos prefabricados se permite subirlo hasta dos metros con cuarenta, pero con una condición: que dejes una escalera o algo parecido para poder leer. Sin escalera, ese dos con cuarenta no vale.</a:t>
             </a:r>
           </a:p>
         </p:txBody>
@@ -2185,12 +2252,12 @@
           <a:lstStyle/>
           <a:p>
             <a:r>
-              <a:t>N1: ¿Y si es un chalé o un local, donde solo hay un contador?</a:t>
-            </a:r>
-          </a:p>
-          <a:p>
-            <a:r>
-              <a:t>N2: Ahí cambia la cosa. En una vivienda unifamiliar, o en un local de uso no doméstico, el contador va en un recinto tipo armario o nicho. Y preferentemente en la fachada o en el muro que marca el límite de la propiedad, con accesibilidad de grado dos desde el exterior. ¿Por qué en la fachada y hacia fuera? Para que el lector de la compañía llegue desde la calle sin tener que entrar en la casa. Ejemplo cotidiano: esos armarios metálicos que ves empotrados en la tapia o en la fachada de los chalés, con su puertecita y su cerradura, son justo esto.</a:t>
+              <a:t>N1: En un edificio de pisos nuevo, ¿dónde van todos los contadores?</a:t>
+            </a:r>
+          </a:p>
+          <a:p>
+            <a:r>
+              <a:t>N2: En obra nueva y en fincas de varios vecinos, los contadores se juntan todos en un mismo sitio: eso es centralizar. Y ese sitio va en zonas comunitarias del edificio, el portal, un cuarto común, no dentro de las casas. Además tiene que tener accesibilidad de grado dos, que significa que la compañía llega al contador con facilidad, sin depender de que el vecino le abra. Solo de forma excepcional y con el permiso de la distribuidora se admite el grado tres, que es peor acceso, y ahí con un tope: no bajar por debajo de la planta baja. Idea que te llevas: bloque de pisos igual a contadores centralizados y accesibles desde zona común.</a:t>
             </a:r>
           </a:p>
         </p:txBody>
@@ -2260,12 +2327,12 @@
           <a:lstStyle/>
           <a:p>
             <a:r>
-              <a:t>N1: En un edificio viejo no siempre hay hueco común. ¿Entonces qué?</a:t>
-            </a:r>
-          </a:p>
-          <a:p>
-            <a:r>
-              <a:t>N2: La norma te da un orden de mejor a peor, y hay que respetarlo. Lo primero, intentar centralizar en zona común, que es lo ideal. Si no se puede, entonces sí se admite meter el contador dentro de la vivienda, pero con una condición importante: la llave de usuario de esa instalación tiene que quedar accesible desde la zona comunitaria, con grado dos, para que la compañía pueda cortar el gas sin entrar en tu casa. Y si ni siquiera eso es posible, hace falta autorización expresa de la distribuidora, que además puede exigirte un obturador de cierre. Lo que nunca puedes hacer es meter el contador dentro porque es más cómodo: dentro de la vivienda es siempre la última opción.</a:t>
+              <a:t>N1: ¿Y si es un chalé o un local, donde solo hay un contador?</a:t>
+            </a:r>
+          </a:p>
+          <a:p>
+            <a:r>
+              <a:t>N2: Ahí cambia la cosa. En una vivienda unifamiliar, o en un local de uso no doméstico, el contador va en un recinto tipo armario o nicho. Y preferentemente en la fachada o en el muro que marca el límite de la propiedad, con accesibilidad de grado dos desde el exterior. ¿Por qué en la fachada y hacia fuera? Para que el lector de la compañía llegue desde la calle sin tener que entrar en la casa. Ejemplo cotidiano: esos armarios metálicos que ves empotrados en la tapia o en la fachada de los chalés, con su puertecita y su cerradura, son justo esto.</a:t>
             </a:r>
           </a:p>
         </p:txBody>
@@ -5340,7 +5407,7 @@
             <a:r>
               <a:rPr sz="1400" b="1" i="0">
                 <a:solidFill>
-                  <a:srgbClr val="CADCFC"/>
+                  <a:srgbClr val="F4A24C"/>
                 </a:solidFill>
                 <a:latin typeface="Montserrat"/>
               </a:rPr>
@@ -5351,13 +5418,57 @@
       </p:sp>
       <p:sp>
         <p:nvSpPr>
-          <p:cNvPr id="4" name="TextBox 3"/>
+          <p:cNvPr id="4" name="Rounded Rectangle 3"/>
+          <p:cNvSpPr/>
+          <p:nvPr/>
+        </p:nvSpPr>
+        <p:spPr>
+          <a:xfrm>
+            <a:off x="868680" y="2057400"/>
+            <a:ext cx="1463040" cy="82296"/>
+          </a:xfrm>
+          <a:prstGeom prst="roundRect">
+            <a:avLst/>
+          </a:prstGeom>
+          <a:solidFill>
+            <a:srgbClr val="E8801A"/>
+          </a:solidFill>
+          <a:ln>
+            <a:noFill/>
+          </a:ln>
+          <a:effectLst/>
+        </p:spPr>
+        <p:style>
+          <a:lnRef idx="1">
+            <a:schemeClr val="accent1"/>
+          </a:lnRef>
+          <a:fillRef idx="3">
+            <a:schemeClr val="accent1"/>
+          </a:fillRef>
+          <a:effectRef idx="2">
+            <a:schemeClr val="accent1"/>
+          </a:effectRef>
+          <a:fontRef idx="minor">
+            <a:schemeClr val="lt1"/>
+          </a:fontRef>
+        </p:style>
+        <p:txBody>
+          <a:bodyPr rtlCol="0" anchor="ctr"/>
+          <a:lstStyle/>
+          <a:p>
+            <a:pPr algn="ctr"/>
+          </a:p>
+        </p:txBody>
+      </p:sp>
+      <p:sp>
+        <p:nvSpPr>
+          <p:cNvPr id="5" name="TextBox 4"/>
           <p:cNvSpPr txBox="1"/>
           <p:nvPr/>
         </p:nvSpPr>
         <p:spPr>
           <a:xfrm>
-            <a:off x="822960" y="2194560"/>
+            <a:off x="822960" y="2286000"/>
             <a:ext cx="10515600" cy="2011680"/>
           </a:xfrm>
           <a:prstGeom prst="rect">
@@ -5396,7 +5507,7 @@
       </p:sp>
       <p:sp>
         <p:nvSpPr>
-          <p:cNvPr id="5" name="TextBox 4"/>
+          <p:cNvPr id="6" name="TextBox 5"/>
           <p:cNvSpPr txBox="1"/>
           <p:nvPr/>
         </p:nvSpPr>
@@ -5520,7 +5631,7 @@
                 </a:solidFill>
                 <a:latin typeface="Montserrat"/>
               </a:rPr>
-              <a:t>010 / 024</a:t>
+              <a:t>010 / 025</a:t>
             </a:r>
           </a:p>
         </p:txBody>
@@ -5568,7 +5679,7 @@
         <p:spPr>
           <a:xfrm>
             <a:off x="822960" y="457200"/>
-            <a:ext cx="8229600" cy="365760"/>
+            <a:ext cx="10058400" cy="365760"/>
           </a:xfrm>
           <a:prstGeom prst="rect">
             <a:avLst/>
@@ -5582,13 +5693,13 @@
           <a:lstStyle/>
           <a:p>
             <a:r>
-              <a:rPr sz="1200" b="1" i="0">
-                <a:solidFill>
-                  <a:srgbClr val="64748B"/>
-                </a:solidFill>
-                <a:latin typeface="Montserrat"/>
-              </a:rPr>
-              <a:t>CENTRALIZACIÓN · GENERALIDADES</a:t>
+              <a:rPr sz="1300" b="1" i="0">
+                <a:solidFill>
+                  <a:srgbClr val="E8801A"/>
+                </a:solidFill>
+                <a:latin typeface="Montserrat"/>
+              </a:rPr>
+              <a:t>EDIFICIO YA CONSTRUIDO</a:t>
             </a:r>
           </a:p>
         </p:txBody>
@@ -5616,26 +5727,70 @@
           <a:lstStyle/>
           <a:p>
             <a:r>
-              <a:rPr sz="2700" b="1" i="0">
+              <a:rPr sz="2800" b="1" i="0">
                 <a:solidFill>
                   <a:srgbClr val="1E2761"/>
                 </a:solidFill>
                 <a:latin typeface="Montserrat"/>
               </a:rPr>
-              <a:t>Total o parcial</a:t>
-            </a:r>
-          </a:p>
-        </p:txBody>
-      </p:sp>
-      <p:sp>
-        <p:nvSpPr>
-          <p:cNvPr id="7" name="TextBox 6"/>
+              <a:t>El orden de preferencia</a:t>
+            </a:r>
+          </a:p>
+        </p:txBody>
+      </p:sp>
+      <p:sp>
+        <p:nvSpPr>
+          <p:cNvPr id="7" name="Rounded Rectangle 6"/>
+          <p:cNvSpPr/>
+          <p:nvPr/>
+        </p:nvSpPr>
+        <p:spPr>
+          <a:xfrm>
+            <a:off x="868680" y="1627632"/>
+            <a:ext cx="2011680" cy="73152"/>
+          </a:xfrm>
+          <a:prstGeom prst="roundRect">
+            <a:avLst/>
+          </a:prstGeom>
+          <a:solidFill>
+            <a:srgbClr val="E8801A"/>
+          </a:solidFill>
+          <a:ln>
+            <a:noFill/>
+          </a:ln>
+          <a:effectLst/>
+        </p:spPr>
+        <p:style>
+          <a:lnRef idx="1">
+            <a:schemeClr val="accent1"/>
+          </a:lnRef>
+          <a:fillRef idx="3">
+            <a:schemeClr val="accent1"/>
+          </a:fillRef>
+          <a:effectRef idx="2">
+            <a:schemeClr val="accent1"/>
+          </a:effectRef>
+          <a:fontRef idx="minor">
+            <a:schemeClr val="lt1"/>
+          </a:fontRef>
+        </p:style>
+        <p:txBody>
+          <a:bodyPr rtlCol="0" anchor="ctr"/>
+          <a:lstStyle/>
+          <a:p>
+            <a:pPr algn="ctr"/>
+          </a:p>
+        </p:txBody>
+      </p:sp>
+      <p:sp>
+        <p:nvSpPr>
+          <p:cNvPr id="8" name="TextBox 7"/>
           <p:cNvSpPr txBox="1"/>
           <p:nvPr/>
         </p:nvSpPr>
         <p:spPr>
           <a:xfrm>
-            <a:off x="822960" y="1920240"/>
+            <a:off x="822960" y="1965960"/>
             <a:ext cx="4983480" cy="4206240"/>
           </a:xfrm>
           <a:prstGeom prst="rect">
@@ -5651,17 +5806,17 @@
           <a:p>
             <a:pPr>
               <a:spcAft>
-                <a:spcPts val="1000"/>
+                <a:spcPts val="1100"/>
               </a:spcAft>
             </a:pPr>
             <a:r>
               <a:rPr sz="1600" b="1" i="0">
                 <a:solidFill>
-                  <a:srgbClr val="2E3A80"/>
-                </a:solidFill>
-                <a:latin typeface="Montserrat"/>
-              </a:rPr>
-              <a:t>•  </a:t>
+                  <a:srgbClr val="E8801A"/>
+                </a:solidFill>
+                <a:latin typeface="Montserrat"/>
+              </a:rPr>
+              <a:t>▸  </a:t>
             </a:r>
             <a:r>
               <a:rPr sz="1600" b="0" i="0">
@@ -5670,23 +5825,23 @@
                 </a:solidFill>
                 <a:latin typeface="Montserrat"/>
               </a:rPr>
-              <a:t>Total: local técnico o armario</a:t>
+              <a:t>1º centralizado en zona común</a:t>
             </a:r>
           </a:p>
           <a:p>
             <a:pPr>
               <a:spcAft>
-                <a:spcPts val="1000"/>
+                <a:spcPts val="1100"/>
               </a:spcAft>
             </a:pPr>
             <a:r>
               <a:rPr sz="1600" b="1" i="0">
                 <a:solidFill>
-                  <a:srgbClr val="2E3A80"/>
-                </a:solidFill>
-                <a:latin typeface="Montserrat"/>
-              </a:rPr>
-              <a:t>•  </a:t>
+                  <a:srgbClr val="E8801A"/>
+                </a:solidFill>
+                <a:latin typeface="Montserrat"/>
+              </a:rPr>
+              <a:t>▸  </a:t>
             </a:r>
             <a:r>
               <a:rPr sz="1600" b="0" i="0">
@@ -5695,23 +5850,23 @@
                 </a:solidFill>
                 <a:latin typeface="Montserrat"/>
               </a:rPr>
-              <a:t>Parcial: también conducto en rellano</a:t>
+              <a:t>2º interior, llaves accesibles (grado 2)</a:t>
             </a:r>
           </a:p>
           <a:p>
             <a:pPr>
               <a:spcAft>
-                <a:spcPts val="1000"/>
+                <a:spcPts val="1100"/>
               </a:spcAft>
             </a:pPr>
             <a:r>
               <a:rPr sz="1600" b="1" i="0">
                 <a:solidFill>
-                  <a:srgbClr val="2E3A80"/>
-                </a:solidFill>
-                <a:latin typeface="Montserrat"/>
-              </a:rPr>
-              <a:t>•  </a:t>
+                  <a:srgbClr val="E8801A"/>
+                </a:solidFill>
+                <a:latin typeface="Montserrat"/>
+              </a:rPr>
+              <a:t>▸  </a:t>
             </a:r>
             <a:r>
               <a:rPr sz="1600" b="0" i="0">
@@ -5720,14 +5875,14 @@
                 </a:solidFill>
                 <a:latin typeface="Montserrat"/>
               </a:rPr>
-              <a:t>Accesible desde zona común</a:t>
-            </a:r>
-          </a:p>
-        </p:txBody>
-      </p:sp>
-      <p:sp>
-        <p:nvSpPr>
-          <p:cNvPr id="8" name="imgph" descr="IMGQ:gas meter cabinet with lock in building"/>
+              <a:t>3º autorización expresa y obturador</a:t>
+            </a:r>
+          </a:p>
+        </p:txBody>
+      </p:sp>
+      <p:sp>
+        <p:nvSpPr>
+          <p:cNvPr id="9" name="imgph" descr="IMGQ:gas meter inside kitchen cupboard"/>
           <p:cNvSpPr/>
           <p:nvPr/>
         </p:nvSpPr>
@@ -5773,7 +5928,7 @@
       </p:sp>
       <p:sp>
         <p:nvSpPr>
-          <p:cNvPr id="9" name="TextBox 8"/>
+          <p:cNvPr id="10" name="TextBox 9"/>
           <p:cNvSpPr txBox="1"/>
           <p:nvPr/>
         </p:nvSpPr>
@@ -5813,7 +5968,7 @@
                 </a:solidFill>
                 <a:latin typeface="Montserrat"/>
               </a:rPr>
-              <a:t>gas meter cabinet with lock in building</a:t>
+              <a:t>gas meter inside kitchen cupboard</a:t>
             </a:r>
           </a:p>
         </p:txBody>
@@ -5910,7 +6065,7 @@
                 </a:solidFill>
                 <a:latin typeface="Montserrat"/>
               </a:rPr>
-              <a:t>011 / 024</a:t>
+              <a:t>011 / 025</a:t>
             </a:r>
           </a:p>
         </p:txBody>
@@ -5958,7 +6113,7 @@
         <p:spPr>
           <a:xfrm>
             <a:off x="822960" y="457200"/>
-            <a:ext cx="8229600" cy="365760"/>
+            <a:ext cx="10058400" cy="365760"/>
           </a:xfrm>
           <a:prstGeom prst="rect">
             <a:avLst/>
@@ -5972,13 +6127,13 @@
           <a:lstStyle/>
           <a:p>
             <a:r>
-              <a:rPr sz="1200" b="1" i="0">
-                <a:solidFill>
-                  <a:srgbClr val="64748B"/>
-                </a:solidFill>
-                <a:latin typeface="Montserrat"/>
-              </a:rPr>
-              <a:t>CENTRALIZACIÓN · PUERTA</a:t>
+              <a:rPr sz="1300" b="1" i="0">
+                <a:solidFill>
+                  <a:srgbClr val="E8801A"/>
+                </a:solidFill>
+                <a:latin typeface="Montserrat"/>
+              </a:rPr>
+              <a:t>CENTRALIZACIÓN · GENERALIDADES</a:t>
             </a:r>
           </a:p>
         </p:txBody>
@@ -6006,26 +6161,70 @@
           <a:lstStyle/>
           <a:p>
             <a:r>
-              <a:rPr sz="2700" b="1" i="0">
+              <a:rPr sz="2800" b="1" i="0">
                 <a:solidFill>
                   <a:srgbClr val="1E2761"/>
                 </a:solidFill>
                 <a:latin typeface="Montserrat"/>
               </a:rPr>
-              <a:t>La puerta que no te encierra</a:t>
-            </a:r>
-          </a:p>
-        </p:txBody>
-      </p:sp>
-      <p:sp>
-        <p:nvSpPr>
-          <p:cNvPr id="7" name="TextBox 6"/>
+              <a:t>Total o parcial</a:t>
+            </a:r>
+          </a:p>
+        </p:txBody>
+      </p:sp>
+      <p:sp>
+        <p:nvSpPr>
+          <p:cNvPr id="7" name="Rounded Rectangle 6"/>
+          <p:cNvSpPr/>
+          <p:nvPr/>
+        </p:nvSpPr>
+        <p:spPr>
+          <a:xfrm>
+            <a:off x="868680" y="1627632"/>
+            <a:ext cx="2011680" cy="73152"/>
+          </a:xfrm>
+          <a:prstGeom prst="roundRect">
+            <a:avLst/>
+          </a:prstGeom>
+          <a:solidFill>
+            <a:srgbClr val="E8801A"/>
+          </a:solidFill>
+          <a:ln>
+            <a:noFill/>
+          </a:ln>
+          <a:effectLst/>
+        </p:spPr>
+        <p:style>
+          <a:lnRef idx="1">
+            <a:schemeClr val="accent1"/>
+          </a:lnRef>
+          <a:fillRef idx="3">
+            <a:schemeClr val="accent1"/>
+          </a:fillRef>
+          <a:effectRef idx="2">
+            <a:schemeClr val="accent1"/>
+          </a:effectRef>
+          <a:fontRef idx="minor">
+            <a:schemeClr val="lt1"/>
+          </a:fontRef>
+        </p:style>
+        <p:txBody>
+          <a:bodyPr rtlCol="0" anchor="ctr"/>
+          <a:lstStyle/>
+          <a:p>
+            <a:pPr algn="ctr"/>
+          </a:p>
+        </p:txBody>
+      </p:sp>
+      <p:sp>
+        <p:nvSpPr>
+          <p:cNvPr id="8" name="TextBox 7"/>
           <p:cNvSpPr txBox="1"/>
           <p:nvPr/>
         </p:nvSpPr>
         <p:spPr>
           <a:xfrm>
-            <a:off x="822960" y="1920240"/>
+            <a:off x="822960" y="1965960"/>
             <a:ext cx="4983480" cy="4206240"/>
           </a:xfrm>
           <a:prstGeom prst="rect">
@@ -6041,17 +6240,17 @@
           <a:p>
             <a:pPr>
               <a:spcAft>
-                <a:spcPts val="1000"/>
+                <a:spcPts val="1100"/>
               </a:spcAft>
             </a:pPr>
             <a:r>
               <a:rPr sz="1600" b="1" i="0">
                 <a:solidFill>
-                  <a:srgbClr val="2E3A80"/>
-                </a:solidFill>
-                <a:latin typeface="Montserrat"/>
-              </a:rPr>
-              <a:t>•  </a:t>
+                  <a:srgbClr val="E8801A"/>
+                </a:solidFill>
+                <a:latin typeface="Montserrat"/>
+              </a:rPr>
+              <a:t>▸  </a:t>
             </a:r>
             <a:r>
               <a:rPr sz="1600" b="0" i="0">
@@ -6060,23 +6259,23 @@
                 </a:solidFill>
                 <a:latin typeface="Montserrat"/>
               </a:rPr>
-              <a:t>Abre hacia afuera</a:t>
+              <a:t>Total: local técnico o armario</a:t>
             </a:r>
           </a:p>
           <a:p>
             <a:pPr>
               <a:spcAft>
-                <a:spcPts val="1000"/>
+                <a:spcPts val="1100"/>
               </a:spcAft>
             </a:pPr>
             <a:r>
               <a:rPr sz="1600" b="1" i="0">
                 <a:solidFill>
-                  <a:srgbClr val="2E3A80"/>
-                </a:solidFill>
-                <a:latin typeface="Montserrat"/>
-              </a:rPr>
-              <a:t>•  </a:t>
+                  <a:srgbClr val="E8801A"/>
+                </a:solidFill>
+                <a:latin typeface="Montserrat"/>
+              </a:rPr>
+              <a:t>▸  </a:t>
             </a:r>
             <a:r>
               <a:rPr sz="1600" b="0" i="0">
@@ -6085,23 +6284,23 @@
                 </a:solidFill>
                 <a:latin typeface="Montserrat"/>
               </a:rPr>
-              <a:t>Cerradura con llave normalizada</a:t>
+              <a:t>Parcial: también conducto en rellano</a:t>
             </a:r>
           </a:p>
           <a:p>
             <a:pPr>
               <a:spcAft>
-                <a:spcPts val="1000"/>
+                <a:spcPts val="1100"/>
               </a:spcAft>
             </a:pPr>
             <a:r>
               <a:rPr sz="1600" b="1" i="0">
                 <a:solidFill>
-                  <a:srgbClr val="2E3A80"/>
-                </a:solidFill>
-                <a:latin typeface="Montserrat"/>
-              </a:rPr>
-              <a:t>•  </a:t>
+                  <a:srgbClr val="E8801A"/>
+                </a:solidFill>
+                <a:latin typeface="Montserrat"/>
+              </a:rPr>
+              <a:t>▸  </a:t>
             </a:r>
             <a:r>
               <a:rPr sz="1600" b="0" i="0">
@@ -6110,14 +6309,14 @@
                 </a:solidFill>
                 <a:latin typeface="Montserrat"/>
               </a:rPr>
-              <a:t>Local técnico: abre por dentro sin llave</a:t>
-            </a:r>
-          </a:p>
-        </p:txBody>
-      </p:sp>
-      <p:sp>
-        <p:nvSpPr>
-          <p:cNvPr id="8" name="imgph" descr="IMGQ:metal cabinet door with lock outward"/>
+              <a:t>Accesible desde zona común</a:t>
+            </a:r>
+          </a:p>
+        </p:txBody>
+      </p:sp>
+      <p:sp>
+        <p:nvSpPr>
+          <p:cNvPr id="9" name="imgph" descr="IMGQ:gas meter cabinet with lock in building"/>
           <p:cNvSpPr/>
           <p:nvPr/>
         </p:nvSpPr>
@@ -6163,7 +6362,7 @@
       </p:sp>
       <p:sp>
         <p:nvSpPr>
-          <p:cNvPr id="9" name="TextBox 8"/>
+          <p:cNvPr id="10" name="TextBox 9"/>
           <p:cNvSpPr txBox="1"/>
           <p:nvPr/>
         </p:nvSpPr>
@@ -6203,7 +6402,7 @@
                 </a:solidFill>
                 <a:latin typeface="Montserrat"/>
               </a:rPr>
-              <a:t>metal cabinet door with lock outward</a:t>
+              <a:t>gas meter cabinet with lock in building</a:t>
             </a:r>
           </a:p>
         </p:txBody>
@@ -6300,7 +6499,7 @@
                 </a:solidFill>
                 <a:latin typeface="Montserrat"/>
               </a:rPr>
-              <a:t>012 / 024</a:t>
+              <a:t>012 / 025</a:t>
             </a:r>
           </a:p>
         </p:txBody>
@@ -6348,7 +6547,7 @@
         <p:spPr>
           <a:xfrm>
             <a:off x="822960" y="457200"/>
-            <a:ext cx="8229600" cy="365760"/>
+            <a:ext cx="10058400" cy="365760"/>
           </a:xfrm>
           <a:prstGeom prst="rect">
             <a:avLst/>
@@ -6362,13 +6561,13 @@
           <a:lstStyle/>
           <a:p>
             <a:r>
-              <a:rPr sz="1200" b="1" i="0">
-                <a:solidFill>
-                  <a:srgbClr val="64748B"/>
-                </a:solidFill>
-                <a:latin typeface="Montserrat"/>
-              </a:rPr>
-              <a:t>CENTRALIZACIÓN · IDENTIFICACIÓN</a:t>
+              <a:rPr sz="1300" b="1" i="0">
+                <a:solidFill>
+                  <a:srgbClr val="E8801A"/>
+                </a:solidFill>
+                <a:latin typeface="Montserrat"/>
+              </a:rPr>
+              <a:t>CENTRALIZACIÓN · PUERTA</a:t>
             </a:r>
           </a:p>
         </p:txBody>
@@ -6396,26 +6595,70 @@
           <a:lstStyle/>
           <a:p>
             <a:r>
-              <a:rPr sz="2700" b="1" i="0">
+              <a:rPr sz="2800" b="1" i="0">
                 <a:solidFill>
                   <a:srgbClr val="1E2761"/>
                 </a:solidFill>
                 <a:latin typeface="Montserrat"/>
               </a:rPr>
-              <a:t>Cada llave, su placa</a:t>
-            </a:r>
-          </a:p>
-        </p:txBody>
-      </p:sp>
-      <p:sp>
-        <p:nvSpPr>
-          <p:cNvPr id="7" name="TextBox 6"/>
+              <a:t>La puerta que no te encierra</a:t>
+            </a:r>
+          </a:p>
+        </p:txBody>
+      </p:sp>
+      <p:sp>
+        <p:nvSpPr>
+          <p:cNvPr id="7" name="Rounded Rectangle 6"/>
+          <p:cNvSpPr/>
+          <p:nvPr/>
+        </p:nvSpPr>
+        <p:spPr>
+          <a:xfrm>
+            <a:off x="868680" y="1627632"/>
+            <a:ext cx="2011680" cy="73152"/>
+          </a:xfrm>
+          <a:prstGeom prst="roundRect">
+            <a:avLst/>
+          </a:prstGeom>
+          <a:solidFill>
+            <a:srgbClr val="E8801A"/>
+          </a:solidFill>
+          <a:ln>
+            <a:noFill/>
+          </a:ln>
+          <a:effectLst/>
+        </p:spPr>
+        <p:style>
+          <a:lnRef idx="1">
+            <a:schemeClr val="accent1"/>
+          </a:lnRef>
+          <a:fillRef idx="3">
+            <a:schemeClr val="accent1"/>
+          </a:fillRef>
+          <a:effectRef idx="2">
+            <a:schemeClr val="accent1"/>
+          </a:effectRef>
+          <a:fontRef idx="minor">
+            <a:schemeClr val="lt1"/>
+          </a:fontRef>
+        </p:style>
+        <p:txBody>
+          <a:bodyPr rtlCol="0" anchor="ctr"/>
+          <a:lstStyle/>
+          <a:p>
+            <a:pPr algn="ctr"/>
+          </a:p>
+        </p:txBody>
+      </p:sp>
+      <p:sp>
+        <p:nvSpPr>
+          <p:cNvPr id="8" name="TextBox 7"/>
           <p:cNvSpPr txBox="1"/>
           <p:nvPr/>
         </p:nvSpPr>
         <p:spPr>
           <a:xfrm>
-            <a:off x="822960" y="1920240"/>
+            <a:off x="822960" y="1965960"/>
             <a:ext cx="4983480" cy="4206240"/>
           </a:xfrm>
           <a:prstGeom prst="rect">
@@ -6431,17 +6674,17 @@
           <a:p>
             <a:pPr>
               <a:spcAft>
-                <a:spcPts val="1000"/>
+                <a:spcPts val="1100"/>
               </a:spcAft>
             </a:pPr>
             <a:r>
               <a:rPr sz="1600" b="1" i="0">
                 <a:solidFill>
-                  <a:srgbClr val="2E3A80"/>
-                </a:solidFill>
-                <a:latin typeface="Montserrat"/>
-              </a:rPr>
-              <a:t>•  </a:t>
+                  <a:srgbClr val="E8801A"/>
+                </a:solidFill>
+                <a:latin typeface="Montserrat"/>
+              </a:rPr>
+              <a:t>▸  </a:t>
             </a:r>
             <a:r>
               <a:rPr sz="1600" b="0" i="0">
@@ -6450,23 +6693,23 @@
                 </a:solidFill>
                 <a:latin typeface="Montserrat"/>
               </a:rPr>
-              <a:t>Placa junto a cada llave</a:t>
+              <a:t>Abre hacia afuera</a:t>
             </a:r>
           </a:p>
           <a:p>
             <a:pPr>
               <a:spcAft>
-                <a:spcPts val="1000"/>
+                <a:spcPts val="1100"/>
               </a:spcAft>
             </a:pPr>
             <a:r>
               <a:rPr sz="1600" b="1" i="0">
                 <a:solidFill>
-                  <a:srgbClr val="2E3A80"/>
-                </a:solidFill>
-                <a:latin typeface="Montserrat"/>
-              </a:rPr>
-              <a:t>•  </a:t>
+                  <a:srgbClr val="E8801A"/>
+                </a:solidFill>
+                <a:latin typeface="Montserrat"/>
+              </a:rPr>
+              <a:t>▸  </a:t>
             </a:r>
             <a:r>
               <a:rPr sz="1600" b="0" i="0">
@@ -6475,23 +6718,23 @@
                 </a:solidFill>
                 <a:latin typeface="Montserrat"/>
               </a:rPr>
-              <a:t>Grabada, indeleble, con piso y puerta</a:t>
+              <a:t>Cerradura con llave normalizada</a:t>
             </a:r>
           </a:p>
           <a:p>
             <a:pPr>
               <a:spcAft>
-                <a:spcPts val="1000"/>
+                <a:spcPts val="1100"/>
               </a:spcAft>
             </a:pPr>
             <a:r>
               <a:rPr sz="1600" b="1" i="0">
                 <a:solidFill>
-                  <a:srgbClr val="2E3A80"/>
-                </a:solidFill>
-                <a:latin typeface="Montserrat"/>
-              </a:rPr>
-              <a:t>•  </a:t>
+                  <a:srgbClr val="E8801A"/>
+                </a:solidFill>
+                <a:latin typeface="Montserrat"/>
+              </a:rPr>
+              <a:t>▸  </a:t>
             </a:r>
             <a:r>
               <a:rPr sz="1600" b="0" i="0">
@@ -6500,14 +6743,14 @@
                 </a:solidFill>
                 <a:latin typeface="Montserrat"/>
               </a:rPr>
-              <a:t>Metálica o de plástico rígido</a:t>
-            </a:r>
-          </a:p>
-        </p:txBody>
-      </p:sp>
-      <p:sp>
-        <p:nvSpPr>
-          <p:cNvPr id="8" name="imgph" descr="IMGQ:identification plate on gas valve"/>
+              <a:t>Local técnico: abre por dentro sin llave</a:t>
+            </a:r>
+          </a:p>
+        </p:txBody>
+      </p:sp>
+      <p:sp>
+        <p:nvSpPr>
+          <p:cNvPr id="9" name="imgph" descr="IMGQ:metal cabinet door with lock outward"/>
           <p:cNvSpPr/>
           <p:nvPr/>
         </p:nvSpPr>
@@ -6553,7 +6796,7 @@
       </p:sp>
       <p:sp>
         <p:nvSpPr>
-          <p:cNvPr id="9" name="TextBox 8"/>
+          <p:cNvPr id="10" name="TextBox 9"/>
           <p:cNvSpPr txBox="1"/>
           <p:nvPr/>
         </p:nvSpPr>
@@ -6593,7 +6836,7 @@
                 </a:solidFill>
                 <a:latin typeface="Montserrat"/>
               </a:rPr>
-              <a:t>identification plate on gas valve</a:t>
+              <a:t>metal cabinet door with lock outward</a:t>
             </a:r>
           </a:p>
         </p:txBody>
@@ -6690,7 +6933,7 @@
                 </a:solidFill>
                 <a:latin typeface="Montserrat"/>
               </a:rPr>
-              <a:t>013 / 024</a:t>
+              <a:t>013 / 025</a:t>
             </a:r>
           </a:p>
         </p:txBody>
@@ -6738,7 +6981,7 @@
         <p:spPr>
           <a:xfrm>
             <a:off x="822960" y="457200"/>
-            <a:ext cx="8229600" cy="365760"/>
+            <a:ext cx="10058400" cy="365760"/>
           </a:xfrm>
           <a:prstGeom prst="rect">
             <a:avLst/>
@@ -6752,13 +6995,13 @@
           <a:lstStyle/>
           <a:p>
             <a:r>
-              <a:rPr sz="1200" b="1" i="0">
-                <a:solidFill>
-                  <a:srgbClr val="64748B"/>
-                </a:solidFill>
-                <a:latin typeface="Montserrat"/>
-              </a:rPr>
-              <a:t>CENTRALIZACIÓN · CARTELES</a:t>
+              <a:rPr sz="1300" b="1" i="0">
+                <a:solidFill>
+                  <a:srgbClr val="E8801A"/>
+                </a:solidFill>
+                <a:latin typeface="Montserrat"/>
+              </a:rPr>
+              <a:t>CENTRALIZACIÓN · IDENTIFICACIÓN</a:t>
             </a:r>
           </a:p>
         </p:txBody>
@@ -6786,26 +7029,70 @@
           <a:lstStyle/>
           <a:p>
             <a:r>
-              <a:rPr sz="2700" b="1" i="0">
+              <a:rPr sz="2800" b="1" i="0">
                 <a:solidFill>
                   <a:srgbClr val="1E2761"/>
                 </a:solidFill>
                 <a:latin typeface="Montserrat"/>
               </a:rPr>
-              <a:t>Los carteles obligatorios</a:t>
-            </a:r>
-          </a:p>
-        </p:txBody>
-      </p:sp>
-      <p:sp>
-        <p:nvSpPr>
-          <p:cNvPr id="7" name="TextBox 6"/>
+              <a:t>Cada llave, su placa</a:t>
+            </a:r>
+          </a:p>
+        </p:txBody>
+      </p:sp>
+      <p:sp>
+        <p:nvSpPr>
+          <p:cNvPr id="7" name="Rounded Rectangle 6"/>
+          <p:cNvSpPr/>
+          <p:nvPr/>
+        </p:nvSpPr>
+        <p:spPr>
+          <a:xfrm>
+            <a:off x="868680" y="1627632"/>
+            <a:ext cx="2011680" cy="73152"/>
+          </a:xfrm>
+          <a:prstGeom prst="roundRect">
+            <a:avLst/>
+          </a:prstGeom>
+          <a:solidFill>
+            <a:srgbClr val="E8801A"/>
+          </a:solidFill>
+          <a:ln>
+            <a:noFill/>
+          </a:ln>
+          <a:effectLst/>
+        </p:spPr>
+        <p:style>
+          <a:lnRef idx="1">
+            <a:schemeClr val="accent1"/>
+          </a:lnRef>
+          <a:fillRef idx="3">
+            <a:schemeClr val="accent1"/>
+          </a:fillRef>
+          <a:effectRef idx="2">
+            <a:schemeClr val="accent1"/>
+          </a:effectRef>
+          <a:fontRef idx="minor">
+            <a:schemeClr val="lt1"/>
+          </a:fontRef>
+        </p:style>
+        <p:txBody>
+          <a:bodyPr rtlCol="0" anchor="ctr"/>
+          <a:lstStyle/>
+          <a:p>
+            <a:pPr algn="ctr"/>
+          </a:p>
+        </p:txBody>
+      </p:sp>
+      <p:sp>
+        <p:nvSpPr>
+          <p:cNvPr id="8" name="TextBox 7"/>
           <p:cNvSpPr txBox="1"/>
           <p:nvPr/>
         </p:nvSpPr>
         <p:spPr>
           <a:xfrm>
-            <a:off x="822960" y="1920240"/>
+            <a:off x="822960" y="1965960"/>
             <a:ext cx="4983480" cy="4206240"/>
           </a:xfrm>
           <a:prstGeom prst="rect">
@@ -6821,17 +7108,17 @@
           <a:p>
             <a:pPr>
               <a:spcAft>
-                <a:spcPts val="1000"/>
+                <a:spcPts val="1100"/>
               </a:spcAft>
             </a:pPr>
             <a:r>
               <a:rPr sz="1600" b="1" i="0">
                 <a:solidFill>
-                  <a:srgbClr val="2E3A80"/>
-                </a:solidFill>
-                <a:latin typeface="Montserrat"/>
-              </a:rPr>
-              <a:t>•  </a:t>
+                  <a:srgbClr val="E8801A"/>
+                </a:solidFill>
+                <a:latin typeface="Montserrat"/>
+              </a:rPr>
+              <a:t>▸  </a:t>
             </a:r>
             <a:r>
               <a:rPr sz="1600" b="0" i="0">
@@ -6840,23 +7127,23 @@
                 </a:solidFill>
                 <a:latin typeface="Montserrat"/>
               </a:rPr>
-              <a:t>Interior: normas de maniobra</a:t>
+              <a:t>Placa junto a cada llave</a:t>
             </a:r>
           </a:p>
           <a:p>
             <a:pPr>
               <a:spcAft>
-                <a:spcPts val="1000"/>
+                <a:spcPts val="1100"/>
               </a:spcAft>
             </a:pPr>
             <a:r>
               <a:rPr sz="1600" b="1" i="0">
                 <a:solidFill>
-                  <a:srgbClr val="2E3A80"/>
-                </a:solidFill>
-                <a:latin typeface="Montserrat"/>
-              </a:rPr>
-              <a:t>•  </a:t>
+                  <a:srgbClr val="E8801A"/>
+                </a:solidFill>
+                <a:latin typeface="Montserrat"/>
+              </a:rPr>
+              <a:t>▸  </a:t>
             </a:r>
             <a:r>
               <a:rPr sz="1600" b="0" i="0">
@@ -6865,23 +7152,23 @@
                 </a:solidFill>
                 <a:latin typeface="Montserrat"/>
               </a:rPr>
-              <a:t>Obligatorio con más de 2 contadores</a:t>
+              <a:t>Grabada, indeleble, con piso y puerta</a:t>
             </a:r>
           </a:p>
           <a:p>
             <a:pPr>
               <a:spcAft>
-                <a:spcPts val="1000"/>
+                <a:spcPts val="1100"/>
               </a:spcAft>
             </a:pPr>
             <a:r>
               <a:rPr sz="1600" b="1" i="0">
                 <a:solidFill>
-                  <a:srgbClr val="2E3A80"/>
-                </a:solidFill>
-                <a:latin typeface="Montserrat"/>
-              </a:rPr>
-              <a:t>•  </a:t>
+                  <a:srgbClr val="E8801A"/>
+                </a:solidFill>
+                <a:latin typeface="Montserrat"/>
+              </a:rPr>
+              <a:t>▸  </a:t>
             </a:r>
             <a:r>
               <a:rPr sz="1600" b="0" i="0">
@@ -6890,14 +7177,14 @@
                 </a:solidFill>
                 <a:latin typeface="Montserrat"/>
               </a:rPr>
-              <a:t>Exterior: «Contadores de gas»</a:t>
-            </a:r>
-          </a:p>
-        </p:txBody>
-      </p:sp>
-      <p:sp>
-        <p:nvSpPr>
-          <p:cNvPr id="8" name="imgph" descr="IMGQ:no smoking warning sign on gas cabinet"/>
+              <a:t>Metálica o de plástico rígido</a:t>
+            </a:r>
+          </a:p>
+        </p:txBody>
+      </p:sp>
+      <p:sp>
+        <p:nvSpPr>
+          <p:cNvPr id="9" name="imgph" descr="IMGQ:identification plate on gas valve"/>
           <p:cNvSpPr/>
           <p:nvPr/>
         </p:nvSpPr>
@@ -6943,7 +7230,7 @@
       </p:sp>
       <p:sp>
         <p:nvSpPr>
-          <p:cNvPr id="9" name="TextBox 8"/>
+          <p:cNvPr id="10" name="TextBox 9"/>
           <p:cNvSpPr txBox="1"/>
           <p:nvPr/>
         </p:nvSpPr>
@@ -6983,7 +7270,7 @@
                 </a:solidFill>
                 <a:latin typeface="Montserrat"/>
               </a:rPr>
-              <a:t>no smoking warning sign on gas cabinet</a:t>
+              <a:t>identification plate on gas valve</a:t>
             </a:r>
           </a:p>
         </p:txBody>
@@ -7080,7 +7367,7 @@
                 </a:solidFill>
                 <a:latin typeface="Montserrat"/>
               </a:rPr>
-              <a:t>014 / 024</a:t>
+              <a:t>014 / 025</a:t>
             </a:r>
           </a:p>
         </p:txBody>
@@ -7128,7 +7415,7 @@
         <p:spPr>
           <a:xfrm>
             <a:off x="822960" y="457200"/>
-            <a:ext cx="8229600" cy="365760"/>
+            <a:ext cx="10058400" cy="365760"/>
           </a:xfrm>
           <a:prstGeom prst="rect">
             <a:avLst/>
@@ -7142,13 +7429,13 @@
           <a:lstStyle/>
           <a:p>
             <a:r>
-              <a:rPr sz="1200" b="1" i="0">
-                <a:solidFill>
-                  <a:srgbClr val="64748B"/>
-                </a:solidFill>
-                <a:latin typeface="Montserrat"/>
-              </a:rPr>
-              <a:t>CENTRALIZACIÓN · CONDUCTO TÉCNICO</a:t>
+              <a:rPr sz="1300" b="1" i="0">
+                <a:solidFill>
+                  <a:srgbClr val="E8801A"/>
+                </a:solidFill>
+                <a:latin typeface="Montserrat"/>
+              </a:rPr>
+              <a:t>CENTRALIZACIÓN · CARTELES</a:t>
             </a:r>
           </a:p>
         </p:txBody>
@@ -7176,26 +7463,70 @@
           <a:lstStyle/>
           <a:p>
             <a:r>
-              <a:rPr sz="2700" b="1" i="0">
+              <a:rPr sz="2800" b="1" i="0">
                 <a:solidFill>
                   <a:srgbClr val="1E2761"/>
                 </a:solidFill>
                 <a:latin typeface="Montserrat"/>
               </a:rPr>
-              <a:t>El patinillo vertical</a:t>
-            </a:r>
-          </a:p>
-        </p:txBody>
-      </p:sp>
-      <p:sp>
-        <p:nvSpPr>
-          <p:cNvPr id="7" name="TextBox 6"/>
+              <a:t>Los carteles obligatorios</a:t>
+            </a:r>
+          </a:p>
+        </p:txBody>
+      </p:sp>
+      <p:sp>
+        <p:nvSpPr>
+          <p:cNvPr id="7" name="Rounded Rectangle 6"/>
+          <p:cNvSpPr/>
+          <p:nvPr/>
+        </p:nvSpPr>
+        <p:spPr>
+          <a:xfrm>
+            <a:off x="868680" y="1627632"/>
+            <a:ext cx="2011680" cy="73152"/>
+          </a:xfrm>
+          <a:prstGeom prst="roundRect">
+            <a:avLst/>
+          </a:prstGeom>
+          <a:solidFill>
+            <a:srgbClr val="E8801A"/>
+          </a:solidFill>
+          <a:ln>
+            <a:noFill/>
+          </a:ln>
+          <a:effectLst/>
+        </p:spPr>
+        <p:style>
+          <a:lnRef idx="1">
+            <a:schemeClr val="accent1"/>
+          </a:lnRef>
+          <a:fillRef idx="3">
+            <a:schemeClr val="accent1"/>
+          </a:fillRef>
+          <a:effectRef idx="2">
+            <a:schemeClr val="accent1"/>
+          </a:effectRef>
+          <a:fontRef idx="minor">
+            <a:schemeClr val="lt1"/>
+          </a:fontRef>
+        </p:style>
+        <p:txBody>
+          <a:bodyPr rtlCol="0" anchor="ctr"/>
+          <a:lstStyle/>
+          <a:p>
+            <a:pPr algn="ctr"/>
+          </a:p>
+        </p:txBody>
+      </p:sp>
+      <p:sp>
+        <p:nvSpPr>
+          <p:cNvPr id="8" name="TextBox 7"/>
           <p:cNvSpPr txBox="1"/>
           <p:nvPr/>
         </p:nvSpPr>
         <p:spPr>
           <a:xfrm>
-            <a:off x="822960" y="1920240"/>
+            <a:off x="822960" y="1965960"/>
             <a:ext cx="4983480" cy="4206240"/>
           </a:xfrm>
           <a:prstGeom prst="rect">
@@ -7211,17 +7542,17 @@
           <a:p>
             <a:pPr>
               <a:spcAft>
-                <a:spcPts val="1000"/>
+                <a:spcPts val="1100"/>
               </a:spcAft>
             </a:pPr>
             <a:r>
               <a:rPr sz="1600" b="1" i="0">
                 <a:solidFill>
-                  <a:srgbClr val="2E3A80"/>
-                </a:solidFill>
-                <a:latin typeface="Montserrat"/>
-              </a:rPr>
-              <a:t>•  </a:t>
+                  <a:srgbClr val="E8801A"/>
+                </a:solidFill>
+                <a:latin typeface="Montserrat"/>
+              </a:rPr>
+              <a:t>▸  </a:t>
             </a:r>
             <a:r>
               <a:rPr sz="1600" b="0" i="0">
@@ -7230,23 +7561,23 @@
                 </a:solidFill>
                 <a:latin typeface="Montserrat"/>
               </a:rPr>
-              <a:t>Vertical y rectilíneo</a:t>
+              <a:t>Interior: normas de maniobra</a:t>
             </a:r>
           </a:p>
           <a:p>
             <a:pPr>
               <a:spcAft>
-                <a:spcPts val="1000"/>
+                <a:spcPts val="1100"/>
               </a:spcAft>
             </a:pPr>
             <a:r>
               <a:rPr sz="1600" b="1" i="0">
                 <a:solidFill>
-                  <a:srgbClr val="2E3A80"/>
-                </a:solidFill>
-                <a:latin typeface="Montserrat"/>
-              </a:rPr>
-              <a:t>•  </a:t>
+                  <a:srgbClr val="E8801A"/>
+                </a:solidFill>
+                <a:latin typeface="Montserrat"/>
+              </a:rPr>
+              <a:t>▸  </a:t>
             </a:r>
             <a:r>
               <a:rPr sz="1600" b="0" i="0">
@@ -7255,23 +7586,23 @@
                 </a:solidFill>
                 <a:latin typeface="Montserrat"/>
               </a:rPr>
-              <a:t>100 cm² libres al pasar cada forjado</a:t>
+              <a:t>Obligatorio con más de 2 contadores</a:t>
             </a:r>
           </a:p>
           <a:p>
             <a:pPr>
               <a:spcAft>
-                <a:spcPts val="1000"/>
+                <a:spcPts val="1100"/>
               </a:spcAft>
             </a:pPr>
             <a:r>
               <a:rPr sz="1600" b="1" i="0">
                 <a:solidFill>
-                  <a:srgbClr val="2E3A80"/>
-                </a:solidFill>
-                <a:latin typeface="Montserrat"/>
-              </a:rPr>
-              <a:t>•  </a:t>
+                  <a:srgbClr val="E8801A"/>
+                </a:solidFill>
+                <a:latin typeface="Montserrat"/>
+              </a:rPr>
+              <a:t>▸  </a:t>
             </a:r>
             <a:r>
               <a:rPr sz="1600" b="0" i="0">
@@ -7280,14 +7611,14 @@
                 </a:solidFill>
                 <a:latin typeface="Montserrat"/>
               </a:rPr>
-              <a:t>Más de 400 cm²: reja que aguante una persona</a:t>
-            </a:r>
-          </a:p>
-        </p:txBody>
-      </p:sp>
-      <p:sp>
-        <p:nvSpPr>
-          <p:cNvPr id="8" name="imgph" descr="IMGQ:vertical service shaft riser in building"/>
+              <a:t>Exterior: «Contadores de gas»</a:t>
+            </a:r>
+          </a:p>
+        </p:txBody>
+      </p:sp>
+      <p:sp>
+        <p:nvSpPr>
+          <p:cNvPr id="9" name="imgph" descr="IMGQ:no smoking warning sign on gas cabinet"/>
           <p:cNvSpPr/>
           <p:nvPr/>
         </p:nvSpPr>
@@ -7333,7 +7664,7 @@
       </p:sp>
       <p:sp>
         <p:nvSpPr>
-          <p:cNvPr id="9" name="TextBox 8"/>
+          <p:cNvPr id="10" name="TextBox 9"/>
           <p:cNvSpPr txBox="1"/>
           <p:nvPr/>
         </p:nvSpPr>
@@ -7373,7 +7704,7 @@
                 </a:solidFill>
                 <a:latin typeface="Montserrat"/>
               </a:rPr>
-              <a:t>vertical service shaft riser in building</a:t>
+              <a:t>no smoking warning sign on gas cabinet</a:t>
             </a:r>
           </a:p>
         </p:txBody>
@@ -7470,7 +7801,7 @@
                 </a:solidFill>
                 <a:latin typeface="Montserrat"/>
               </a:rPr>
-              <a:t>015 / 024</a:t>
+              <a:t>015 / 025</a:t>
             </a:r>
           </a:p>
         </p:txBody>
@@ -7518,7 +7849,7 @@
         <p:spPr>
           <a:xfrm>
             <a:off x="822960" y="457200"/>
-            <a:ext cx="8229600" cy="365760"/>
+            <a:ext cx="10058400" cy="365760"/>
           </a:xfrm>
           <a:prstGeom prst="rect">
             <a:avLst/>
@@ -7532,13 +7863,13 @@
           <a:lstStyle/>
           <a:p>
             <a:r>
-              <a:rPr sz="1200" b="1" i="0">
-                <a:solidFill>
-                  <a:srgbClr val="64748B"/>
-                </a:solidFill>
-                <a:latin typeface="Montserrat"/>
-              </a:rPr>
-              <a:t>VENTILACIÓN · ABERTURAS</a:t>
+              <a:rPr sz="1300" b="1" i="0">
+                <a:solidFill>
+                  <a:srgbClr val="E8801A"/>
+                </a:solidFill>
+                <a:latin typeface="Montserrat"/>
+              </a:rPr>
+              <a:t>CENTRALIZACIÓN · CONDUCTO TÉCNICO</a:t>
             </a:r>
           </a:p>
         </p:txBody>
@@ -7566,26 +7897,70 @@
           <a:lstStyle/>
           <a:p>
             <a:r>
-              <a:rPr sz="2700" b="1" i="0">
+              <a:rPr sz="2800" b="1" i="0">
                 <a:solidFill>
                   <a:srgbClr val="1E2761"/>
                 </a:solidFill>
                 <a:latin typeface="Montserrat"/>
               </a:rPr>
-              <a:t>Dos bocas: arriba y abajo</a:t>
-            </a:r>
-          </a:p>
-        </p:txBody>
-      </p:sp>
-      <p:sp>
-        <p:nvSpPr>
-          <p:cNvPr id="7" name="TextBox 6"/>
+              <a:t>El patinillo vertical</a:t>
+            </a:r>
+          </a:p>
+        </p:txBody>
+      </p:sp>
+      <p:sp>
+        <p:nvSpPr>
+          <p:cNvPr id="7" name="Rounded Rectangle 6"/>
+          <p:cNvSpPr/>
+          <p:nvPr/>
+        </p:nvSpPr>
+        <p:spPr>
+          <a:xfrm>
+            <a:off x="868680" y="1627632"/>
+            <a:ext cx="2011680" cy="73152"/>
+          </a:xfrm>
+          <a:prstGeom prst="roundRect">
+            <a:avLst/>
+          </a:prstGeom>
+          <a:solidFill>
+            <a:srgbClr val="E8801A"/>
+          </a:solidFill>
+          <a:ln>
+            <a:noFill/>
+          </a:ln>
+          <a:effectLst/>
+        </p:spPr>
+        <p:style>
+          <a:lnRef idx="1">
+            <a:schemeClr val="accent1"/>
+          </a:lnRef>
+          <a:fillRef idx="3">
+            <a:schemeClr val="accent1"/>
+          </a:fillRef>
+          <a:effectRef idx="2">
+            <a:schemeClr val="accent1"/>
+          </a:effectRef>
+          <a:fontRef idx="minor">
+            <a:schemeClr val="lt1"/>
+          </a:fontRef>
+        </p:style>
+        <p:txBody>
+          <a:bodyPr rtlCol="0" anchor="ctr"/>
+          <a:lstStyle/>
+          <a:p>
+            <a:pPr algn="ctr"/>
+          </a:p>
+        </p:txBody>
+      </p:sp>
+      <p:sp>
+        <p:nvSpPr>
+          <p:cNvPr id="8" name="TextBox 7"/>
           <p:cNvSpPr txBox="1"/>
           <p:nvPr/>
         </p:nvSpPr>
         <p:spPr>
           <a:xfrm>
-            <a:off x="822960" y="1920240"/>
+            <a:off x="822960" y="1965960"/>
             <a:ext cx="4983480" cy="4206240"/>
           </a:xfrm>
           <a:prstGeom prst="rect">
@@ -7601,17 +7976,17 @@
           <a:p>
             <a:pPr>
               <a:spcAft>
-                <a:spcPts val="1000"/>
+                <a:spcPts val="1100"/>
               </a:spcAft>
             </a:pPr>
             <a:r>
               <a:rPr sz="1600" b="1" i="0">
                 <a:solidFill>
-                  <a:srgbClr val="2E3A80"/>
-                </a:solidFill>
-                <a:latin typeface="Montserrat"/>
-              </a:rPr>
-              <a:t>•  </a:t>
+                  <a:srgbClr val="E8801A"/>
+                </a:solidFill>
+                <a:latin typeface="Montserrat"/>
+              </a:rPr>
+              <a:t>▸  </a:t>
             </a:r>
             <a:r>
               <a:rPr sz="1600" b="0" i="0">
@@ -7620,23 +7995,23 @@
                 </a:solidFill>
                 <a:latin typeface="Montserrat"/>
               </a:rPr>
-              <a:t>Inferior: borde superior a 50 cm del suelo</a:t>
+              <a:t>Vertical y rectilíneo</a:t>
             </a:r>
           </a:p>
           <a:p>
             <a:pPr>
               <a:spcAft>
-                <a:spcPts val="1000"/>
+                <a:spcPts val="1100"/>
               </a:spcAft>
             </a:pPr>
             <a:r>
               <a:rPr sz="1600" b="1" i="0">
                 <a:solidFill>
-                  <a:srgbClr val="2E3A80"/>
-                </a:solidFill>
-                <a:latin typeface="Montserrat"/>
-              </a:rPr>
-              <a:t>•  </a:t>
+                  <a:srgbClr val="E8801A"/>
+                </a:solidFill>
+                <a:latin typeface="Montserrat"/>
+              </a:rPr>
+              <a:t>▸  </a:t>
             </a:r>
             <a:r>
               <a:rPr sz="1600" b="0" i="0">
@@ -7645,23 +8020,23 @@
                 </a:solidFill>
                 <a:latin typeface="Montserrat"/>
               </a:rPr>
-              <a:t>Con GLP, borde inferior a 15 cm</a:t>
+              <a:t>100 cm² libres al pasar cada forjado</a:t>
             </a:r>
           </a:p>
           <a:p>
             <a:pPr>
               <a:spcAft>
-                <a:spcPts val="1000"/>
+                <a:spcPts val="1100"/>
               </a:spcAft>
             </a:pPr>
             <a:r>
               <a:rPr sz="1600" b="1" i="0">
                 <a:solidFill>
-                  <a:srgbClr val="2E3A80"/>
-                </a:solidFill>
-                <a:latin typeface="Montserrat"/>
-              </a:rPr>
-              <a:t>•  </a:t>
+                  <a:srgbClr val="E8801A"/>
+                </a:solidFill>
+                <a:latin typeface="Montserrat"/>
+              </a:rPr>
+              <a:t>▸  </a:t>
             </a:r>
             <a:r>
               <a:rPr sz="1600" b="0" i="0">
@@ -7670,14 +8045,14 @@
                 </a:solidFill>
                 <a:latin typeface="Montserrat"/>
               </a:rPr>
-              <a:t>Superior: a menos de 30 cm del techo</a:t>
-            </a:r>
-          </a:p>
-        </p:txBody>
-      </p:sp>
-      <p:sp>
-        <p:nvSpPr>
-          <p:cNvPr id="8" name="imgph" descr="IMGQ:ventilation grille louver on gas cabinet"/>
+              <a:t>Más de 400 cm²: reja que aguante una persona</a:t>
+            </a:r>
+          </a:p>
+        </p:txBody>
+      </p:sp>
+      <p:sp>
+        <p:nvSpPr>
+          <p:cNvPr id="9" name="imgph" descr="IMGQ:vertical service shaft riser in building"/>
           <p:cNvSpPr/>
           <p:nvPr/>
         </p:nvSpPr>
@@ -7723,7 +8098,7 @@
       </p:sp>
       <p:sp>
         <p:nvSpPr>
-          <p:cNvPr id="9" name="TextBox 8"/>
+          <p:cNvPr id="10" name="TextBox 9"/>
           <p:cNvSpPr txBox="1"/>
           <p:nvPr/>
         </p:nvSpPr>
@@ -7763,7 +8138,7 @@
                 </a:solidFill>
                 <a:latin typeface="Montserrat"/>
               </a:rPr>
-              <a:t>ventilation grille louver on gas cabinet</a:t>
+              <a:t>vertical service shaft riser in building</a:t>
             </a:r>
           </a:p>
         </p:txBody>
@@ -7860,7 +8235,7 @@
                 </a:solidFill>
                 <a:latin typeface="Montserrat"/>
               </a:rPr>
-              <a:t>016 / 024</a:t>
+              <a:t>016 / 025</a:t>
             </a:r>
           </a:p>
         </p:txBody>
@@ -7908,7 +8283,7 @@
         <p:spPr>
           <a:xfrm>
             <a:off x="822960" y="457200"/>
-            <a:ext cx="8229600" cy="365760"/>
+            <a:ext cx="10058400" cy="365760"/>
           </a:xfrm>
           <a:prstGeom prst="rect">
             <a:avLst/>
@@ -7922,13 +8297,13 @@
           <a:lstStyle/>
           <a:p>
             <a:r>
-              <a:rPr sz="1200" b="1" i="0">
-                <a:solidFill>
-                  <a:srgbClr val="64748B"/>
-                </a:solidFill>
-                <a:latin typeface="Montserrat"/>
-              </a:rPr>
-              <a:t>VENTILACIÓN · DIRECTA E INDIRECTA</a:t>
+              <a:rPr sz="1300" b="1" i="0">
+                <a:solidFill>
+                  <a:srgbClr val="E8801A"/>
+                </a:solidFill>
+                <a:latin typeface="Montserrat"/>
+              </a:rPr>
+              <a:t>VENTILACIÓN · ABERTURAS</a:t>
             </a:r>
           </a:p>
         </p:txBody>
@@ -7956,26 +8331,70 @@
           <a:lstStyle/>
           <a:p>
             <a:r>
-              <a:rPr sz="2700" b="1" i="0">
+              <a:rPr sz="2800" b="1" i="0">
                 <a:solidFill>
                   <a:srgbClr val="1E2761"/>
                 </a:solidFill>
                 <a:latin typeface="Montserrat"/>
               </a:rPr>
-              <a:t>Directa mejor que indirecta</a:t>
-            </a:r>
-          </a:p>
-        </p:txBody>
-      </p:sp>
-      <p:sp>
-        <p:nvSpPr>
-          <p:cNvPr id="7" name="TextBox 6"/>
+              <a:t>Dos bocas: arriba y abajo</a:t>
+            </a:r>
+          </a:p>
+        </p:txBody>
+      </p:sp>
+      <p:sp>
+        <p:nvSpPr>
+          <p:cNvPr id="7" name="Rounded Rectangle 6"/>
+          <p:cNvSpPr/>
+          <p:nvPr/>
+        </p:nvSpPr>
+        <p:spPr>
+          <a:xfrm>
+            <a:off x="868680" y="1627632"/>
+            <a:ext cx="2011680" cy="73152"/>
+          </a:xfrm>
+          <a:prstGeom prst="roundRect">
+            <a:avLst/>
+          </a:prstGeom>
+          <a:solidFill>
+            <a:srgbClr val="E8801A"/>
+          </a:solidFill>
+          <a:ln>
+            <a:noFill/>
+          </a:ln>
+          <a:effectLst/>
+        </p:spPr>
+        <p:style>
+          <a:lnRef idx="1">
+            <a:schemeClr val="accent1"/>
+          </a:lnRef>
+          <a:fillRef idx="3">
+            <a:schemeClr val="accent1"/>
+          </a:fillRef>
+          <a:effectRef idx="2">
+            <a:schemeClr val="accent1"/>
+          </a:effectRef>
+          <a:fontRef idx="minor">
+            <a:schemeClr val="lt1"/>
+          </a:fontRef>
+        </p:style>
+        <p:txBody>
+          <a:bodyPr rtlCol="0" anchor="ctr"/>
+          <a:lstStyle/>
+          <a:p>
+            <a:pPr algn="ctr"/>
+          </a:p>
+        </p:txBody>
+      </p:sp>
+      <p:sp>
+        <p:nvSpPr>
+          <p:cNvPr id="8" name="TextBox 7"/>
           <p:cNvSpPr txBox="1"/>
           <p:nvPr/>
         </p:nvSpPr>
         <p:spPr>
           <a:xfrm>
-            <a:off x="822960" y="1920240"/>
+            <a:off x="822960" y="1965960"/>
             <a:ext cx="4983480" cy="4206240"/>
           </a:xfrm>
           <a:prstGeom prst="rect">
@@ -7991,17 +8410,17 @@
           <a:p>
             <a:pPr>
               <a:spcAft>
-                <a:spcPts val="1000"/>
+                <a:spcPts val="1100"/>
               </a:spcAft>
             </a:pPr>
             <a:r>
               <a:rPr sz="1600" b="1" i="0">
                 <a:solidFill>
-                  <a:srgbClr val="2E3A80"/>
-                </a:solidFill>
-                <a:latin typeface="Montserrat"/>
-              </a:rPr>
-              <a:t>•  </a:t>
+                  <a:srgbClr val="E8801A"/>
+                </a:solidFill>
+                <a:latin typeface="Montserrat"/>
+              </a:rPr>
+              <a:t>▸  </a:t>
             </a:r>
             <a:r>
               <a:rPr sz="1600" b="0" i="0">
@@ -8010,23 +8429,23 @@
                 </a:solidFill>
                 <a:latin typeface="Montserrat"/>
               </a:rPr>
-              <a:t>Directa: da al exterior o patio</a:t>
+              <a:t>Inferior: borde superior a 50 cm del suelo</a:t>
             </a:r>
           </a:p>
           <a:p>
             <a:pPr>
               <a:spcAft>
-                <a:spcPts val="1000"/>
+                <a:spcPts val="1100"/>
               </a:spcAft>
             </a:pPr>
             <a:r>
               <a:rPr sz="1600" b="1" i="0">
                 <a:solidFill>
-                  <a:srgbClr val="2E3A80"/>
-                </a:solidFill>
-                <a:latin typeface="Montserrat"/>
-              </a:rPr>
-              <a:t>•  </a:t>
+                  <a:srgbClr val="E8801A"/>
+                </a:solidFill>
+                <a:latin typeface="Montserrat"/>
+              </a:rPr>
+              <a:t>▸  </a:t>
             </a:r>
             <a:r>
               <a:rPr sz="1600" b="0" i="0">
@@ -8035,23 +8454,23 @@
                 </a:solidFill>
                 <a:latin typeface="Montserrat"/>
               </a:rPr>
-              <a:t>Indirecta: solo si la tabla lo permite</a:t>
+              <a:t>Con GLP, borde inferior a 15 cm</a:t>
             </a:r>
           </a:p>
           <a:p>
             <a:pPr>
               <a:spcAft>
-                <a:spcPts val="1000"/>
+                <a:spcPts val="1100"/>
               </a:spcAft>
             </a:pPr>
             <a:r>
               <a:rPr sz="1600" b="1" i="0">
                 <a:solidFill>
-                  <a:srgbClr val="2E3A80"/>
-                </a:solidFill>
-                <a:latin typeface="Montserrat"/>
-              </a:rPr>
-              <a:t>•  </a:t>
+                  <a:srgbClr val="E8801A"/>
+                </a:solidFill>
+                <a:latin typeface="Montserrat"/>
+              </a:rPr>
+              <a:t>▸  </a:t>
             </a:r>
             <a:r>
               <a:rPr sz="1600" b="0" i="0">
@@ -8060,14 +8479,14 @@
                 </a:solidFill>
                 <a:latin typeface="Montserrat"/>
               </a:rPr>
-              <a:t>Conducto de más de 3 m: +50 % de superficie</a:t>
-            </a:r>
-          </a:p>
-        </p:txBody>
-      </p:sp>
-      <p:sp>
-        <p:nvSpPr>
-          <p:cNvPr id="8" name="imgph" descr="IMGQ:exterior wall ventilation grille"/>
+              <a:t>Superior: a menos de 30 cm del techo</a:t>
+            </a:r>
+          </a:p>
+        </p:txBody>
+      </p:sp>
+      <p:sp>
+        <p:nvSpPr>
+          <p:cNvPr id="9" name="imgph" descr="IMGQ:ventilation grille louver on gas cabinet"/>
           <p:cNvSpPr/>
           <p:nvPr/>
         </p:nvSpPr>
@@ -8113,7 +8532,7 @@
       </p:sp>
       <p:sp>
         <p:nvSpPr>
-          <p:cNvPr id="9" name="TextBox 8"/>
+          <p:cNvPr id="10" name="TextBox 9"/>
           <p:cNvSpPr txBox="1"/>
           <p:nvPr/>
         </p:nvSpPr>
@@ -8153,7 +8572,7 @@
                 </a:solidFill>
                 <a:latin typeface="Montserrat"/>
               </a:rPr>
-              <a:t>exterior wall ventilation grille</a:t>
+              <a:t>ventilation grille louver on gas cabinet</a:t>
             </a:r>
           </a:p>
         </p:txBody>
@@ -8250,7 +8669,7 @@
                 </a:solidFill>
                 <a:latin typeface="Montserrat"/>
               </a:rPr>
-              <a:t>017 / 024</a:t>
+              <a:t>017 / 025</a:t>
             </a:r>
           </a:p>
         </p:txBody>
@@ -8298,7 +8717,7 @@
         <p:spPr>
           <a:xfrm>
             <a:off x="822960" y="457200"/>
-            <a:ext cx="8229600" cy="365760"/>
+            <a:ext cx="10058400" cy="365760"/>
           </a:xfrm>
           <a:prstGeom prst="rect">
             <a:avLst/>
@@ -8312,13 +8731,13 @@
           <a:lstStyle/>
           <a:p>
             <a:r>
-              <a:rPr sz="1200" b="1" i="0">
-                <a:solidFill>
-                  <a:srgbClr val="64748B"/>
-                </a:solidFill>
-                <a:latin typeface="Montserrat"/>
-              </a:rPr>
-              <a:t>VENTILACIÓN · SEMISÓTANO Y TABLA 1</a:t>
+              <a:rPr sz="1300" b="1" i="0">
+                <a:solidFill>
+                  <a:srgbClr val="E8801A"/>
+                </a:solidFill>
+                <a:latin typeface="Montserrat"/>
+              </a:rPr>
+              <a:t>VENTILACIÓN · DIRECTA E INDIRECTA</a:t>
             </a:r>
           </a:p>
         </p:txBody>
@@ -8346,26 +8765,70 @@
           <a:lstStyle/>
           <a:p>
             <a:r>
-              <a:rPr sz="2700" b="1" i="0">
+              <a:rPr sz="2800" b="1" i="0">
                 <a:solidFill>
                   <a:srgbClr val="1E2761"/>
                 </a:solidFill>
                 <a:latin typeface="Montserrat"/>
               </a:rPr>
-              <a:t>Cifras que caen</a:t>
-            </a:r>
-          </a:p>
-        </p:txBody>
-      </p:sp>
-      <p:sp>
-        <p:nvSpPr>
-          <p:cNvPr id="7" name="TextBox 6"/>
+              <a:t>Directa mejor que indirecta</a:t>
+            </a:r>
+          </a:p>
+        </p:txBody>
+      </p:sp>
+      <p:sp>
+        <p:nvSpPr>
+          <p:cNvPr id="7" name="Rounded Rectangle 6"/>
+          <p:cNvSpPr/>
+          <p:nvPr/>
+        </p:nvSpPr>
+        <p:spPr>
+          <a:xfrm>
+            <a:off x="868680" y="1627632"/>
+            <a:ext cx="2011680" cy="73152"/>
+          </a:xfrm>
+          <a:prstGeom prst="roundRect">
+            <a:avLst/>
+          </a:prstGeom>
+          <a:solidFill>
+            <a:srgbClr val="E8801A"/>
+          </a:solidFill>
+          <a:ln>
+            <a:noFill/>
+          </a:ln>
+          <a:effectLst/>
+        </p:spPr>
+        <p:style>
+          <a:lnRef idx="1">
+            <a:schemeClr val="accent1"/>
+          </a:lnRef>
+          <a:fillRef idx="3">
+            <a:schemeClr val="accent1"/>
+          </a:fillRef>
+          <a:effectRef idx="2">
+            <a:schemeClr val="accent1"/>
+          </a:effectRef>
+          <a:fontRef idx="minor">
+            <a:schemeClr val="lt1"/>
+          </a:fontRef>
+        </p:style>
+        <p:txBody>
+          <a:bodyPr rtlCol="0" anchor="ctr"/>
+          <a:lstStyle/>
+          <a:p>
+            <a:pPr algn="ctr"/>
+          </a:p>
+        </p:txBody>
+      </p:sp>
+      <p:sp>
+        <p:nvSpPr>
+          <p:cNvPr id="8" name="TextBox 7"/>
           <p:cNvSpPr txBox="1"/>
           <p:nvPr/>
         </p:nvSpPr>
         <p:spPr>
           <a:xfrm>
-            <a:off x="822960" y="1920240"/>
+            <a:off x="822960" y="1965960"/>
             <a:ext cx="4983480" cy="4206240"/>
           </a:xfrm>
           <a:prstGeom prst="rect">
@@ -8381,17 +8844,17 @@
           <a:p>
             <a:pPr>
               <a:spcAft>
-                <a:spcPts val="1000"/>
+                <a:spcPts val="1100"/>
               </a:spcAft>
             </a:pPr>
             <a:r>
               <a:rPr sz="1600" b="1" i="0">
                 <a:solidFill>
-                  <a:srgbClr val="2E3A80"/>
-                </a:solidFill>
-                <a:latin typeface="Montserrat"/>
-              </a:rPr>
-              <a:t>•  </a:t>
+                  <a:srgbClr val="E8801A"/>
+                </a:solidFill>
+                <a:latin typeface="Montserrat"/>
+              </a:rPr>
+              <a:t>▸  </a:t>
             </a:r>
             <a:r>
               <a:rPr sz="1600" b="0" i="0">
@@ -8400,23 +8863,23 @@
                 </a:solidFill>
                 <a:latin typeface="Montserrat"/>
               </a:rPr>
-              <a:t>Local técnico: 200 cm²</a:t>
+              <a:t>Directa: da al exterior o patio</a:t>
             </a:r>
           </a:p>
           <a:p>
             <a:pPr>
               <a:spcAft>
-                <a:spcPts val="1000"/>
+                <a:spcPts val="1100"/>
               </a:spcAft>
             </a:pPr>
             <a:r>
               <a:rPr sz="1600" b="1" i="0">
                 <a:solidFill>
-                  <a:srgbClr val="2E3A80"/>
-                </a:solidFill>
-                <a:latin typeface="Montserrat"/>
-              </a:rPr>
-              <a:t>•  </a:t>
+                  <a:srgbClr val="E8801A"/>
+                </a:solidFill>
+                <a:latin typeface="Montserrat"/>
+              </a:rPr>
+              <a:t>▸  </a:t>
             </a:r>
             <a:r>
               <a:rPr sz="1600" b="0" i="0">
@@ -8425,23 +8888,23 @@
                 </a:solidFill>
                 <a:latin typeface="Montserrat"/>
               </a:rPr>
-              <a:t>Armario: 5 cm² (más de 2: 50 cm²)</a:t>
+              <a:t>Indirecta: solo si la tabla lo permite</a:t>
             </a:r>
           </a:p>
           <a:p>
             <a:pPr>
               <a:spcAft>
-                <a:spcPts val="1000"/>
+                <a:spcPts val="1100"/>
               </a:spcAft>
             </a:pPr>
             <a:r>
               <a:rPr sz="1600" b="1" i="0">
                 <a:solidFill>
-                  <a:srgbClr val="2E3A80"/>
-                </a:solidFill>
-                <a:latin typeface="Montserrat"/>
-              </a:rPr>
-              <a:t>•  </a:t>
+                  <a:srgbClr val="E8801A"/>
+                </a:solidFill>
+                <a:latin typeface="Montserrat"/>
+              </a:rPr>
+              <a:t>▸  </a:t>
             </a:r>
             <a:r>
               <a:rPr sz="1600" b="0" i="0">
@@ -8450,14 +8913,14 @@
                 </a:solidFill>
                 <a:latin typeface="Montserrat"/>
               </a:rPr>
-              <a:t>Semisótano: puerta estanca y +50 %</a:t>
-            </a:r>
-          </a:p>
-        </p:txBody>
-      </p:sp>
-      <p:sp>
-        <p:nvSpPr>
-          <p:cNvPr id="8" name="imgph" descr="IMGQ:gas meter cabinet ventilation louver detail"/>
+              <a:t>Conducto de más de 3 m: +50 % de superficie</a:t>
+            </a:r>
+          </a:p>
+        </p:txBody>
+      </p:sp>
+      <p:sp>
+        <p:nvSpPr>
+          <p:cNvPr id="9" name="imgph" descr="IMGQ:exterior wall ventilation grille"/>
           <p:cNvSpPr/>
           <p:nvPr/>
         </p:nvSpPr>
@@ -8503,7 +8966,7 @@
       </p:sp>
       <p:sp>
         <p:nvSpPr>
-          <p:cNvPr id="9" name="TextBox 8"/>
+          <p:cNvPr id="10" name="TextBox 9"/>
           <p:cNvSpPr txBox="1"/>
           <p:nvPr/>
         </p:nvSpPr>
@@ -8543,7 +9006,7 @@
                 </a:solidFill>
                 <a:latin typeface="Montserrat"/>
               </a:rPr>
-              <a:t>gas meter cabinet ventilation louver detail</a:t>
+              <a:t>exterior wall ventilation grille</a:t>
             </a:r>
           </a:p>
         </p:txBody>
@@ -8640,7 +9103,7 @@
                 </a:solidFill>
                 <a:latin typeface="Montserrat"/>
               </a:rPr>
-              <a:t>018 / 024</a:t>
+              <a:t>018 / 025</a:t>
             </a:r>
           </a:p>
         </p:txBody>
@@ -8688,7 +9151,7 @@
         <p:spPr>
           <a:xfrm>
             <a:off x="822960" y="457200"/>
-            <a:ext cx="8229600" cy="365760"/>
+            <a:ext cx="10058400" cy="365760"/>
           </a:xfrm>
           <a:prstGeom prst="rect">
             <a:avLst/>
@@ -8702,13 +9165,13 @@
           <a:lstStyle/>
           <a:p>
             <a:r>
-              <a:rPr sz="1200" b="1" i="0">
-                <a:solidFill>
-                  <a:srgbClr val="64748B"/>
-                </a:solidFill>
-                <a:latin typeface="Montserrat"/>
-              </a:rPr>
-              <a:t>CONDUCCIONES AJENAS</a:t>
+              <a:rPr sz="1300" b="1" i="0">
+                <a:solidFill>
+                  <a:srgbClr val="E8801A"/>
+                </a:solidFill>
+                <a:latin typeface="Montserrat"/>
+              </a:rPr>
+              <a:t>VENTILACIÓN · SEMISÓTANO Y TABLA 1</a:t>
             </a:r>
           </a:p>
         </p:txBody>
@@ -8736,26 +9199,70 @@
           <a:lstStyle/>
           <a:p>
             <a:r>
-              <a:rPr sz="2700" b="1" i="0">
+              <a:rPr sz="2800" b="1" i="0">
                 <a:solidFill>
                   <a:srgbClr val="1E2761"/>
                 </a:solidFill>
                 <a:latin typeface="Montserrat"/>
               </a:rPr>
-              <a:t>Invitados no deseados</a:t>
-            </a:r>
-          </a:p>
-        </p:txBody>
-      </p:sp>
-      <p:sp>
-        <p:nvSpPr>
-          <p:cNvPr id="7" name="TextBox 6"/>
+              <a:t>Cifras que caen</a:t>
+            </a:r>
+          </a:p>
+        </p:txBody>
+      </p:sp>
+      <p:sp>
+        <p:nvSpPr>
+          <p:cNvPr id="7" name="Rounded Rectangle 6"/>
+          <p:cNvSpPr/>
+          <p:nvPr/>
+        </p:nvSpPr>
+        <p:spPr>
+          <a:xfrm>
+            <a:off x="868680" y="1627632"/>
+            <a:ext cx="2011680" cy="73152"/>
+          </a:xfrm>
+          <a:prstGeom prst="roundRect">
+            <a:avLst/>
+          </a:prstGeom>
+          <a:solidFill>
+            <a:srgbClr val="E8801A"/>
+          </a:solidFill>
+          <a:ln>
+            <a:noFill/>
+          </a:ln>
+          <a:effectLst/>
+        </p:spPr>
+        <p:style>
+          <a:lnRef idx="1">
+            <a:schemeClr val="accent1"/>
+          </a:lnRef>
+          <a:fillRef idx="3">
+            <a:schemeClr val="accent1"/>
+          </a:fillRef>
+          <a:effectRef idx="2">
+            <a:schemeClr val="accent1"/>
+          </a:effectRef>
+          <a:fontRef idx="minor">
+            <a:schemeClr val="lt1"/>
+          </a:fontRef>
+        </p:style>
+        <p:txBody>
+          <a:bodyPr rtlCol="0" anchor="ctr"/>
+          <a:lstStyle/>
+          <a:p>
+            <a:pPr algn="ctr"/>
+          </a:p>
+        </p:txBody>
+      </p:sp>
+      <p:sp>
+        <p:nvSpPr>
+          <p:cNvPr id="8" name="TextBox 7"/>
           <p:cNvSpPr txBox="1"/>
           <p:nvPr/>
         </p:nvSpPr>
         <p:spPr>
           <a:xfrm>
-            <a:off x="822960" y="1920240"/>
+            <a:off x="822960" y="1965960"/>
             <a:ext cx="4983480" cy="4206240"/>
           </a:xfrm>
           <a:prstGeom prst="rect">
@@ -8771,17 +9278,17 @@
           <a:p>
             <a:pPr>
               <a:spcAft>
-                <a:spcPts val="1000"/>
+                <a:spcPts val="1100"/>
               </a:spcAft>
             </a:pPr>
             <a:r>
               <a:rPr sz="1600" b="1" i="0">
                 <a:solidFill>
-                  <a:srgbClr val="2E3A80"/>
-                </a:solidFill>
-                <a:latin typeface="Montserrat"/>
-              </a:rPr>
-              <a:t>•  </a:t>
+                  <a:srgbClr val="E8801A"/>
+                </a:solidFill>
+                <a:latin typeface="Montserrat"/>
+              </a:rPr>
+              <a:t>▸  </a:t>
             </a:r>
             <a:r>
               <a:rPr sz="1600" b="0" i="0">
@@ -8790,23 +9297,23 @@
                 </a:solidFill>
                 <a:latin typeface="Montserrat"/>
               </a:rPr>
-              <a:t>Evitar tubos ajenos vistos</a:t>
+              <a:t>Local técnico: 200 cm²</a:t>
             </a:r>
           </a:p>
           <a:p>
             <a:pPr>
               <a:spcAft>
-                <a:spcPts val="1000"/>
+                <a:spcPts val="1100"/>
               </a:spcAft>
             </a:pPr>
             <a:r>
               <a:rPr sz="1600" b="1" i="0">
                 <a:solidFill>
-                  <a:srgbClr val="2E3A80"/>
-                </a:solidFill>
-                <a:latin typeface="Montserrat"/>
-              </a:rPr>
-              <a:t>•  </a:t>
+                  <a:srgbClr val="E8801A"/>
+                </a:solidFill>
+                <a:latin typeface="Montserrat"/>
+              </a:rPr>
+              <a:t>▸  </a:t>
             </a:r>
             <a:r>
               <a:rPr sz="1600" b="0" i="0">
@@ -8815,23 +9322,23 @@
                 </a:solidFill>
                 <a:latin typeface="Montserrat"/>
               </a:rPr>
-              <a:t>Sin juntas desmontables, entradas estancas</a:t>
+              <a:t>Armario: 5 cm² (más de 2: 50 cm²)</a:t>
             </a:r>
           </a:p>
           <a:p>
             <a:pPr>
               <a:spcAft>
-                <a:spcPts val="1000"/>
+                <a:spcPts val="1100"/>
               </a:spcAft>
             </a:pPr>
             <a:r>
               <a:rPr sz="1600" b="1" i="0">
                 <a:solidFill>
-                  <a:srgbClr val="2E3A80"/>
-                </a:solidFill>
-                <a:latin typeface="Montserrat"/>
-              </a:rPr>
-              <a:t>•  </a:t>
+                  <a:srgbClr val="E8801A"/>
+                </a:solidFill>
+                <a:latin typeface="Montserrat"/>
+              </a:rPr>
+              <a:t>▸  </a:t>
             </a:r>
             <a:r>
               <a:rPr sz="1600" b="0" i="0">
@@ -8840,14 +9347,14 @@
                 </a:solidFill>
                 <a:latin typeface="Montserrat"/>
               </a:rPr>
-              <a:t>Cable eléctrico en vaina de acero</a:t>
-            </a:r>
-          </a:p>
-        </p:txBody>
-      </p:sp>
-      <p:sp>
-        <p:nvSpPr>
-          <p:cNvPr id="8" name="imgph" descr="IMGQ:pipes crossing utility service room"/>
+              <a:t>Semisótano: puerta estanca y +50 %</a:t>
+            </a:r>
+          </a:p>
+        </p:txBody>
+      </p:sp>
+      <p:sp>
+        <p:nvSpPr>
+          <p:cNvPr id="9" name="imgph" descr="IMGQ:gas meter cabinet ventilation louver detail"/>
           <p:cNvSpPr/>
           <p:nvPr/>
         </p:nvSpPr>
@@ -8893,7 +9400,7 @@
       </p:sp>
       <p:sp>
         <p:nvSpPr>
-          <p:cNvPr id="9" name="TextBox 8"/>
+          <p:cNvPr id="10" name="TextBox 9"/>
           <p:cNvSpPr txBox="1"/>
           <p:nvPr/>
         </p:nvSpPr>
@@ -8933,7 +9440,7 @@
                 </a:solidFill>
                 <a:latin typeface="Montserrat"/>
               </a:rPr>
-              <a:t>pipes crossing utility service room</a:t>
+              <a:t>gas meter cabinet ventilation louver detail</a:t>
             </a:r>
           </a:p>
         </p:txBody>
@@ -9030,7 +9537,7 @@
                 </a:solidFill>
                 <a:latin typeface="Montserrat"/>
               </a:rPr>
-              <a:t>019 / 024</a:t>
+              <a:t>019 / 025</a:t>
             </a:r>
           </a:p>
         </p:txBody>
@@ -9078,7 +9585,7 @@
         <p:spPr>
           <a:xfrm>
             <a:off x="822960" y="457200"/>
-            <a:ext cx="8229600" cy="365760"/>
+            <a:ext cx="10058400" cy="365760"/>
           </a:xfrm>
           <a:prstGeom prst="rect">
             <a:avLst/>
@@ -9092,13 +9599,13 @@
           <a:lstStyle/>
           <a:p>
             <a:r>
-              <a:rPr sz="1200" b="1" i="0">
-                <a:solidFill>
-                  <a:srgbClr val="64748B"/>
-                </a:solidFill>
-                <a:latin typeface="Montserrat"/>
-              </a:rPr>
-              <a:t>UN SOLO CONTADOR · ARMARIO O NICHO</a:t>
+              <a:rPr sz="1300" b="1" i="0">
+                <a:solidFill>
+                  <a:srgbClr val="E8801A"/>
+                </a:solidFill>
+                <a:latin typeface="Montserrat"/>
+              </a:rPr>
+              <a:t>CONDUCCIONES AJENAS</a:t>
             </a:r>
           </a:p>
         </p:txBody>
@@ -9126,26 +9633,70 @@
           <a:lstStyle/>
           <a:p>
             <a:r>
-              <a:rPr sz="2700" b="1" i="0">
+              <a:rPr sz="2800" b="1" i="0">
                 <a:solidFill>
                   <a:srgbClr val="1E2761"/>
                 </a:solidFill>
                 <a:latin typeface="Montserrat"/>
               </a:rPr>
-              <a:t>Empotrado y bien sellado</a:t>
-            </a:r>
-          </a:p>
-        </p:txBody>
-      </p:sp>
-      <p:sp>
-        <p:nvSpPr>
-          <p:cNvPr id="7" name="TextBox 6"/>
+              <a:t>Invitados no deseados</a:t>
+            </a:r>
+          </a:p>
+        </p:txBody>
+      </p:sp>
+      <p:sp>
+        <p:nvSpPr>
+          <p:cNvPr id="7" name="Rounded Rectangle 6"/>
+          <p:cNvSpPr/>
+          <p:nvPr/>
+        </p:nvSpPr>
+        <p:spPr>
+          <a:xfrm>
+            <a:off x="868680" y="1627632"/>
+            <a:ext cx="2011680" cy="73152"/>
+          </a:xfrm>
+          <a:prstGeom prst="roundRect">
+            <a:avLst/>
+          </a:prstGeom>
+          <a:solidFill>
+            <a:srgbClr val="E8801A"/>
+          </a:solidFill>
+          <a:ln>
+            <a:noFill/>
+          </a:ln>
+          <a:effectLst/>
+        </p:spPr>
+        <p:style>
+          <a:lnRef idx="1">
+            <a:schemeClr val="accent1"/>
+          </a:lnRef>
+          <a:fillRef idx="3">
+            <a:schemeClr val="accent1"/>
+          </a:fillRef>
+          <a:effectRef idx="2">
+            <a:schemeClr val="accent1"/>
+          </a:effectRef>
+          <a:fontRef idx="minor">
+            <a:schemeClr val="lt1"/>
+          </a:fontRef>
+        </p:style>
+        <p:txBody>
+          <a:bodyPr rtlCol="0" anchor="ctr"/>
+          <a:lstStyle/>
+          <a:p>
+            <a:pPr algn="ctr"/>
+          </a:p>
+        </p:txBody>
+      </p:sp>
+      <p:sp>
+        <p:nvSpPr>
+          <p:cNvPr id="8" name="TextBox 7"/>
           <p:cNvSpPr txBox="1"/>
           <p:nvPr/>
         </p:nvSpPr>
         <p:spPr>
           <a:xfrm>
-            <a:off x="822960" y="1920240"/>
+            <a:off x="822960" y="1965960"/>
             <a:ext cx="4983480" cy="4206240"/>
           </a:xfrm>
           <a:prstGeom prst="rect">
@@ -9161,17 +9712,17 @@
           <a:p>
             <a:pPr>
               <a:spcAft>
-                <a:spcPts val="1000"/>
+                <a:spcPts val="1100"/>
               </a:spcAft>
             </a:pPr>
             <a:r>
               <a:rPr sz="1600" b="1" i="0">
                 <a:solidFill>
-                  <a:srgbClr val="2E3A80"/>
-                </a:solidFill>
-                <a:latin typeface="Montserrat"/>
-              </a:rPr>
-              <a:t>•  </a:t>
+                  <a:srgbClr val="E8801A"/>
+                </a:solidFill>
+                <a:latin typeface="Montserrat"/>
+              </a:rPr>
+              <a:t>▸  </a:t>
             </a:r>
             <a:r>
               <a:rPr sz="1600" b="0" i="0">
@@ -9180,23 +9731,23 @@
                 </a:solidFill>
                 <a:latin typeface="Montserrat"/>
               </a:rPr>
-              <a:t>Preferente en fachada o muro límite</a:t>
+              <a:t>Evitar tubos ajenos vistos</a:t>
             </a:r>
           </a:p>
           <a:p>
             <a:pPr>
               <a:spcAft>
-                <a:spcPts val="1000"/>
+                <a:spcPts val="1100"/>
               </a:spcAft>
             </a:pPr>
             <a:r>
               <a:rPr sz="1600" b="1" i="0">
                 <a:solidFill>
-                  <a:srgbClr val="2E3A80"/>
-                </a:solidFill>
-                <a:latin typeface="Montserrat"/>
-              </a:rPr>
-              <a:t>•  </a:t>
+                  <a:srgbClr val="E8801A"/>
+                </a:solidFill>
+                <a:latin typeface="Montserrat"/>
+              </a:rPr>
+              <a:t>▸  </a:t>
             </a:r>
             <a:r>
               <a:rPr sz="1600" b="0" i="0">
@@ -9205,23 +9756,23 @@
                 </a:solidFill>
                 <a:latin typeface="Montserrat"/>
               </a:rPr>
-              <a:t>Empotrado: rellenar con mortero</a:t>
+              <a:t>Sin juntas desmontables, entradas estancas</a:t>
             </a:r>
           </a:p>
           <a:p>
             <a:pPr>
               <a:spcAft>
-                <a:spcPts val="1000"/>
+                <a:spcPts val="1100"/>
               </a:spcAft>
             </a:pPr>
             <a:r>
               <a:rPr sz="1600" b="1" i="0">
                 <a:solidFill>
-                  <a:srgbClr val="2E3A80"/>
-                </a:solidFill>
-                <a:latin typeface="Montserrat"/>
-              </a:rPr>
-              <a:t>•  </a:t>
+                  <a:srgbClr val="E8801A"/>
+                </a:solidFill>
+                <a:latin typeface="Montserrat"/>
+              </a:rPr>
+              <a:t>▸  </a:t>
             </a:r>
             <a:r>
               <a:rPr sz="1600" b="0" i="0">
@@ -9230,14 +9781,14 @@
                 </a:solidFill>
                 <a:latin typeface="Montserrat"/>
               </a:rPr>
-              <a:t>Metal, obra enlucida o plástico C-s3,d0</a:t>
-            </a:r>
-          </a:p>
-        </p:txBody>
-      </p:sp>
-      <p:sp>
-        <p:nvSpPr>
-          <p:cNvPr id="8" name="imgph" descr="IMGQ:single gas meter in wall niche"/>
+              <a:t>Cable eléctrico en vaina de acero</a:t>
+            </a:r>
+          </a:p>
+        </p:txBody>
+      </p:sp>
+      <p:sp>
+        <p:nvSpPr>
+          <p:cNvPr id="9" name="imgph" descr="IMGQ:pipes crossing utility service room"/>
           <p:cNvSpPr/>
           <p:nvPr/>
         </p:nvSpPr>
@@ -9283,7 +9834,7 @@
       </p:sp>
       <p:sp>
         <p:nvSpPr>
-          <p:cNvPr id="9" name="TextBox 8"/>
+          <p:cNvPr id="10" name="TextBox 9"/>
           <p:cNvSpPr txBox="1"/>
           <p:nvPr/>
         </p:nvSpPr>
@@ -9323,7 +9874,7 @@
                 </a:solidFill>
                 <a:latin typeface="Montserrat"/>
               </a:rPr>
-              <a:t>single gas meter in wall niche</a:t>
+              <a:t>pipes crossing utility service room</a:t>
             </a:r>
           </a:p>
         </p:txBody>
@@ -9420,7 +9971,7 @@
                 </a:solidFill>
                 <a:latin typeface="Montserrat"/>
               </a:rPr>
-              <a:t>002 / 024</a:t>
+              <a:t>002 / 025</a:t>
             </a:r>
           </a:p>
         </p:txBody>
@@ -9484,7 +10035,7 @@
             <a:r>
               <a:rPr sz="2700" b="1" i="0">
                 <a:solidFill>
-                  <a:srgbClr val="1E2761"/>
+                  <a:srgbClr val="E8801A"/>
                 </a:solidFill>
                 <a:latin typeface="Montserrat"/>
               </a:rPr>
@@ -9496,6 +10047,50 @@
       <p:sp>
         <p:nvSpPr>
           <p:cNvPr id="6" name="Rounded Rectangle 5"/>
+          <p:cNvSpPr/>
+          <p:nvPr/>
+        </p:nvSpPr>
+        <p:spPr>
+          <a:xfrm>
+            <a:off x="868680" y="1234440"/>
+            <a:ext cx="1463040" cy="73152"/>
+          </a:xfrm>
+          <a:prstGeom prst="roundRect">
+            <a:avLst/>
+          </a:prstGeom>
+          <a:solidFill>
+            <a:srgbClr val="1E2761"/>
+          </a:solidFill>
+          <a:ln>
+            <a:noFill/>
+          </a:ln>
+          <a:effectLst/>
+        </p:spPr>
+        <p:style>
+          <a:lnRef idx="1">
+            <a:schemeClr val="accent1"/>
+          </a:lnRef>
+          <a:fillRef idx="3">
+            <a:schemeClr val="accent1"/>
+          </a:fillRef>
+          <a:effectRef idx="2">
+            <a:schemeClr val="accent1"/>
+          </a:effectRef>
+          <a:fontRef idx="minor">
+            <a:schemeClr val="lt1"/>
+          </a:fontRef>
+        </p:style>
+        <p:txBody>
+          <a:bodyPr rtlCol="0" anchor="ctr"/>
+          <a:lstStyle/>
+          <a:p>
+            <a:pPr algn="ctr"/>
+          </a:p>
+        </p:txBody>
+      </p:sp>
+      <p:sp>
+        <p:nvSpPr>
+          <p:cNvPr id="7" name="Rounded Rectangle 6"/>
           <p:cNvSpPr/>
           <p:nvPr/>
         </p:nvSpPr>
@@ -9541,7 +10136,7 @@
       </p:sp>
       <p:sp>
         <p:nvSpPr>
-          <p:cNvPr id="7" name="TextBox 6"/>
+          <p:cNvPr id="8" name="TextBox 7"/>
           <p:cNvSpPr txBox="1"/>
           <p:nvPr/>
         </p:nvSpPr>
@@ -9576,7 +10171,7 @@
       </p:sp>
       <p:sp>
         <p:nvSpPr>
-          <p:cNvPr id="8" name="TextBox 7"/>
+          <p:cNvPr id="9" name="TextBox 8"/>
           <p:cNvSpPr txBox="1"/>
           <p:nvPr/>
         </p:nvSpPr>
@@ -9611,7 +10206,7 @@
       </p:sp>
       <p:sp>
         <p:nvSpPr>
-          <p:cNvPr id="9" name="Rounded Rectangle 8"/>
+          <p:cNvPr id="10" name="Rounded Rectangle 9"/>
           <p:cNvSpPr/>
           <p:nvPr/>
         </p:nvSpPr>
@@ -9657,7 +10252,7 @@
       </p:sp>
       <p:sp>
         <p:nvSpPr>
-          <p:cNvPr id="10" name="TextBox 9"/>
+          <p:cNvPr id="11" name="TextBox 10"/>
           <p:cNvSpPr txBox="1"/>
           <p:nvPr/>
         </p:nvSpPr>
@@ -9692,7 +10287,7 @@
       </p:sp>
       <p:sp>
         <p:nvSpPr>
-          <p:cNvPr id="11" name="TextBox 10"/>
+          <p:cNvPr id="12" name="TextBox 11"/>
           <p:cNvSpPr txBox="1"/>
           <p:nvPr/>
         </p:nvSpPr>
@@ -9727,7 +10322,7 @@
       </p:sp>
       <p:sp>
         <p:nvSpPr>
-          <p:cNvPr id="12" name="Rounded Rectangle 11"/>
+          <p:cNvPr id="13" name="Rounded Rectangle 12"/>
           <p:cNvSpPr/>
           <p:nvPr/>
         </p:nvSpPr>
@@ -9773,7 +10368,7 @@
       </p:sp>
       <p:sp>
         <p:nvSpPr>
-          <p:cNvPr id="13" name="TextBox 12"/>
+          <p:cNvPr id="14" name="TextBox 13"/>
           <p:cNvSpPr txBox="1"/>
           <p:nvPr/>
         </p:nvSpPr>
@@ -9808,7 +10403,7 @@
       </p:sp>
       <p:sp>
         <p:nvSpPr>
-          <p:cNvPr id="14" name="TextBox 13"/>
+          <p:cNvPr id="15" name="TextBox 14"/>
           <p:cNvSpPr txBox="1"/>
           <p:nvPr/>
         </p:nvSpPr>
@@ -9933,7 +10528,7 @@
                 </a:solidFill>
                 <a:latin typeface="Montserrat"/>
               </a:rPr>
-              <a:t>020 / 024</a:t>
+              <a:t>020 / 025</a:t>
             </a:r>
           </a:p>
         </p:txBody>
@@ -9981,7 +10576,7 @@
         <p:spPr>
           <a:xfrm>
             <a:off x="822960" y="457200"/>
-            <a:ext cx="8229600" cy="365760"/>
+            <a:ext cx="10058400" cy="365760"/>
           </a:xfrm>
           <a:prstGeom prst="rect">
             <a:avLst/>
@@ -9995,13 +10590,13 @@
           <a:lstStyle/>
           <a:p>
             <a:r>
-              <a:rPr sz="1200" b="1" i="0">
-                <a:solidFill>
-                  <a:srgbClr val="64748B"/>
-                </a:solidFill>
-                <a:latin typeface="Montserrat"/>
-              </a:rPr>
-              <a:t>CONTADOR EN INTERIOR DE VIVIENDA</a:t>
+              <a:rPr sz="1300" b="1" i="0">
+                <a:solidFill>
+                  <a:srgbClr val="E8801A"/>
+                </a:solidFill>
+                <a:latin typeface="Montserrat"/>
+              </a:rPr>
+              <a:t>UN SOLO CONTADOR · ARMARIO O NICHO</a:t>
             </a:r>
           </a:p>
         </p:txBody>
@@ -10029,26 +10624,70 @@
           <a:lstStyle/>
           <a:p>
             <a:r>
-              <a:rPr sz="2700" b="1" i="0">
+              <a:rPr sz="2800" b="1" i="0">
                 <a:solidFill>
                   <a:srgbClr val="1E2761"/>
                 </a:solidFill>
                 <a:latin typeface="Montserrat"/>
               </a:rPr>
-              <a:t>Distancias de seguridad</a:t>
-            </a:r>
-          </a:p>
-        </p:txBody>
-      </p:sp>
-      <p:sp>
-        <p:nvSpPr>
-          <p:cNvPr id="7" name="TextBox 6"/>
+              <a:t>Empotrado y bien sellado</a:t>
+            </a:r>
+          </a:p>
+        </p:txBody>
+      </p:sp>
+      <p:sp>
+        <p:nvSpPr>
+          <p:cNvPr id="7" name="Rounded Rectangle 6"/>
+          <p:cNvSpPr/>
+          <p:nvPr/>
+        </p:nvSpPr>
+        <p:spPr>
+          <a:xfrm>
+            <a:off x="868680" y="1627632"/>
+            <a:ext cx="2011680" cy="73152"/>
+          </a:xfrm>
+          <a:prstGeom prst="roundRect">
+            <a:avLst/>
+          </a:prstGeom>
+          <a:solidFill>
+            <a:srgbClr val="E8801A"/>
+          </a:solidFill>
+          <a:ln>
+            <a:noFill/>
+          </a:ln>
+          <a:effectLst/>
+        </p:spPr>
+        <p:style>
+          <a:lnRef idx="1">
+            <a:schemeClr val="accent1"/>
+          </a:lnRef>
+          <a:fillRef idx="3">
+            <a:schemeClr val="accent1"/>
+          </a:fillRef>
+          <a:effectRef idx="2">
+            <a:schemeClr val="accent1"/>
+          </a:effectRef>
+          <a:fontRef idx="minor">
+            <a:schemeClr val="lt1"/>
+          </a:fontRef>
+        </p:style>
+        <p:txBody>
+          <a:bodyPr rtlCol="0" anchor="ctr"/>
+          <a:lstStyle/>
+          <a:p>
+            <a:pPr algn="ctr"/>
+          </a:p>
+        </p:txBody>
+      </p:sp>
+      <p:sp>
+        <p:nvSpPr>
+          <p:cNvPr id="8" name="TextBox 7"/>
           <p:cNvSpPr txBox="1"/>
           <p:nvPr/>
         </p:nvSpPr>
         <p:spPr>
           <a:xfrm>
-            <a:off x="822960" y="1920240"/>
+            <a:off x="822960" y="1965960"/>
             <a:ext cx="4983480" cy="4206240"/>
           </a:xfrm>
           <a:prstGeom prst="rect">
@@ -10064,17 +10703,17 @@
           <a:p>
             <a:pPr>
               <a:spcAft>
-                <a:spcPts val="1000"/>
+                <a:spcPts val="1100"/>
               </a:spcAft>
             </a:pPr>
             <a:r>
               <a:rPr sz="1600" b="1" i="0">
                 <a:solidFill>
-                  <a:srgbClr val="2E3A80"/>
-                </a:solidFill>
-                <a:latin typeface="Montserrat"/>
-              </a:rPr>
-              <a:t>•  </a:t>
+                  <a:srgbClr val="E8801A"/>
+                </a:solidFill>
+                <a:latin typeface="Montserrat"/>
+              </a:rPr>
+              <a:t>▸  </a:t>
             </a:r>
             <a:r>
               <a:rPr sz="1600" b="0" i="0">
@@ -10083,23 +10722,23 @@
                 </a:solidFill>
                 <a:latin typeface="Montserrat"/>
               </a:rPr>
-              <a:t>Totalizador a 1,7 m como máximo</a:t>
+              <a:t>Preferente en fachada o muro límite</a:t>
             </a:r>
           </a:p>
           <a:p>
             <a:pPr>
               <a:spcAft>
-                <a:spcPts val="1000"/>
+                <a:spcPts val="1100"/>
               </a:spcAft>
             </a:pPr>
             <a:r>
               <a:rPr sz="1600" b="1" i="0">
                 <a:solidFill>
-                  <a:srgbClr val="2E3A80"/>
-                </a:solidFill>
-                <a:latin typeface="Montserrat"/>
-              </a:rPr>
-              <a:t>•  </a:t>
+                  <a:srgbClr val="E8801A"/>
+                </a:solidFill>
+                <a:latin typeface="Montserrat"/>
+              </a:rPr>
+              <a:t>▸  </a:t>
             </a:r>
             <a:r>
               <a:rPr sz="1600" b="0" i="0">
@@ -10108,23 +10747,23 @@
                 </a:solidFill>
                 <a:latin typeface="Montserrat"/>
               </a:rPr>
-              <a:t>40 cm a los fuegos de la cocina</a:t>
+              <a:t>Empotrado: rellenar con mortero</a:t>
             </a:r>
           </a:p>
           <a:p>
             <a:pPr>
               <a:spcAft>
-                <a:spcPts val="1000"/>
+                <a:spcPts val="1100"/>
               </a:spcAft>
             </a:pPr>
             <a:r>
               <a:rPr sz="1600" b="1" i="0">
                 <a:solidFill>
-                  <a:srgbClr val="2E3A80"/>
-                </a:solidFill>
-                <a:latin typeface="Montserrat"/>
-              </a:rPr>
-              <a:t>•  </a:t>
+                  <a:srgbClr val="E8801A"/>
+                </a:solidFill>
+                <a:latin typeface="Montserrat"/>
+              </a:rPr>
+              <a:t>▸  </a:t>
             </a:r>
             <a:r>
               <a:rPr sz="1600" b="0" i="0">
@@ -10133,14 +10772,14 @@
                 </a:solidFill>
                 <a:latin typeface="Montserrat"/>
               </a:rPr>
-              <a:t>20 cm a enchufes y a calderas</a:t>
-            </a:r>
-          </a:p>
-        </p:txBody>
-      </p:sp>
-      <p:sp>
-        <p:nvSpPr>
-          <p:cNvPr id="8" name="imgph" descr="IMGQ:gas meter near kitchen stove"/>
+              <a:t>Metal, obra enlucida o plástico C-s3,d0</a:t>
+            </a:r>
+          </a:p>
+        </p:txBody>
+      </p:sp>
+      <p:sp>
+        <p:nvSpPr>
+          <p:cNvPr id="9" name="imgph" descr="IMGQ:single gas meter in wall niche"/>
           <p:cNvSpPr/>
           <p:nvPr/>
         </p:nvSpPr>
@@ -10186,7 +10825,7 @@
       </p:sp>
       <p:sp>
         <p:nvSpPr>
-          <p:cNvPr id="9" name="TextBox 8"/>
+          <p:cNvPr id="10" name="TextBox 9"/>
           <p:cNvSpPr txBox="1"/>
           <p:nvPr/>
         </p:nvSpPr>
@@ -10226,7 +10865,7 @@
                 </a:solidFill>
                 <a:latin typeface="Montserrat"/>
               </a:rPr>
-              <a:t>gas meter near kitchen stove</a:t>
+              <a:t>single gas meter in wall niche</a:t>
             </a:r>
           </a:p>
         </p:txBody>
@@ -10323,7 +10962,7 @@
                 </a:solidFill>
                 <a:latin typeface="Montserrat"/>
               </a:rPr>
-              <a:t>021 / 024</a:t>
+              <a:t>021 / 025</a:t>
             </a:r>
           </a:p>
         </p:txBody>
@@ -10371,7 +11010,7 @@
         <p:spPr>
           <a:xfrm>
             <a:off x="822960" y="457200"/>
-            <a:ext cx="8229600" cy="365760"/>
+            <a:ext cx="10058400" cy="365760"/>
           </a:xfrm>
           <a:prstGeom prst="rect">
             <a:avLst/>
@@ -10385,13 +11024,13 @@
           <a:lstStyle/>
           <a:p>
             <a:r>
-              <a:rPr sz="1200" b="1" i="0">
-                <a:solidFill>
-                  <a:srgbClr val="64748B"/>
-                </a:solidFill>
-                <a:latin typeface="Montserrat"/>
-              </a:rPr>
-              <a:t>CONTADOR EN INTERIOR · PROHIBICIONES</a:t>
+              <a:rPr sz="1300" b="1" i="0">
+                <a:solidFill>
+                  <a:srgbClr val="E8801A"/>
+                </a:solidFill>
+                <a:latin typeface="Montserrat"/>
+              </a:rPr>
+              <a:t>CONTADOR EN INTERIOR DE VIVIENDA</a:t>
             </a:r>
           </a:p>
         </p:txBody>
@@ -10419,26 +11058,70 @@
           <a:lstStyle/>
           <a:p>
             <a:r>
-              <a:rPr sz="2700" b="1" i="0">
+              <a:rPr sz="2800" b="1" i="0">
                 <a:solidFill>
                   <a:srgbClr val="1E2761"/>
                 </a:solidFill>
                 <a:latin typeface="Montserrat"/>
               </a:rPr>
-              <a:t>Dónde nunca ponerlo</a:t>
-            </a:r>
-          </a:p>
-        </p:txBody>
-      </p:sp>
-      <p:sp>
-        <p:nvSpPr>
-          <p:cNvPr id="7" name="TextBox 6"/>
+              <a:t>Distancias de seguridad</a:t>
+            </a:r>
+          </a:p>
+        </p:txBody>
+      </p:sp>
+      <p:sp>
+        <p:nvSpPr>
+          <p:cNvPr id="7" name="Rounded Rectangle 6"/>
+          <p:cNvSpPr/>
+          <p:nvPr/>
+        </p:nvSpPr>
+        <p:spPr>
+          <a:xfrm>
+            <a:off x="868680" y="1627632"/>
+            <a:ext cx="2011680" cy="73152"/>
+          </a:xfrm>
+          <a:prstGeom prst="roundRect">
+            <a:avLst/>
+          </a:prstGeom>
+          <a:solidFill>
+            <a:srgbClr val="E8801A"/>
+          </a:solidFill>
+          <a:ln>
+            <a:noFill/>
+          </a:ln>
+          <a:effectLst/>
+        </p:spPr>
+        <p:style>
+          <a:lnRef idx="1">
+            <a:schemeClr val="accent1"/>
+          </a:lnRef>
+          <a:fillRef idx="3">
+            <a:schemeClr val="accent1"/>
+          </a:fillRef>
+          <a:effectRef idx="2">
+            <a:schemeClr val="accent1"/>
+          </a:effectRef>
+          <a:fontRef idx="minor">
+            <a:schemeClr val="lt1"/>
+          </a:fontRef>
+        </p:style>
+        <p:txBody>
+          <a:bodyPr rtlCol="0" anchor="ctr"/>
+          <a:lstStyle/>
+          <a:p>
+            <a:pPr algn="ctr"/>
+          </a:p>
+        </p:txBody>
+      </p:sp>
+      <p:sp>
+        <p:nvSpPr>
+          <p:cNvPr id="8" name="TextBox 7"/>
           <p:cNvSpPr txBox="1"/>
           <p:nvPr/>
         </p:nvSpPr>
         <p:spPr>
           <a:xfrm>
-            <a:off x="822960" y="1920240"/>
+            <a:off x="822960" y="1965960"/>
             <a:ext cx="4983480" cy="4206240"/>
           </a:xfrm>
           <a:prstGeom prst="rect">
@@ -10454,17 +11137,17 @@
           <a:p>
             <a:pPr>
               <a:spcAft>
-                <a:spcPts val="1000"/>
+                <a:spcPts val="1100"/>
               </a:spcAft>
             </a:pPr>
             <a:r>
               <a:rPr sz="1600" b="1" i="0">
                 <a:solidFill>
-                  <a:srgbClr val="2E3A80"/>
-                </a:solidFill>
-                <a:latin typeface="Montserrat"/>
-              </a:rPr>
-              <a:t>•  </a:t>
+                  <a:srgbClr val="E8801A"/>
+                </a:solidFill>
+                <a:latin typeface="Montserrat"/>
+              </a:rPr>
+              <a:t>▸  </a:t>
             </a:r>
             <a:r>
               <a:rPr sz="1600" b="0" i="0">
@@ -10473,23 +11156,23 @@
                 </a:solidFill>
                 <a:latin typeface="Montserrat"/>
               </a:rPr>
-              <a:t>Nunca en dormitorios ni baños</a:t>
+              <a:t>Totalizador a 1,7 m como máximo</a:t>
             </a:r>
           </a:p>
           <a:p>
             <a:pPr>
               <a:spcAft>
-                <a:spcPts val="1000"/>
+                <a:spcPts val="1100"/>
               </a:spcAft>
             </a:pPr>
             <a:r>
               <a:rPr sz="1600" b="1" i="0">
                 <a:solidFill>
-                  <a:srgbClr val="2E3A80"/>
-                </a:solidFill>
-                <a:latin typeface="Montserrat"/>
-              </a:rPr>
-              <a:t>•  </a:t>
+                  <a:srgbClr val="E8801A"/>
+                </a:solidFill>
+                <a:latin typeface="Montserrat"/>
+              </a:rPr>
+              <a:t>▸  </a:t>
             </a:r>
             <a:r>
               <a:rPr sz="1600" b="0" i="0">
@@ -10498,23 +11181,23 @@
                 </a:solidFill>
                 <a:latin typeface="Montserrat"/>
               </a:rPr>
-              <a:t>Salvo local sin ellos y más de 75 m³</a:t>
+              <a:t>40 cm a los fuegos de la cocina</a:t>
             </a:r>
           </a:p>
           <a:p>
             <a:pPr>
               <a:spcAft>
-                <a:spcPts val="1000"/>
+                <a:spcPts val="1100"/>
               </a:spcAft>
             </a:pPr>
             <a:r>
               <a:rPr sz="1600" b="1" i="0">
                 <a:solidFill>
-                  <a:srgbClr val="2E3A80"/>
-                </a:solidFill>
-                <a:latin typeface="Montserrat"/>
-              </a:rPr>
-              <a:t>•  </a:t>
+                  <a:srgbClr val="E8801A"/>
+                </a:solidFill>
+                <a:latin typeface="Montserrat"/>
+              </a:rPr>
+              <a:t>▸  </a:t>
             </a:r>
             <a:r>
               <a:rPr sz="1600" b="0" i="0">
@@ -10523,14 +11206,14 @@
                 </a:solidFill>
                 <a:latin typeface="Montserrat"/>
               </a:rPr>
-              <a:t>Nunca bajo el fregadero</a:t>
-            </a:r>
-          </a:p>
-        </p:txBody>
-      </p:sp>
-      <p:sp>
-        <p:nvSpPr>
-          <p:cNvPr id="8" name="imgph" descr="IMGQ:gas meter installation inside kitchen"/>
+              <a:t>20 cm a enchufes y a calderas</a:t>
+            </a:r>
+          </a:p>
+        </p:txBody>
+      </p:sp>
+      <p:sp>
+        <p:nvSpPr>
+          <p:cNvPr id="9" name="imgph" descr="IMGQ:gas meter near kitchen stove"/>
           <p:cNvSpPr/>
           <p:nvPr/>
         </p:nvSpPr>
@@ -10576,7 +11259,7 @@
       </p:sp>
       <p:sp>
         <p:nvSpPr>
-          <p:cNvPr id="9" name="TextBox 8"/>
+          <p:cNvPr id="10" name="TextBox 9"/>
           <p:cNvSpPr txBox="1"/>
           <p:nvPr/>
         </p:nvSpPr>
@@ -10616,7 +11299,7 @@
                 </a:solidFill>
                 <a:latin typeface="Montserrat"/>
               </a:rPr>
-              <a:t>gas meter installation inside kitchen</a:t>
+              <a:t>gas meter near kitchen stove</a:t>
             </a:r>
           </a:p>
         </p:txBody>
@@ -10713,7 +11396,7 @@
                 </a:solidFill>
                 <a:latin typeface="Montserrat"/>
               </a:rPr>
-              <a:t>022 / 024</a:t>
+              <a:t>022 / 025</a:t>
             </a:r>
           </a:p>
         </p:txBody>
@@ -10761,7 +11444,7 @@
         <p:spPr>
           <a:xfrm>
             <a:off x="822960" y="457200"/>
-            <a:ext cx="8229600" cy="365760"/>
+            <a:ext cx="10058400" cy="365760"/>
           </a:xfrm>
           <a:prstGeom prst="rect">
             <a:avLst/>
@@ -10775,13 +11458,13 @@
           <a:lstStyle/>
           <a:p>
             <a:r>
-              <a:rPr sz="1200" b="1" i="0">
-                <a:solidFill>
-                  <a:srgbClr val="64748B"/>
-                </a:solidFill>
-                <a:latin typeface="Montserrat"/>
-              </a:rPr>
-              <a:t>CONTADOR EN EL EXTERIOR</a:t>
+              <a:rPr sz="1300" b="1" i="0">
+                <a:solidFill>
+                  <a:srgbClr val="E8801A"/>
+                </a:solidFill>
+                <a:latin typeface="Montserrat"/>
+              </a:rPr>
+              <a:t>CONTADOR EN INTERIOR · PROHIBICIONES</a:t>
             </a:r>
           </a:p>
         </p:txBody>
@@ -10809,26 +11492,70 @@
           <a:lstStyle/>
           <a:p>
             <a:r>
-              <a:rPr sz="2700" b="1" i="0">
+              <a:rPr sz="2800" b="1" i="0">
                 <a:solidFill>
                   <a:srgbClr val="1E2761"/>
                 </a:solidFill>
                 <a:latin typeface="Montserrat"/>
               </a:rPr>
-              <a:t>A la intemperie, soporte reforzado</a:t>
-            </a:r>
-          </a:p>
-        </p:txBody>
-      </p:sp>
-      <p:sp>
-        <p:nvSpPr>
-          <p:cNvPr id="7" name="TextBox 6"/>
+              <a:t>Dónde nunca ponerlo</a:t>
+            </a:r>
+          </a:p>
+        </p:txBody>
+      </p:sp>
+      <p:sp>
+        <p:nvSpPr>
+          <p:cNvPr id="7" name="Rounded Rectangle 6"/>
+          <p:cNvSpPr/>
+          <p:nvPr/>
+        </p:nvSpPr>
+        <p:spPr>
+          <a:xfrm>
+            <a:off x="868680" y="1627632"/>
+            <a:ext cx="2011680" cy="73152"/>
+          </a:xfrm>
+          <a:prstGeom prst="roundRect">
+            <a:avLst/>
+          </a:prstGeom>
+          <a:solidFill>
+            <a:srgbClr val="E8801A"/>
+          </a:solidFill>
+          <a:ln>
+            <a:noFill/>
+          </a:ln>
+          <a:effectLst/>
+        </p:spPr>
+        <p:style>
+          <a:lnRef idx="1">
+            <a:schemeClr val="accent1"/>
+          </a:lnRef>
+          <a:fillRef idx="3">
+            <a:schemeClr val="accent1"/>
+          </a:fillRef>
+          <a:effectRef idx="2">
+            <a:schemeClr val="accent1"/>
+          </a:effectRef>
+          <a:fontRef idx="minor">
+            <a:schemeClr val="lt1"/>
+          </a:fontRef>
+        </p:style>
+        <p:txBody>
+          <a:bodyPr rtlCol="0" anchor="ctr"/>
+          <a:lstStyle/>
+          <a:p>
+            <a:pPr algn="ctr"/>
+          </a:p>
+        </p:txBody>
+      </p:sp>
+      <p:sp>
+        <p:nvSpPr>
+          <p:cNvPr id="8" name="TextBox 7"/>
           <p:cNvSpPr txBox="1"/>
           <p:nvPr/>
         </p:nvSpPr>
         <p:spPr>
           <a:xfrm>
-            <a:off x="822960" y="1920240"/>
+            <a:off x="822960" y="1965960"/>
             <a:ext cx="4983480" cy="4206240"/>
           </a:xfrm>
           <a:prstGeom prst="rect">
@@ -10844,17 +11571,17 @@
           <a:p>
             <a:pPr>
               <a:spcAft>
-                <a:spcPts val="1000"/>
+                <a:spcPts val="1100"/>
               </a:spcAft>
             </a:pPr>
             <a:r>
               <a:rPr sz="1600" b="1" i="0">
                 <a:solidFill>
-                  <a:srgbClr val="2E3A80"/>
-                </a:solidFill>
-                <a:latin typeface="Montserrat"/>
-              </a:rPr>
-              <a:t>•  </a:t>
+                  <a:srgbClr val="E8801A"/>
+                </a:solidFill>
+                <a:latin typeface="Montserrat"/>
+              </a:rPr>
+              <a:t>▸  </a:t>
             </a:r>
             <a:r>
               <a:rPr sz="1600" b="0" i="0">
@@ -10863,23 +11590,23 @@
                 </a:solidFill>
                 <a:latin typeface="Montserrat"/>
               </a:rPr>
-              <a:t>Intemperie o alféizar: soporte reforzado</a:t>
+              <a:t>Nunca en dormitorios ni baños</a:t>
             </a:r>
           </a:p>
           <a:p>
             <a:pPr>
               <a:spcAft>
-                <a:spcPts val="1000"/>
+                <a:spcPts val="1100"/>
               </a:spcAft>
             </a:pPr>
             <a:r>
               <a:rPr sz="1600" b="1" i="0">
                 <a:solidFill>
-                  <a:srgbClr val="2E3A80"/>
-                </a:solidFill>
-                <a:latin typeface="Montserrat"/>
-              </a:rPr>
-              <a:t>•  </a:t>
+                  <a:srgbClr val="E8801A"/>
+                </a:solidFill>
+                <a:latin typeface="Montserrat"/>
+              </a:rPr>
+              <a:t>▸  </a:t>
             </a:r>
             <a:r>
               <a:rPr sz="1600" b="0" i="0">
@@ -10888,23 +11615,23 @@
                 </a:solidFill>
                 <a:latin typeface="Montserrat"/>
               </a:rPr>
-              <a:t>Balcón o terraza techados: soporte normal</a:t>
+              <a:t>Salvo local sin ellos y más de 75 m³</a:t>
             </a:r>
           </a:p>
           <a:p>
             <a:pPr>
               <a:spcAft>
-                <a:spcPts val="1000"/>
+                <a:spcPts val="1100"/>
               </a:spcAft>
             </a:pPr>
             <a:r>
               <a:rPr sz="1600" b="1" i="0">
                 <a:solidFill>
-                  <a:srgbClr val="2E3A80"/>
-                </a:solidFill>
-                <a:latin typeface="Montserrat"/>
-              </a:rPr>
-              <a:t>•  </a:t>
+                  <a:srgbClr val="E8801A"/>
+                </a:solidFill>
+                <a:latin typeface="Montserrat"/>
+              </a:rPr>
+              <a:t>▸  </a:t>
             </a:r>
             <a:r>
               <a:rPr sz="1600" b="0" i="0">
@@ -10913,14 +11640,14 @@
                 </a:solidFill>
                 <a:latin typeface="Montserrat"/>
               </a:rPr>
-              <a:t>Totalizador a 1,7 m como máximo</a:t>
-            </a:r>
-          </a:p>
-        </p:txBody>
-      </p:sp>
-      <p:sp>
-        <p:nvSpPr>
-          <p:cNvPr id="8" name="imgph" descr="IMGQ:gas meter bracket on outdoor wall"/>
+              <a:t>Nunca bajo el fregadero</a:t>
+            </a:r>
+          </a:p>
+        </p:txBody>
+      </p:sp>
+      <p:sp>
+        <p:nvSpPr>
+          <p:cNvPr id="9" name="imgph" descr="IMGQ:gas meter installation inside kitchen"/>
           <p:cNvSpPr/>
           <p:nvPr/>
         </p:nvSpPr>
@@ -10966,7 +11693,7 @@
       </p:sp>
       <p:sp>
         <p:nvSpPr>
-          <p:cNvPr id="9" name="TextBox 8"/>
+          <p:cNvPr id="10" name="TextBox 9"/>
           <p:cNvSpPr txBox="1"/>
           <p:nvPr/>
         </p:nvSpPr>
@@ -11006,7 +11733,7 @@
                 </a:solidFill>
                 <a:latin typeface="Montserrat"/>
               </a:rPr>
-              <a:t>gas meter bracket on outdoor wall</a:t>
+              <a:t>gas meter installation inside kitchen</a:t>
             </a:r>
           </a:p>
         </p:txBody>
@@ -11103,7 +11830,7 @@
                 </a:solidFill>
                 <a:latin typeface="Montserrat"/>
               </a:rPr>
-              <a:t>023 / 024</a:t>
+              <a:t>023 / 025</a:t>
             </a:r>
           </a:p>
         </p:txBody>
@@ -11151,7 +11878,7 @@
         <p:spPr>
           <a:xfrm>
             <a:off x="822960" y="457200"/>
-            <a:ext cx="8229600" cy="365760"/>
+            <a:ext cx="10058400" cy="365760"/>
           </a:xfrm>
           <a:prstGeom prst="rect">
             <a:avLst/>
@@ -11165,13 +11892,13 @@
           <a:lstStyle/>
           <a:p>
             <a:r>
-              <a:rPr sz="1200" b="1" i="0">
-                <a:solidFill>
-                  <a:srgbClr val="64748B"/>
-                </a:solidFill>
-                <a:latin typeface="Montserrat"/>
-              </a:rPr>
-              <a:t>EL PAPELEO</a:t>
+              <a:rPr sz="1300" b="1" i="0">
+                <a:solidFill>
+                  <a:srgbClr val="E8801A"/>
+                </a:solidFill>
+                <a:latin typeface="Montserrat"/>
+              </a:rPr>
+              <a:t>CONTADOR EN EL EXTERIOR</a:t>
             </a:r>
           </a:p>
         </p:txBody>
@@ -11199,26 +11926,70 @@
           <a:lstStyle/>
           <a:p>
             <a:r>
-              <a:rPr sz="2700" b="1" i="0">
+              <a:rPr sz="2800" b="1" i="0">
                 <a:solidFill>
                   <a:srgbClr val="1E2761"/>
                 </a:solidFill>
                 <a:latin typeface="Montserrat"/>
               </a:rPr>
-              <a:t>Lo que firmas y adónde va</a:t>
-            </a:r>
-          </a:p>
-        </p:txBody>
-      </p:sp>
-      <p:sp>
-        <p:nvSpPr>
-          <p:cNvPr id="7" name="TextBox 6"/>
+              <a:t>A la intemperie, soporte reforzado</a:t>
+            </a:r>
+          </a:p>
+        </p:txBody>
+      </p:sp>
+      <p:sp>
+        <p:nvSpPr>
+          <p:cNvPr id="7" name="Rounded Rectangle 6"/>
+          <p:cNvSpPr/>
+          <p:nvPr/>
+        </p:nvSpPr>
+        <p:spPr>
+          <a:xfrm>
+            <a:off x="868680" y="1627632"/>
+            <a:ext cx="2011680" cy="73152"/>
+          </a:xfrm>
+          <a:prstGeom prst="roundRect">
+            <a:avLst/>
+          </a:prstGeom>
+          <a:solidFill>
+            <a:srgbClr val="E8801A"/>
+          </a:solidFill>
+          <a:ln>
+            <a:noFill/>
+          </a:ln>
+          <a:effectLst/>
+        </p:spPr>
+        <p:style>
+          <a:lnRef idx="1">
+            <a:schemeClr val="accent1"/>
+          </a:lnRef>
+          <a:fillRef idx="3">
+            <a:schemeClr val="accent1"/>
+          </a:fillRef>
+          <a:effectRef idx="2">
+            <a:schemeClr val="accent1"/>
+          </a:effectRef>
+          <a:fontRef idx="minor">
+            <a:schemeClr val="lt1"/>
+          </a:fontRef>
+        </p:style>
+        <p:txBody>
+          <a:bodyPr rtlCol="0" anchor="ctr"/>
+          <a:lstStyle/>
+          <a:p>
+            <a:pPr algn="ctr"/>
+          </a:p>
+        </p:txBody>
+      </p:sp>
+      <p:sp>
+        <p:nvSpPr>
+          <p:cNvPr id="8" name="TextBox 7"/>
           <p:cNvSpPr txBox="1"/>
           <p:nvPr/>
         </p:nvSpPr>
         <p:spPr>
           <a:xfrm>
-            <a:off x="822960" y="1920240"/>
+            <a:off x="822960" y="1965960"/>
             <a:ext cx="4983480" cy="4206240"/>
           </a:xfrm>
           <a:prstGeom prst="rect">
@@ -11234,17 +12005,17 @@
           <a:p>
             <a:pPr>
               <a:spcAft>
-                <a:spcPts val="1000"/>
+                <a:spcPts val="1100"/>
               </a:spcAft>
             </a:pPr>
             <a:r>
               <a:rPr sz="1600" b="1" i="0">
                 <a:solidFill>
-                  <a:srgbClr val="2E3A80"/>
-                </a:solidFill>
-                <a:latin typeface="Montserrat"/>
-              </a:rPr>
-              <a:t>•  </a:t>
+                  <a:srgbClr val="E8801A"/>
+                </a:solidFill>
+                <a:latin typeface="Montserrat"/>
+              </a:rPr>
+              <a:t>▸  </a:t>
             </a:r>
             <a:r>
               <a:rPr sz="1600" b="0" i="0">
@@ -11253,23 +12024,23 @@
                 </a:solidFill>
                 <a:latin typeface="Montserrat"/>
               </a:rPr>
-              <a:t>IRG-2: instalación común; IRG-3: individual</a:t>
+              <a:t>Intemperie o alféizar: soporte reforzado</a:t>
             </a:r>
           </a:p>
           <a:p>
             <a:pPr>
               <a:spcAft>
-                <a:spcPts val="1000"/>
+                <a:spcPts val="1100"/>
               </a:spcAft>
             </a:pPr>
             <a:r>
               <a:rPr sz="1600" b="1" i="0">
                 <a:solidFill>
-                  <a:srgbClr val="2E3A80"/>
-                </a:solidFill>
-                <a:latin typeface="Montserrat"/>
-              </a:rPr>
-              <a:t>•  </a:t>
+                  <a:srgbClr val="E8801A"/>
+                </a:solidFill>
+                <a:latin typeface="Montserrat"/>
+              </a:rPr>
+              <a:t>▸  </a:t>
             </a:r>
             <a:r>
               <a:rPr sz="1600" b="0" i="0">
@@ -11278,23 +12049,23 @@
                 </a:solidFill>
                 <a:latin typeface="Montserrat"/>
               </a:rPr>
-              <a:t>Firma el instalador habilitado, copia al titular</a:t>
+              <a:t>Balcón o terraza techados: soporte normal</a:t>
             </a:r>
           </a:p>
           <a:p>
             <a:pPr>
               <a:spcAft>
-                <a:spcPts val="1000"/>
+                <a:spcPts val="1100"/>
               </a:spcAft>
             </a:pPr>
             <a:r>
               <a:rPr sz="1600" b="1" i="0">
                 <a:solidFill>
-                  <a:srgbClr val="2E3A80"/>
-                </a:solidFill>
-                <a:latin typeface="Montserrat"/>
-              </a:rPr>
-              <a:t>•  </a:t>
+                  <a:srgbClr val="E8801A"/>
+                </a:solidFill>
+                <a:latin typeface="Montserrat"/>
+              </a:rPr>
+              <a:t>▸  </a:t>
             </a:r>
             <a:r>
               <a:rPr sz="1600" b="0" i="0">
@@ -11303,14 +12074,14 @@
                 </a:solidFill>
                 <a:latin typeface="Montserrat"/>
               </a:rPr>
-              <a:t>El distribuidor precinta el contador</a:t>
-            </a:r>
-          </a:p>
-        </p:txBody>
-      </p:sp>
-      <p:sp>
-        <p:nvSpPr>
-          <p:cNvPr id="8" name="imgph" descr="IMGQ:technician sealing a gas meter"/>
+              <a:t>Totalizador a 1,7 m como máximo</a:t>
+            </a:r>
+          </a:p>
+        </p:txBody>
+      </p:sp>
+      <p:sp>
+        <p:nvSpPr>
+          <p:cNvPr id="9" name="imgph" descr="IMGQ:gas meter bracket on outdoor wall"/>
           <p:cNvSpPr/>
           <p:nvPr/>
         </p:nvSpPr>
@@ -11356,7 +12127,7 @@
       </p:sp>
       <p:sp>
         <p:nvSpPr>
-          <p:cNvPr id="9" name="TextBox 8"/>
+          <p:cNvPr id="10" name="TextBox 9"/>
           <p:cNvSpPr txBox="1"/>
           <p:nvPr/>
         </p:nvSpPr>
@@ -11396,7 +12167,7 @@
                 </a:solidFill>
                 <a:latin typeface="Montserrat"/>
               </a:rPr>
-              <a:t>technician sealing a gas meter</a:t>
+              <a:t>gas meter bracket on outdoor wall</a:t>
             </a:r>
           </a:p>
         </p:txBody>
@@ -11434,6 +12205,440 @@
             <a:avLst/>
           </a:prstGeom>
           <a:solidFill>
+            <a:srgbClr val="FFFFFF"/>
+          </a:solidFill>
+          <a:ln>
+            <a:noFill/>
+          </a:ln>
+          <a:effectLst/>
+        </p:spPr>
+        <p:style>
+          <a:lnRef idx="1">
+            <a:schemeClr val="accent1"/>
+          </a:lnRef>
+          <a:fillRef idx="3">
+            <a:schemeClr val="accent1"/>
+          </a:fillRef>
+          <a:effectRef idx="2">
+            <a:schemeClr val="accent1"/>
+          </a:effectRef>
+          <a:fontRef idx="minor">
+            <a:schemeClr val="lt1"/>
+          </a:fontRef>
+        </p:style>
+        <p:txBody>
+          <a:bodyPr rtlCol="0" anchor="ctr"/>
+          <a:lstStyle/>
+          <a:p>
+            <a:pPr algn="ctr"/>
+          </a:p>
+        </p:txBody>
+      </p:sp>
+      <p:sp>
+        <p:nvSpPr>
+          <p:cNvPr id="3" name="TextBox 2"/>
+          <p:cNvSpPr txBox="1"/>
+          <p:nvPr/>
+        </p:nvSpPr>
+        <p:spPr>
+          <a:xfrm>
+            <a:off x="10607040" y="320040"/>
+            <a:ext cx="1371600" cy="365760"/>
+          </a:xfrm>
+          <a:prstGeom prst="rect">
+            <a:avLst/>
+          </a:prstGeom>
+          <a:noFill/>
+        </p:spPr>
+        <p:txBody>
+          <a:bodyPr wrap="square">
+            <a:spAutoFit/>
+          </a:bodyPr>
+          <a:lstStyle/>
+          <a:p>
+            <a:pPr algn="r"/>
+            <a:r>
+              <a:rPr sz="1000" b="1" i="0">
+                <a:solidFill>
+                  <a:srgbClr val="64748B"/>
+                </a:solidFill>
+                <a:latin typeface="Montserrat"/>
+              </a:rPr>
+              <a:t>024 / 025</a:t>
+            </a:r>
+          </a:p>
+        </p:txBody>
+      </p:sp>
+      <p:sp>
+        <p:nvSpPr>
+          <p:cNvPr id="4" name="TextBox 3"/>
+          <p:cNvSpPr txBox="1"/>
+          <p:nvPr/>
+        </p:nvSpPr>
+        <p:spPr>
+          <a:xfrm>
+            <a:off x="457200" y="6419088"/>
+            <a:ext cx="8229600" cy="365760"/>
+          </a:xfrm>
+          <a:prstGeom prst="rect">
+            <a:avLst/>
+          </a:prstGeom>
+          <a:noFill/>
+        </p:spPr>
+        <p:txBody>
+          <a:bodyPr wrap="square">
+            <a:spAutoFit/>
+          </a:bodyPr>
+          <a:lstStyle/>
+          <a:p>
+            <a:r>
+              <a:rPr sz="900" b="0" i="0">
+                <a:solidFill>
+                  <a:srgbClr val="64748B"/>
+                </a:solidFill>
+                <a:latin typeface="Montserrat"/>
+              </a:rPr>
+              <a:t>Curso Gas B · Tema 12 · UNE 60670-5</a:t>
+            </a:r>
+          </a:p>
+        </p:txBody>
+      </p:sp>
+      <p:sp>
+        <p:nvSpPr>
+          <p:cNvPr id="5" name="TextBox 4"/>
+          <p:cNvSpPr txBox="1"/>
+          <p:nvPr/>
+        </p:nvSpPr>
+        <p:spPr>
+          <a:xfrm>
+            <a:off x="822960" y="457200"/>
+            <a:ext cx="10058400" cy="365760"/>
+          </a:xfrm>
+          <a:prstGeom prst="rect">
+            <a:avLst/>
+          </a:prstGeom>
+          <a:noFill/>
+        </p:spPr>
+        <p:txBody>
+          <a:bodyPr wrap="square">
+            <a:spAutoFit/>
+          </a:bodyPr>
+          <a:lstStyle/>
+          <a:p>
+            <a:r>
+              <a:rPr sz="1300" b="1" i="0">
+                <a:solidFill>
+                  <a:srgbClr val="E8801A"/>
+                </a:solidFill>
+                <a:latin typeface="Montserrat"/>
+              </a:rPr>
+              <a:t>EL PAPELEO</a:t>
+            </a:r>
+          </a:p>
+        </p:txBody>
+      </p:sp>
+      <p:sp>
+        <p:nvSpPr>
+          <p:cNvPr id="6" name="TextBox 5"/>
+          <p:cNvSpPr txBox="1"/>
+          <p:nvPr/>
+        </p:nvSpPr>
+        <p:spPr>
+          <a:xfrm>
+            <a:off x="822960" y="868680"/>
+            <a:ext cx="10515600" cy="914400"/>
+          </a:xfrm>
+          <a:prstGeom prst="rect">
+            <a:avLst/>
+          </a:prstGeom>
+          <a:noFill/>
+        </p:spPr>
+        <p:txBody>
+          <a:bodyPr wrap="square">
+            <a:spAutoFit/>
+          </a:bodyPr>
+          <a:lstStyle/>
+          <a:p>
+            <a:r>
+              <a:rPr sz="2800" b="1" i="0">
+                <a:solidFill>
+                  <a:srgbClr val="1E2761"/>
+                </a:solidFill>
+                <a:latin typeface="Montserrat"/>
+              </a:rPr>
+              <a:t>Lo que firmas y adónde va</a:t>
+            </a:r>
+          </a:p>
+        </p:txBody>
+      </p:sp>
+      <p:sp>
+        <p:nvSpPr>
+          <p:cNvPr id="7" name="Rounded Rectangle 6"/>
+          <p:cNvSpPr/>
+          <p:nvPr/>
+        </p:nvSpPr>
+        <p:spPr>
+          <a:xfrm>
+            <a:off x="868680" y="1627632"/>
+            <a:ext cx="2011680" cy="73152"/>
+          </a:xfrm>
+          <a:prstGeom prst="roundRect">
+            <a:avLst/>
+          </a:prstGeom>
+          <a:solidFill>
+            <a:srgbClr val="E8801A"/>
+          </a:solidFill>
+          <a:ln>
+            <a:noFill/>
+          </a:ln>
+          <a:effectLst/>
+        </p:spPr>
+        <p:style>
+          <a:lnRef idx="1">
+            <a:schemeClr val="accent1"/>
+          </a:lnRef>
+          <a:fillRef idx="3">
+            <a:schemeClr val="accent1"/>
+          </a:fillRef>
+          <a:effectRef idx="2">
+            <a:schemeClr val="accent1"/>
+          </a:effectRef>
+          <a:fontRef idx="minor">
+            <a:schemeClr val="lt1"/>
+          </a:fontRef>
+        </p:style>
+        <p:txBody>
+          <a:bodyPr rtlCol="0" anchor="ctr"/>
+          <a:lstStyle/>
+          <a:p>
+            <a:pPr algn="ctr"/>
+          </a:p>
+        </p:txBody>
+      </p:sp>
+      <p:sp>
+        <p:nvSpPr>
+          <p:cNvPr id="8" name="TextBox 7"/>
+          <p:cNvSpPr txBox="1"/>
+          <p:nvPr/>
+        </p:nvSpPr>
+        <p:spPr>
+          <a:xfrm>
+            <a:off x="822960" y="1965960"/>
+            <a:ext cx="4983480" cy="4206240"/>
+          </a:xfrm>
+          <a:prstGeom prst="rect">
+            <a:avLst/>
+          </a:prstGeom>
+          <a:noFill/>
+        </p:spPr>
+        <p:txBody>
+          <a:bodyPr wrap="square">
+            <a:spAutoFit/>
+          </a:bodyPr>
+          <a:lstStyle/>
+          <a:p>
+            <a:pPr>
+              <a:spcAft>
+                <a:spcPts val="1100"/>
+              </a:spcAft>
+            </a:pPr>
+            <a:r>
+              <a:rPr sz="1600" b="1" i="0">
+                <a:solidFill>
+                  <a:srgbClr val="E8801A"/>
+                </a:solidFill>
+                <a:latin typeface="Montserrat"/>
+              </a:rPr>
+              <a:t>▸  </a:t>
+            </a:r>
+            <a:r>
+              <a:rPr sz="1600" b="0" i="0">
+                <a:solidFill>
+                  <a:srgbClr val="1B2330"/>
+                </a:solidFill>
+                <a:latin typeface="Montserrat"/>
+              </a:rPr>
+              <a:t>IRG-2: instalación común; IRG-3: individual</a:t>
+            </a:r>
+          </a:p>
+          <a:p>
+            <a:pPr>
+              <a:spcAft>
+                <a:spcPts val="1100"/>
+              </a:spcAft>
+            </a:pPr>
+            <a:r>
+              <a:rPr sz="1600" b="1" i="0">
+                <a:solidFill>
+                  <a:srgbClr val="E8801A"/>
+                </a:solidFill>
+                <a:latin typeface="Montserrat"/>
+              </a:rPr>
+              <a:t>▸  </a:t>
+            </a:r>
+            <a:r>
+              <a:rPr sz="1600" b="0" i="0">
+                <a:solidFill>
+                  <a:srgbClr val="1B2330"/>
+                </a:solidFill>
+                <a:latin typeface="Montserrat"/>
+              </a:rPr>
+              <a:t>Firma el instalador habilitado, copia al titular</a:t>
+            </a:r>
+          </a:p>
+          <a:p>
+            <a:pPr>
+              <a:spcAft>
+                <a:spcPts val="1100"/>
+              </a:spcAft>
+            </a:pPr>
+            <a:r>
+              <a:rPr sz="1600" b="1" i="0">
+                <a:solidFill>
+                  <a:srgbClr val="E8801A"/>
+                </a:solidFill>
+                <a:latin typeface="Montserrat"/>
+              </a:rPr>
+              <a:t>▸  </a:t>
+            </a:r>
+            <a:r>
+              <a:rPr sz="1600" b="0" i="0">
+                <a:solidFill>
+                  <a:srgbClr val="1B2330"/>
+                </a:solidFill>
+                <a:latin typeface="Montserrat"/>
+              </a:rPr>
+              <a:t>El distribuidor precinta el contador</a:t>
+            </a:r>
+          </a:p>
+        </p:txBody>
+      </p:sp>
+      <p:sp>
+        <p:nvSpPr>
+          <p:cNvPr id="9" name="imgph" descr="IMGQ:technician sealing a gas meter"/>
+          <p:cNvSpPr/>
+          <p:nvPr/>
+        </p:nvSpPr>
+        <p:spPr>
+          <a:xfrm>
+            <a:off x="5806440" y="1051560"/>
+            <a:ext cx="5298947" cy="4629150"/>
+          </a:xfrm>
+          <a:prstGeom prst="roundRect">
+            <a:avLst/>
+          </a:prstGeom>
+          <a:solidFill>
+            <a:srgbClr val="F3F6FB"/>
+          </a:solidFill>
+          <a:ln w="12700">
+            <a:solidFill>
+              <a:srgbClr val="C7D2E6"/>
+            </a:solidFill>
+          </a:ln>
+          <a:effectLst/>
+        </p:spPr>
+        <p:style>
+          <a:lnRef idx="1">
+            <a:schemeClr val="accent1"/>
+          </a:lnRef>
+          <a:fillRef idx="3">
+            <a:schemeClr val="accent1"/>
+          </a:fillRef>
+          <a:effectRef idx="2">
+            <a:schemeClr val="accent1"/>
+          </a:effectRef>
+          <a:fontRef idx="minor">
+            <a:schemeClr val="lt1"/>
+          </a:fontRef>
+        </p:style>
+        <p:txBody>
+          <a:bodyPr rtlCol="0" anchor="ctr"/>
+          <a:lstStyle/>
+          <a:p>
+            <a:pPr algn="ctr"/>
+          </a:p>
+        </p:txBody>
+      </p:sp>
+      <p:sp>
+        <p:nvSpPr>
+          <p:cNvPr id="10" name="TextBox 9"/>
+          <p:cNvSpPr txBox="1"/>
+          <p:nvPr/>
+        </p:nvSpPr>
+        <p:spPr>
+          <a:xfrm>
+            <a:off x="6080760" y="2726055"/>
+            <a:ext cx="4750307" cy="1280160"/>
+          </a:xfrm>
+          <a:prstGeom prst="rect">
+            <a:avLst/>
+          </a:prstGeom>
+          <a:noFill/>
+        </p:spPr>
+        <p:txBody>
+          <a:bodyPr wrap="square">
+            <a:spAutoFit/>
+          </a:bodyPr>
+          <a:lstStyle/>
+          <a:p>
+            <a:pPr algn="ctr"/>
+            <a:r>
+              <a:rPr sz="1400" b="1" i="0">
+                <a:solidFill>
+                  <a:srgbClr val="64748B"/>
+                </a:solidFill>
+                <a:latin typeface="Montserrat"/>
+              </a:rPr>
+              <a:t>IMAGEN REALISTA</a:t>
+            </a:r>
+          </a:p>
+          <a:p>
+            <a:pPr algn="ctr"/>
+            <a:r>
+              <a:rPr sz="1100" b="0" i="1">
+                <a:solidFill>
+                  <a:srgbClr val="64748B"/>
+                </a:solidFill>
+                <a:latin typeface="Montserrat"/>
+              </a:rPr>
+              <a:t>technician sealing a gas meter</a:t>
+            </a:r>
+          </a:p>
+        </p:txBody>
+      </p:sp>
+    </p:spTree>
+  </p:cSld>
+  <p:clrMapOvr>
+    <a:masterClrMapping/>
+  </p:clrMapOvr>
+</p:sld>
+</file>
+
+<file path=ppt/slides/slide25.xml><?xml version="1.0" encoding="utf-8"?>
+<p:sld xmlns:a="http://schemas.openxmlformats.org/drawingml/2006/main" xmlns:p="http://schemas.openxmlformats.org/presentationml/2006/main" xmlns:r="http://schemas.openxmlformats.org/officeDocument/2006/relationships">
+  <p:cSld>
+    <p:spTree>
+      <p:nvGrpSpPr>
+        <p:cNvPr id="1" name=""/>
+        <p:cNvGrpSpPr/>
+        <p:nvPr/>
+      </p:nvGrpSpPr>
+      <p:grpSpPr/>
+      <p:sp>
+        <p:nvSpPr>
+          <p:cNvPr id="2" name="Rectangle 1"/>
+          <p:cNvSpPr/>
+          <p:nvPr/>
+        </p:nvSpPr>
+        <p:spPr>
+          <a:xfrm>
+            <a:off x="0" y="0"/>
+            <a:ext cx="12191695" cy="6858000"/>
+          </a:xfrm>
+          <a:prstGeom prst="rect">
+            <a:avLst/>
+          </a:prstGeom>
+          <a:solidFill>
             <a:srgbClr val="1E2761"/>
           </a:solidFill>
           <a:ln>
@@ -11488,7 +12693,7 @@
             <a:r>
               <a:rPr sz="1400" b="1" i="0">
                 <a:solidFill>
-                  <a:srgbClr val="CADCFC"/>
+                  <a:srgbClr val="F4A24C"/>
                 </a:solidFill>
                 <a:latin typeface="Montserrat"/>
               </a:rPr>
@@ -11499,13 +12704,57 @@
       </p:sp>
       <p:sp>
         <p:nvSpPr>
-          <p:cNvPr id="4" name="TextBox 3"/>
+          <p:cNvPr id="4" name="Rounded Rectangle 3"/>
+          <p:cNvSpPr/>
+          <p:nvPr/>
+        </p:nvSpPr>
+        <p:spPr>
+          <a:xfrm>
+            <a:off x="868680" y="1051560"/>
+            <a:ext cx="1463040" cy="82296"/>
+          </a:xfrm>
+          <a:prstGeom prst="roundRect">
+            <a:avLst/>
+          </a:prstGeom>
+          <a:solidFill>
+            <a:srgbClr val="E8801A"/>
+          </a:solidFill>
+          <a:ln>
+            <a:noFill/>
+          </a:ln>
+          <a:effectLst/>
+        </p:spPr>
+        <p:style>
+          <a:lnRef idx="1">
+            <a:schemeClr val="accent1"/>
+          </a:lnRef>
+          <a:fillRef idx="3">
+            <a:schemeClr val="accent1"/>
+          </a:fillRef>
+          <a:effectRef idx="2">
+            <a:schemeClr val="accent1"/>
+          </a:effectRef>
+          <a:fontRef idx="minor">
+            <a:schemeClr val="lt1"/>
+          </a:fontRef>
+        </p:style>
+        <p:txBody>
+          <a:bodyPr rtlCol="0" anchor="ctr"/>
+          <a:lstStyle/>
+          <a:p>
+            <a:pPr algn="ctr"/>
+          </a:p>
+        </p:txBody>
+      </p:sp>
+      <p:sp>
+        <p:nvSpPr>
+          <p:cNvPr id="5" name="TextBox 4"/>
           <p:cNvSpPr txBox="1"/>
           <p:nvPr/>
         </p:nvSpPr>
         <p:spPr>
           <a:xfrm>
-            <a:off x="822960" y="1143000"/>
+            <a:off x="822960" y="1234440"/>
             <a:ext cx="10515600" cy="1097280"/>
           </a:xfrm>
           <a:prstGeom prst="rect">
@@ -11533,14 +12782,14 @@
       </p:sp>
       <p:sp>
         <p:nvSpPr>
-          <p:cNvPr id="5" name="TextBox 4"/>
+          <p:cNvPr id="6" name="TextBox 5"/>
           <p:cNvSpPr txBox="1"/>
           <p:nvPr/>
         </p:nvSpPr>
         <p:spPr>
           <a:xfrm>
-            <a:off x="822960" y="2514600"/>
-            <a:ext cx="10515600" cy="2834640"/>
+            <a:off x="822960" y="2606040"/>
+            <a:ext cx="10515600" cy="2743200"/>
           </a:xfrm>
           <a:prstGeom prst="rect">
             <a:avLst/>
@@ -11561,7 +12810,7 @@
             <a:r>
               <a:rPr sz="2000" b="1" i="0">
                 <a:solidFill>
-                  <a:srgbClr val="CADCFC"/>
+                  <a:srgbClr val="F4A24C"/>
                 </a:solidFill>
                 <a:latin typeface="Montserrat"/>
               </a:rPr>
@@ -11586,7 +12835,7 @@
             <a:r>
               <a:rPr sz="2000" b="1" i="0">
                 <a:solidFill>
-                  <a:srgbClr val="CADCFC"/>
+                  <a:srgbClr val="F4A24C"/>
                 </a:solidFill>
                 <a:latin typeface="Montserrat"/>
               </a:rPr>
@@ -11611,7 +12860,7 @@
             <a:r>
               <a:rPr sz="2000" b="1" i="0">
                 <a:solidFill>
-                  <a:srgbClr val="CADCFC"/>
+                  <a:srgbClr val="F4A24C"/>
                 </a:solidFill>
                 <a:latin typeface="Montserrat"/>
               </a:rPr>
@@ -11636,7 +12885,7 @@
             <a:r>
               <a:rPr sz="2000" b="1" i="0">
                 <a:solidFill>
-                  <a:srgbClr val="CADCFC"/>
+                  <a:srgbClr val="F4A24C"/>
                 </a:solidFill>
                 <a:latin typeface="Montserrat"/>
               </a:rPr>
@@ -11656,20 +12905,20 @@
       </p:sp>
       <p:sp>
         <p:nvSpPr>
-          <p:cNvPr id="6" name="Rounded Rectangle 5"/>
+          <p:cNvPr id="7" name="Rounded Rectangle 6"/>
           <p:cNvSpPr/>
           <p:nvPr/>
         </p:nvSpPr>
         <p:spPr>
           <a:xfrm>
             <a:off x="822960" y="5532120"/>
-            <a:ext cx="10515600" cy="777240"/>
+            <a:ext cx="10515600" cy="822960"/>
           </a:xfrm>
           <a:prstGeom prst="roundRect">
             <a:avLst/>
           </a:prstGeom>
           <a:solidFill>
-            <a:srgbClr val="2E3A80"/>
+            <a:srgbClr val="E8801A"/>
           </a:solidFill>
           <a:ln>
             <a:noFill/>
@@ -11700,13 +12949,13 @@
       </p:sp>
       <p:sp>
         <p:nvSpPr>
-          <p:cNvPr id="7" name="TextBox 6"/>
+          <p:cNvPr id="8" name="TextBox 7"/>
           <p:cNvSpPr txBox="1"/>
           <p:nvPr/>
         </p:nvSpPr>
         <p:spPr>
           <a:xfrm>
-            <a:off x="1051560" y="5605272"/>
+            <a:off x="1051560" y="5623560"/>
             <a:ext cx="10058400" cy="640080"/>
           </a:xfrm>
           <a:prstGeom prst="rect">
@@ -11723,7 +12972,7 @@
             <a:r>
               <a:rPr sz="1500" b="1" i="1">
                 <a:solidFill>
-                  <a:srgbClr val="CADCFC"/>
+                  <a:srgbClr val="1E2761"/>
                 </a:solidFill>
                 <a:latin typeface="Montserrat"/>
               </a:rPr>
@@ -11824,7 +13073,7 @@
                 </a:solidFill>
                 <a:latin typeface="Montserrat"/>
               </a:rPr>
-              <a:t>003 / 024</a:t>
+              <a:t>003 / 025</a:t>
             </a:r>
           </a:p>
         </p:txBody>
@@ -11871,7 +13120,7 @@
         </p:nvSpPr>
         <p:spPr>
           <a:xfrm>
-            <a:off x="822960" y="457200"/>
+            <a:off x="822960" y="502920"/>
             <a:ext cx="8229600" cy="365760"/>
           </a:xfrm>
           <a:prstGeom prst="rect">
@@ -11886,13 +13135,13 @@
           <a:lstStyle/>
           <a:p>
             <a:r>
-              <a:rPr sz="1200" b="1" i="0">
-                <a:solidFill>
-                  <a:srgbClr val="64748B"/>
-                </a:solidFill>
-                <a:latin typeface="Montserrat"/>
-              </a:rPr>
-              <a:t>OBJETO DE LA PARTE 5</a:t>
+              <a:rPr sz="1300" b="1" i="0">
+                <a:solidFill>
+                  <a:srgbClr val="E8801A"/>
+                </a:solidFill>
+                <a:latin typeface="Montserrat"/>
+              </a:rPr>
+              <a:t>PARTES DE ESTE VÍDEO</a:t>
             </a:r>
           </a:p>
         </p:txBody>
@@ -11905,7 +13154,7 @@
         </p:nvSpPr>
         <p:spPr>
           <a:xfrm>
-            <a:off x="822960" y="868680"/>
+            <a:off x="822960" y="914400"/>
             <a:ext cx="10515600" cy="914400"/>
           </a:xfrm>
           <a:prstGeom prst="rect">
@@ -11926,130 +13175,30 @@
                 </a:solidFill>
                 <a:latin typeface="Montserrat"/>
               </a:rPr>
-              <a:t>La caja, no el contador</a:t>
-            </a:r>
-          </a:p>
-        </p:txBody>
-      </p:sp>
-      <p:sp>
-        <p:nvSpPr>
-          <p:cNvPr id="7" name="TextBox 6"/>
-          <p:cNvSpPr txBox="1"/>
-          <p:nvPr/>
-        </p:nvSpPr>
-        <p:spPr>
-          <a:xfrm>
-            <a:off x="822960" y="1920240"/>
-            <a:ext cx="4983480" cy="4206240"/>
-          </a:xfrm>
-          <a:prstGeom prst="rect">
-            <a:avLst/>
-          </a:prstGeom>
-          <a:noFill/>
-        </p:spPr>
-        <p:txBody>
-          <a:bodyPr wrap="square">
-            <a:spAutoFit/>
-          </a:bodyPr>
-          <a:lstStyle/>
-          <a:p>
-            <a:pPr>
-              <a:spcAft>
-                <a:spcPts val="1000"/>
-              </a:spcAft>
-            </a:pPr>
-            <a:r>
-              <a:rPr sz="1600" b="1" i="0">
-                <a:solidFill>
-                  <a:srgbClr val="2E3A80"/>
-                </a:solidFill>
-                <a:latin typeface="Montserrat"/>
-              </a:rPr>
-              <a:t>•  </a:t>
-            </a:r>
-            <a:r>
-              <a:rPr sz="1600" b="0" i="0">
-                <a:solidFill>
-                  <a:srgbClr val="1B2330"/>
-                </a:solidFill>
-                <a:latin typeface="Montserrat"/>
-              </a:rPr>
-              <a:t>Regula el recinto, no el aparato</a:t>
-            </a:r>
-          </a:p>
-          <a:p>
-            <a:pPr>
-              <a:spcAft>
-                <a:spcPts val="1000"/>
-              </a:spcAft>
-            </a:pPr>
-            <a:r>
-              <a:rPr sz="1600" b="1" i="0">
-                <a:solidFill>
-                  <a:srgbClr val="2E3A80"/>
-                </a:solidFill>
-                <a:latin typeface="Montserrat"/>
-              </a:rPr>
-              <a:t>•  </a:t>
-            </a:r>
-            <a:r>
-              <a:rPr sz="1600" b="0" i="0">
-                <a:solidFill>
-                  <a:srgbClr val="1B2330"/>
-                </a:solidFill>
-                <a:latin typeface="Montserrat"/>
-              </a:rPr>
-              <a:t>4 recintos: local, armario, nicho, conducto</a:t>
-            </a:r>
-          </a:p>
-          <a:p>
-            <a:pPr>
-              <a:spcAft>
-                <a:spcPts val="1000"/>
-              </a:spcAft>
-            </a:pPr>
-            <a:r>
-              <a:rPr sz="1600" b="1" i="0">
-                <a:solidFill>
-                  <a:srgbClr val="2E3A80"/>
-                </a:solidFill>
-                <a:latin typeface="Montserrat"/>
-              </a:rPr>
-              <a:t>•  </a:t>
-            </a:r>
-            <a:r>
-              <a:rPr sz="1600" b="0" i="0">
-                <a:solidFill>
-                  <a:srgbClr val="1B2330"/>
-                </a:solidFill>
-                <a:latin typeface="Montserrat"/>
-              </a:rPr>
-              <a:t>Es la Parte 5 de la UNE 60670</a:t>
-            </a:r>
-          </a:p>
-        </p:txBody>
-      </p:sp>
-      <p:sp>
-        <p:nvSpPr>
-          <p:cNvPr id="8" name="imgph" descr="IMGQ:gas meter cabinet on building wall"/>
+              <a:t>En este vídeo</a:t>
+            </a:r>
+          </a:p>
+        </p:txBody>
+      </p:sp>
+      <p:sp>
+        <p:nvSpPr>
+          <p:cNvPr id="7" name="Rounded Rectangle 6"/>
           <p:cNvSpPr/>
           <p:nvPr/>
         </p:nvSpPr>
         <p:spPr>
           <a:xfrm>
-            <a:off x="5806440" y="1051560"/>
-            <a:ext cx="5298947" cy="4629150"/>
+            <a:off x="868680" y="1673352"/>
+            <a:ext cx="2011680" cy="73152"/>
           </a:xfrm>
           <a:prstGeom prst="roundRect">
             <a:avLst/>
           </a:prstGeom>
           <a:solidFill>
-            <a:srgbClr val="F3F6FB"/>
+            <a:srgbClr val="E8801A"/>
           </a:solidFill>
-          <a:ln w="12700">
-            <a:solidFill>
-              <a:srgbClr val="C7D2E6"/>
-            </a:solidFill>
+          <a:ln>
+            <a:noFill/>
           </a:ln>
           <a:effectLst/>
         </p:spPr>
@@ -12077,14 +13226,14 @@
       </p:sp>
       <p:sp>
         <p:nvSpPr>
-          <p:cNvPr id="9" name="TextBox 8"/>
+          <p:cNvPr id="8" name="TextBox 7"/>
           <p:cNvSpPr txBox="1"/>
           <p:nvPr/>
         </p:nvSpPr>
         <p:spPr>
           <a:xfrm>
-            <a:off x="6080760" y="2726055"/>
-            <a:ext cx="4750307" cy="1280160"/>
+            <a:off x="822960" y="2103120"/>
+            <a:ext cx="10515600" cy="4023360"/>
           </a:xfrm>
           <a:prstGeom prst="rect">
             <a:avLst/>
@@ -12097,27 +13246,228 @@
           </a:bodyPr>
           <a:lstStyle/>
           <a:p>
-            <a:pPr algn="ctr"/>
-            <a:r>
-              <a:rPr sz="1400" b="1" i="0">
-                <a:solidFill>
-                  <a:srgbClr val="64748B"/>
-                </a:solidFill>
-                <a:latin typeface="Montserrat"/>
-              </a:rPr>
-              <a:t>IMAGEN REALISTA</a:t>
-            </a:r>
-          </a:p>
-          <a:p>
-            <a:pPr algn="ctr"/>
-            <a:r>
-              <a:rPr sz="1100" b="0" i="1">
-                <a:solidFill>
-                  <a:srgbClr val="64748B"/>
-                </a:solidFill>
-                <a:latin typeface="Montserrat"/>
-              </a:rPr>
-              <a:t>gas meter cabinet on building wall</a:t>
+            <a:pPr>
+              <a:spcAft>
+                <a:spcPts val="900"/>
+              </a:spcAft>
+            </a:pPr>
+            <a:r>
+              <a:rPr sz="1800" b="1" i="0">
+                <a:solidFill>
+                  <a:srgbClr val="E8801A"/>
+                </a:solidFill>
+                <a:latin typeface="Montserrat"/>
+              </a:rPr>
+              <a:t>01   </a:t>
+            </a:r>
+            <a:r>
+              <a:rPr sz="1700" b="0" i="0">
+                <a:solidFill>
+                  <a:srgbClr val="1B2330"/>
+                </a:solidFill>
+                <a:latin typeface="Montserrat"/>
+              </a:rPr>
+              <a:t>Objeto de la Parte 5</a:t>
+            </a:r>
+          </a:p>
+          <a:p>
+            <a:pPr>
+              <a:spcAft>
+                <a:spcPts val="900"/>
+              </a:spcAft>
+            </a:pPr>
+            <a:r>
+              <a:rPr sz="1800" b="1" i="0">
+                <a:solidFill>
+                  <a:srgbClr val="E8801A"/>
+                </a:solidFill>
+                <a:latin typeface="Montserrat"/>
+              </a:rPr>
+              <a:t>02   </a:t>
+            </a:r>
+            <a:r>
+              <a:rPr sz="1700" b="0" i="0">
+                <a:solidFill>
+                  <a:srgbClr val="1B2330"/>
+                </a:solidFill>
+                <a:latin typeface="Montserrat"/>
+              </a:rPr>
+              <a:t>Generalidades</a:t>
+            </a:r>
+          </a:p>
+          <a:p>
+            <a:pPr>
+              <a:spcAft>
+                <a:spcPts val="900"/>
+              </a:spcAft>
+            </a:pPr>
+            <a:r>
+              <a:rPr sz="1800" b="1" i="0">
+                <a:solidFill>
+                  <a:srgbClr val="E8801A"/>
+                </a:solidFill>
+                <a:latin typeface="Montserrat"/>
+              </a:rPr>
+              <a:t>03   </a:t>
+            </a:r>
+            <a:r>
+              <a:rPr sz="1700" b="0" i="0">
+                <a:solidFill>
+                  <a:srgbClr val="1B2330"/>
+                </a:solidFill>
+                <a:latin typeface="Montserrat"/>
+              </a:rPr>
+              <a:t>Nueva construcción</a:t>
+            </a:r>
+          </a:p>
+          <a:p>
+            <a:pPr>
+              <a:spcAft>
+                <a:spcPts val="900"/>
+              </a:spcAft>
+            </a:pPr>
+            <a:r>
+              <a:rPr sz="1800" b="1" i="0">
+                <a:solidFill>
+                  <a:srgbClr val="E8801A"/>
+                </a:solidFill>
+                <a:latin typeface="Montserrat"/>
+              </a:rPr>
+              <a:t>04   </a:t>
+            </a:r>
+            <a:r>
+              <a:rPr sz="1700" b="0" i="0">
+                <a:solidFill>
+                  <a:srgbClr val="1B2330"/>
+                </a:solidFill>
+                <a:latin typeface="Montserrat"/>
+              </a:rPr>
+              <a:t>Edificio ya construido</a:t>
+            </a:r>
+          </a:p>
+          <a:p>
+            <a:pPr>
+              <a:spcAft>
+                <a:spcPts val="900"/>
+              </a:spcAft>
+            </a:pPr>
+            <a:r>
+              <a:rPr sz="1800" b="1" i="0">
+                <a:solidFill>
+                  <a:srgbClr val="E8801A"/>
+                </a:solidFill>
+                <a:latin typeface="Montserrat"/>
+              </a:rPr>
+              <a:t>05   </a:t>
+            </a:r>
+            <a:r>
+              <a:rPr sz="1700" b="0" i="0">
+                <a:solidFill>
+                  <a:srgbClr val="1B2330"/>
+                </a:solidFill>
+                <a:latin typeface="Montserrat"/>
+              </a:rPr>
+              <a:t>Centralización</a:t>
+            </a:r>
+          </a:p>
+          <a:p>
+            <a:pPr>
+              <a:spcAft>
+                <a:spcPts val="900"/>
+              </a:spcAft>
+            </a:pPr>
+            <a:r>
+              <a:rPr sz="1800" b="1" i="0">
+                <a:solidFill>
+                  <a:srgbClr val="E8801A"/>
+                </a:solidFill>
+                <a:latin typeface="Montserrat"/>
+              </a:rPr>
+              <a:t>06   </a:t>
+            </a:r>
+            <a:r>
+              <a:rPr sz="1700" b="0" i="0">
+                <a:solidFill>
+                  <a:srgbClr val="1B2330"/>
+                </a:solidFill>
+                <a:latin typeface="Montserrat"/>
+              </a:rPr>
+              <a:t>Ventilación</a:t>
+            </a:r>
+          </a:p>
+          <a:p>
+            <a:pPr>
+              <a:spcAft>
+                <a:spcPts val="900"/>
+              </a:spcAft>
+            </a:pPr>
+            <a:r>
+              <a:rPr sz="1800" b="1" i="0">
+                <a:solidFill>
+                  <a:srgbClr val="E8801A"/>
+                </a:solidFill>
+                <a:latin typeface="Montserrat"/>
+              </a:rPr>
+              <a:t>07   </a:t>
+            </a:r>
+            <a:r>
+              <a:rPr sz="1700" b="0" i="0">
+                <a:solidFill>
+                  <a:srgbClr val="1B2330"/>
+                </a:solidFill>
+                <a:latin typeface="Montserrat"/>
+              </a:rPr>
+              <a:t>Conducciones ajenas</a:t>
+            </a:r>
+          </a:p>
+          <a:p>
+            <a:pPr>
+              <a:spcAft>
+                <a:spcPts val="900"/>
+              </a:spcAft>
+            </a:pPr>
+            <a:r>
+              <a:rPr sz="1800" b="1" i="0">
+                <a:solidFill>
+                  <a:srgbClr val="E8801A"/>
+                </a:solidFill>
+                <a:latin typeface="Montserrat"/>
+              </a:rPr>
+              <a:t>08   </a:t>
+            </a:r>
+            <a:r>
+              <a:rPr sz="1700" b="0" i="0">
+                <a:solidFill>
+                  <a:srgbClr val="1B2330"/>
+                </a:solidFill>
+                <a:latin typeface="Montserrat"/>
+              </a:rPr>
+              <a:t>Un solo contador</a:t>
+            </a:r>
+          </a:p>
+          <a:p>
+            <a:pPr>
+              <a:spcAft>
+                <a:spcPts val="900"/>
+              </a:spcAft>
+            </a:pPr>
+            <a:r>
+              <a:rPr sz="1800" b="1" i="0">
+                <a:solidFill>
+                  <a:srgbClr val="E8801A"/>
+                </a:solidFill>
+                <a:latin typeface="Montserrat"/>
+              </a:rPr>
+              <a:t>09   </a:t>
+            </a:r>
+            <a:r>
+              <a:rPr sz="1700" b="0" i="0">
+                <a:solidFill>
+                  <a:srgbClr val="1B2330"/>
+                </a:solidFill>
+                <a:latin typeface="Montserrat"/>
+              </a:rPr>
+              <a:t>Contador en interior de vivienda</a:t>
             </a:r>
           </a:p>
         </p:txBody>
@@ -12214,7 +13564,7 @@
                 </a:solidFill>
                 <a:latin typeface="Montserrat"/>
               </a:rPr>
-              <a:t>004 / 024</a:t>
+              <a:t>004 / 025</a:t>
             </a:r>
           </a:p>
         </p:txBody>
@@ -12262,7 +13612,7 @@
         <p:spPr>
           <a:xfrm>
             <a:off x="822960" y="457200"/>
-            <a:ext cx="8229600" cy="365760"/>
+            <a:ext cx="10058400" cy="365760"/>
           </a:xfrm>
           <a:prstGeom prst="rect">
             <a:avLst/>
@@ -12276,13 +13626,13 @@
           <a:lstStyle/>
           <a:p>
             <a:r>
-              <a:rPr sz="1200" b="1" i="0">
-                <a:solidFill>
-                  <a:srgbClr val="64748B"/>
-                </a:solidFill>
-                <a:latin typeface="Montserrat"/>
-              </a:rPr>
-              <a:t>GENERALIDADES</a:t>
+              <a:rPr sz="1300" b="1" i="0">
+                <a:solidFill>
+                  <a:srgbClr val="E8801A"/>
+                </a:solidFill>
+                <a:latin typeface="Montserrat"/>
+              </a:rPr>
+              <a:t>OBJETO DE LA PARTE 5</a:t>
             </a:r>
           </a:p>
         </p:txBody>
@@ -12310,26 +13660,70 @@
           <a:lstStyle/>
           <a:p>
             <a:r>
-              <a:rPr sz="2700" b="1" i="0">
+              <a:rPr sz="2800" b="1" i="0">
                 <a:solidFill>
                   <a:srgbClr val="1E2761"/>
                 </a:solidFill>
                 <a:latin typeface="Montserrat"/>
               </a:rPr>
-              <a:t>Elegir tipo y capacidad</a:t>
-            </a:r>
-          </a:p>
-        </p:txBody>
-      </p:sp>
-      <p:sp>
-        <p:nvSpPr>
-          <p:cNvPr id="7" name="TextBox 6"/>
+              <a:t>La caja, no el contador</a:t>
+            </a:r>
+          </a:p>
+        </p:txBody>
+      </p:sp>
+      <p:sp>
+        <p:nvSpPr>
+          <p:cNvPr id="7" name="Rounded Rectangle 6"/>
+          <p:cNvSpPr/>
+          <p:nvPr/>
+        </p:nvSpPr>
+        <p:spPr>
+          <a:xfrm>
+            <a:off x="868680" y="1627632"/>
+            <a:ext cx="2011680" cy="73152"/>
+          </a:xfrm>
+          <a:prstGeom prst="roundRect">
+            <a:avLst/>
+          </a:prstGeom>
+          <a:solidFill>
+            <a:srgbClr val="E8801A"/>
+          </a:solidFill>
+          <a:ln>
+            <a:noFill/>
+          </a:ln>
+          <a:effectLst/>
+        </p:spPr>
+        <p:style>
+          <a:lnRef idx="1">
+            <a:schemeClr val="accent1"/>
+          </a:lnRef>
+          <a:fillRef idx="3">
+            <a:schemeClr val="accent1"/>
+          </a:fillRef>
+          <a:effectRef idx="2">
+            <a:schemeClr val="accent1"/>
+          </a:effectRef>
+          <a:fontRef idx="minor">
+            <a:schemeClr val="lt1"/>
+          </a:fontRef>
+        </p:style>
+        <p:txBody>
+          <a:bodyPr rtlCol="0" anchor="ctr"/>
+          <a:lstStyle/>
+          <a:p>
+            <a:pPr algn="ctr"/>
+          </a:p>
+        </p:txBody>
+      </p:sp>
+      <p:sp>
+        <p:nvSpPr>
+          <p:cNvPr id="8" name="TextBox 7"/>
           <p:cNvSpPr txBox="1"/>
           <p:nvPr/>
         </p:nvSpPr>
         <p:spPr>
           <a:xfrm>
-            <a:off x="822960" y="1920240"/>
+            <a:off x="822960" y="1965960"/>
             <a:ext cx="4983480" cy="4206240"/>
           </a:xfrm>
           <a:prstGeom prst="rect">
@@ -12345,17 +13739,17 @@
           <a:p>
             <a:pPr>
               <a:spcAft>
-                <a:spcPts val="1000"/>
+                <a:spcPts val="1100"/>
               </a:spcAft>
             </a:pPr>
             <a:r>
               <a:rPr sz="1600" b="1" i="0">
                 <a:solidFill>
-                  <a:srgbClr val="2E3A80"/>
-                </a:solidFill>
-                <a:latin typeface="Montserrat"/>
-              </a:rPr>
-              <a:t>•  </a:t>
+                  <a:srgbClr val="E8801A"/>
+                </a:solidFill>
+                <a:latin typeface="Montserrat"/>
+              </a:rPr>
+              <a:t>▸  </a:t>
             </a:r>
             <a:r>
               <a:rPr sz="1600" b="0" i="0">
@@ -12364,23 +13758,23 @@
                 </a:solidFill>
                 <a:latin typeface="Montserrat"/>
               </a:rPr>
-              <a:t>Según el gas y los consumos</a:t>
+              <a:t>Regula el recinto, no el aparato</a:t>
             </a:r>
           </a:p>
           <a:p>
             <a:pPr>
               <a:spcAft>
-                <a:spcPts val="1000"/>
+                <a:spcPts val="1100"/>
               </a:spcAft>
             </a:pPr>
             <a:r>
               <a:rPr sz="1600" b="1" i="0">
                 <a:solidFill>
-                  <a:srgbClr val="2E3A80"/>
-                </a:solidFill>
-                <a:latin typeface="Montserrat"/>
-              </a:rPr>
-              <a:t>•  </a:t>
+                  <a:srgbClr val="E8801A"/>
+                </a:solidFill>
+                <a:latin typeface="Montserrat"/>
+              </a:rPr>
+              <a:t>▸  </a:t>
             </a:r>
             <a:r>
               <a:rPr sz="1600" b="0" i="0">
@@ -12389,23 +13783,23 @@
                 </a:solidFill>
                 <a:latin typeface="Montserrat"/>
               </a:rPr>
-              <a:t>Mínimo grado de gasificación 1</a:t>
+              <a:t>4 recintos: local, armario, nicho, conducto</a:t>
             </a:r>
           </a:p>
           <a:p>
             <a:pPr>
               <a:spcAft>
-                <a:spcPts val="1000"/>
+                <a:spcPts val="1100"/>
               </a:spcAft>
             </a:pPr>
             <a:r>
               <a:rPr sz="1600" b="1" i="0">
                 <a:solidFill>
-                  <a:srgbClr val="2E3A80"/>
-                </a:solidFill>
-                <a:latin typeface="Montserrat"/>
-              </a:rPr>
-              <a:t>•  </a:t>
+                  <a:srgbClr val="E8801A"/>
+                </a:solidFill>
+                <a:latin typeface="Montserrat"/>
+              </a:rPr>
+              <a:t>▸  </a:t>
             </a:r>
             <a:r>
               <a:rPr sz="1600" b="0" i="0">
@@ -12414,14 +13808,14 @@
                 </a:solidFill>
                 <a:latin typeface="Montserrat"/>
               </a:rPr>
-              <a:t>Consultar a la empresa distribuidora</a:t>
-            </a:r>
-          </a:p>
-        </p:txBody>
-      </p:sp>
-      <p:sp>
-        <p:nvSpPr>
-          <p:cNvPr id="8" name="imgph" descr="IMGQ:gas meter and regulator installation"/>
+              <a:t>Es la Parte 5 de la UNE 60670</a:t>
+            </a:r>
+          </a:p>
+        </p:txBody>
+      </p:sp>
+      <p:sp>
+        <p:nvSpPr>
+          <p:cNvPr id="9" name="imgph" descr="IMGQ:gas meter cabinet on building wall"/>
           <p:cNvSpPr/>
           <p:nvPr/>
         </p:nvSpPr>
@@ -12467,7 +13861,7 @@
       </p:sp>
       <p:sp>
         <p:nvSpPr>
-          <p:cNvPr id="9" name="TextBox 8"/>
+          <p:cNvPr id="10" name="TextBox 9"/>
           <p:cNvSpPr txBox="1"/>
           <p:nvPr/>
         </p:nvSpPr>
@@ -12507,7 +13901,7 @@
                 </a:solidFill>
                 <a:latin typeface="Montserrat"/>
               </a:rPr>
-              <a:t>gas meter and regulator installation</a:t>
+              <a:t>gas meter cabinet on building wall</a:t>
             </a:r>
           </a:p>
         </p:txBody>
@@ -12604,7 +13998,7 @@
                 </a:solidFill>
                 <a:latin typeface="Montserrat"/>
               </a:rPr>
-              <a:t>005 / 024</a:t>
+              <a:t>005 / 025</a:t>
             </a:r>
           </a:p>
         </p:txBody>
@@ -12652,7 +14046,7 @@
         <p:spPr>
           <a:xfrm>
             <a:off x="822960" y="457200"/>
-            <a:ext cx="8229600" cy="365760"/>
+            <a:ext cx="10058400" cy="365760"/>
           </a:xfrm>
           <a:prstGeom prst="rect">
             <a:avLst/>
@@ -12666,13 +14060,13 @@
           <a:lstStyle/>
           <a:p>
             <a:r>
-              <a:rPr sz="1200" b="1" i="0">
-                <a:solidFill>
-                  <a:srgbClr val="64748B"/>
-                </a:solidFill>
-                <a:latin typeface="Montserrat"/>
-              </a:rPr>
-              <a:t>GENERALIDADES · DENSIDAD</a:t>
+              <a:rPr sz="1300" b="1" i="0">
+                <a:solidFill>
+                  <a:srgbClr val="E8801A"/>
+                </a:solidFill>
+                <a:latin typeface="Montserrat"/>
+              </a:rPr>
+              <a:t>GENERALIDADES</a:t>
             </a:r>
           </a:p>
         </p:txBody>
@@ -12700,26 +14094,70 @@
           <a:lstStyle/>
           <a:p>
             <a:r>
-              <a:rPr sz="2700" b="1" i="0">
+              <a:rPr sz="2800" b="1" i="0">
                 <a:solidFill>
                   <a:srgbClr val="1E2761"/>
                 </a:solidFill>
                 <a:latin typeface="Montserrat"/>
               </a:rPr>
-              <a:t>¿Hasta qué nivel puede bajar?</a:t>
-            </a:r>
-          </a:p>
-        </p:txBody>
-      </p:sp>
-      <p:sp>
-        <p:nvSpPr>
-          <p:cNvPr id="7" name="TextBox 6"/>
+              <a:t>Elegir tipo y capacidad</a:t>
+            </a:r>
+          </a:p>
+        </p:txBody>
+      </p:sp>
+      <p:sp>
+        <p:nvSpPr>
+          <p:cNvPr id="7" name="Rounded Rectangle 6"/>
+          <p:cNvSpPr/>
+          <p:nvPr/>
+        </p:nvSpPr>
+        <p:spPr>
+          <a:xfrm>
+            <a:off x="868680" y="1627632"/>
+            <a:ext cx="2011680" cy="73152"/>
+          </a:xfrm>
+          <a:prstGeom prst="roundRect">
+            <a:avLst/>
+          </a:prstGeom>
+          <a:solidFill>
+            <a:srgbClr val="E8801A"/>
+          </a:solidFill>
+          <a:ln>
+            <a:noFill/>
+          </a:ln>
+          <a:effectLst/>
+        </p:spPr>
+        <p:style>
+          <a:lnRef idx="1">
+            <a:schemeClr val="accent1"/>
+          </a:lnRef>
+          <a:fillRef idx="3">
+            <a:schemeClr val="accent1"/>
+          </a:fillRef>
+          <a:effectRef idx="2">
+            <a:schemeClr val="accent1"/>
+          </a:effectRef>
+          <a:fontRef idx="minor">
+            <a:schemeClr val="lt1"/>
+          </a:fontRef>
+        </p:style>
+        <p:txBody>
+          <a:bodyPr rtlCol="0" anchor="ctr"/>
+          <a:lstStyle/>
+          <a:p>
+            <a:pPr algn="ctr"/>
+          </a:p>
+        </p:txBody>
+      </p:sp>
+      <p:sp>
+        <p:nvSpPr>
+          <p:cNvPr id="8" name="TextBox 7"/>
           <p:cNvSpPr txBox="1"/>
           <p:nvPr/>
         </p:nvSpPr>
         <p:spPr>
           <a:xfrm>
-            <a:off x="822960" y="1920240"/>
+            <a:off x="822960" y="1965960"/>
             <a:ext cx="4983480" cy="4206240"/>
           </a:xfrm>
           <a:prstGeom prst="rect">
@@ -12735,17 +14173,17 @@
           <a:p>
             <a:pPr>
               <a:spcAft>
-                <a:spcPts val="1000"/>
+                <a:spcPts val="1100"/>
               </a:spcAft>
             </a:pPr>
             <a:r>
               <a:rPr sz="1600" b="1" i="0">
                 <a:solidFill>
-                  <a:srgbClr val="2E3A80"/>
-                </a:solidFill>
-                <a:latin typeface="Montserrat"/>
-              </a:rPr>
-              <a:t>•  </a:t>
+                  <a:srgbClr val="E8801A"/>
+                </a:solidFill>
+                <a:latin typeface="Montserrat"/>
+              </a:rPr>
+              <a:t>▸  </a:t>
             </a:r>
             <a:r>
               <a:rPr sz="1600" b="0" i="0">
@@ -12754,23 +14192,23 @@
                 </a:solidFill>
                 <a:latin typeface="Montserrat"/>
               </a:rPr>
-              <a:t>Gas natural (ligero): no bajo semisótano</a:t>
+              <a:t>Según el gas y los consumos</a:t>
             </a:r>
           </a:p>
           <a:p>
             <a:pPr>
               <a:spcAft>
-                <a:spcPts val="1000"/>
+                <a:spcPts val="1100"/>
               </a:spcAft>
             </a:pPr>
             <a:r>
               <a:rPr sz="1600" b="1" i="0">
                 <a:solidFill>
-                  <a:srgbClr val="2E3A80"/>
-                </a:solidFill>
-                <a:latin typeface="Montserrat"/>
-              </a:rPr>
-              <a:t>•  </a:t>
+                  <a:srgbClr val="E8801A"/>
+                </a:solidFill>
+                <a:latin typeface="Montserrat"/>
+              </a:rPr>
+              <a:t>▸  </a:t>
             </a:r>
             <a:r>
               <a:rPr sz="1600" b="0" i="0">
@@ -12779,23 +14217,23 @@
                 </a:solidFill>
                 <a:latin typeface="Montserrat"/>
               </a:rPr>
-              <a:t>GLP (butano/propano): no bajo planta baja</a:t>
+              <a:t>Mínimo grado de gasificación 1</a:t>
             </a:r>
           </a:p>
           <a:p>
             <a:pPr>
               <a:spcAft>
-                <a:spcPts val="1000"/>
+                <a:spcPts val="1100"/>
               </a:spcAft>
             </a:pPr>
             <a:r>
               <a:rPr sz="1600" b="1" i="0">
                 <a:solidFill>
-                  <a:srgbClr val="2E3A80"/>
-                </a:solidFill>
-                <a:latin typeface="Montserrat"/>
-              </a:rPr>
-              <a:t>•  </a:t>
+                  <a:srgbClr val="E8801A"/>
+                </a:solidFill>
+                <a:latin typeface="Montserrat"/>
+              </a:rPr>
+              <a:t>▸  </a:t>
             </a:r>
             <a:r>
               <a:rPr sz="1600" b="0" i="0">
@@ -12804,14 +14242,14 @@
                 </a:solidFill>
                 <a:latin typeface="Montserrat"/>
               </a:rPr>
-              <a:t>Ligero sube, pesado se arrastra</a:t>
-            </a:r>
-          </a:p>
-        </p:txBody>
-      </p:sp>
-      <p:sp>
-        <p:nvSpPr>
-          <p:cNvPr id="8" name="imgph" descr="IMGQ:gas meter room in apartment building"/>
+              <a:t>Consultar a la empresa distribuidora</a:t>
+            </a:r>
+          </a:p>
+        </p:txBody>
+      </p:sp>
+      <p:sp>
+        <p:nvSpPr>
+          <p:cNvPr id="9" name="imgph" descr="IMGQ:gas meter and regulator installation"/>
           <p:cNvSpPr/>
           <p:nvPr/>
         </p:nvSpPr>
@@ -12857,7 +14295,7 @@
       </p:sp>
       <p:sp>
         <p:nvSpPr>
-          <p:cNvPr id="9" name="TextBox 8"/>
+          <p:cNvPr id="10" name="TextBox 9"/>
           <p:cNvSpPr txBox="1"/>
           <p:nvPr/>
         </p:nvSpPr>
@@ -12897,7 +14335,7 @@
                 </a:solidFill>
                 <a:latin typeface="Montserrat"/>
               </a:rPr>
-              <a:t>gas meter room in apartment building</a:t>
+              <a:t>gas meter and regulator installation</a:t>
             </a:r>
           </a:p>
         </p:txBody>
@@ -12994,7 +14432,7 @@
                 </a:solidFill>
                 <a:latin typeface="Montserrat"/>
               </a:rPr>
-              <a:t>006 / 024</a:t>
+              <a:t>006 / 025</a:t>
             </a:r>
           </a:p>
         </p:txBody>
@@ -13042,7 +14480,7 @@
         <p:spPr>
           <a:xfrm>
             <a:off x="822960" y="457200"/>
-            <a:ext cx="8229600" cy="365760"/>
+            <a:ext cx="10058400" cy="365760"/>
           </a:xfrm>
           <a:prstGeom prst="rect">
             <a:avLst/>
@@ -13056,13 +14494,13 @@
           <a:lstStyle/>
           <a:p>
             <a:r>
-              <a:rPr sz="1200" b="1" i="0">
-                <a:solidFill>
-                  <a:srgbClr val="64748B"/>
-                </a:solidFill>
-                <a:latin typeface="Montserrat"/>
-              </a:rPr>
-              <a:t>GENERALIDADES</a:t>
+              <a:rPr sz="1300" b="1" i="0">
+                <a:solidFill>
+                  <a:srgbClr val="E8801A"/>
+                </a:solidFill>
+                <a:latin typeface="Montserrat"/>
+              </a:rPr>
+              <a:t>GENERALIDADES · DENSIDAD</a:t>
             </a:r>
           </a:p>
         </p:txBody>
@@ -13090,26 +14528,70 @@
           <a:lstStyle/>
           <a:p>
             <a:r>
-              <a:rPr sz="2700" b="1" i="0">
+              <a:rPr sz="2800" b="1" i="0">
                 <a:solidFill>
                   <a:srgbClr val="1E2761"/>
                 </a:solidFill>
                 <a:latin typeface="Montserrat"/>
               </a:rPr>
-              <a:t>Solo para gas y a la vista</a:t>
-            </a:r>
-          </a:p>
-        </p:txBody>
-      </p:sp>
-      <p:sp>
-        <p:nvSpPr>
-          <p:cNvPr id="7" name="TextBox 6"/>
+              <a:t>¿Hasta qué nivel puede bajar?</a:t>
+            </a:r>
+          </a:p>
+        </p:txBody>
+      </p:sp>
+      <p:sp>
+        <p:nvSpPr>
+          <p:cNvPr id="7" name="Rounded Rectangle 6"/>
+          <p:cNvSpPr/>
+          <p:nvPr/>
+        </p:nvSpPr>
+        <p:spPr>
+          <a:xfrm>
+            <a:off x="868680" y="1627632"/>
+            <a:ext cx="2011680" cy="73152"/>
+          </a:xfrm>
+          <a:prstGeom prst="roundRect">
+            <a:avLst/>
+          </a:prstGeom>
+          <a:solidFill>
+            <a:srgbClr val="E8801A"/>
+          </a:solidFill>
+          <a:ln>
+            <a:noFill/>
+          </a:ln>
+          <a:effectLst/>
+        </p:spPr>
+        <p:style>
+          <a:lnRef idx="1">
+            <a:schemeClr val="accent1"/>
+          </a:lnRef>
+          <a:fillRef idx="3">
+            <a:schemeClr val="accent1"/>
+          </a:fillRef>
+          <a:effectRef idx="2">
+            <a:schemeClr val="accent1"/>
+          </a:effectRef>
+          <a:fontRef idx="minor">
+            <a:schemeClr val="lt1"/>
+          </a:fontRef>
+        </p:style>
+        <p:txBody>
+          <a:bodyPr rtlCol="0" anchor="ctr"/>
+          <a:lstStyle/>
+          <a:p>
+            <a:pPr algn="ctr"/>
+          </a:p>
+        </p:txBody>
+      </p:sp>
+      <p:sp>
+        <p:nvSpPr>
+          <p:cNvPr id="8" name="TextBox 7"/>
           <p:cNvSpPr txBox="1"/>
           <p:nvPr/>
         </p:nvSpPr>
         <p:spPr>
           <a:xfrm>
-            <a:off x="822960" y="1920240"/>
+            <a:off x="822960" y="1965960"/>
             <a:ext cx="4983480" cy="4206240"/>
           </a:xfrm>
           <a:prstGeom prst="rect">
@@ -13125,17 +14607,17 @@
           <a:p>
             <a:pPr>
               <a:spcAft>
-                <a:spcPts val="1000"/>
+                <a:spcPts val="1100"/>
               </a:spcAft>
             </a:pPr>
             <a:r>
               <a:rPr sz="1600" b="1" i="0">
                 <a:solidFill>
-                  <a:srgbClr val="2E3A80"/>
-                </a:solidFill>
-                <a:latin typeface="Montserrat"/>
-              </a:rPr>
-              <a:t>•  </a:t>
+                  <a:srgbClr val="E8801A"/>
+                </a:solidFill>
+                <a:latin typeface="Montserrat"/>
+              </a:rPr>
+              <a:t>▸  </a:t>
             </a:r>
             <a:r>
               <a:rPr sz="1600" b="0" i="0">
@@ -13144,23 +14626,23 @@
                 </a:solidFill>
                 <a:latin typeface="Montserrat"/>
               </a:rPr>
-              <a:t>Recinto reservado solo a gas</a:t>
+              <a:t>Gas natural (ligero): no bajo semisótano</a:t>
             </a:r>
           </a:p>
           <a:p>
             <a:pPr>
               <a:spcAft>
-                <a:spcPts val="1000"/>
+                <a:spcPts val="1100"/>
               </a:spcAft>
             </a:pPr>
             <a:r>
               <a:rPr sz="1600" b="1" i="0">
                 <a:solidFill>
-                  <a:srgbClr val="2E3A80"/>
-                </a:solidFill>
-                <a:latin typeface="Montserrat"/>
-              </a:rPr>
-              <a:t>•  </a:t>
+                  <a:srgbClr val="E8801A"/>
+                </a:solidFill>
+                <a:latin typeface="Montserrat"/>
+              </a:rPr>
+              <a:t>▸  </a:t>
             </a:r>
             <a:r>
               <a:rPr sz="1600" b="0" i="0">
@@ -13169,23 +14651,23 @@
                 </a:solidFill>
                 <a:latin typeface="Montserrat"/>
               </a:rPr>
-              <a:t>Totalizador a menos de 2 m</a:t>
+              <a:t>GLP (butano/propano): no bajo planta baja</a:t>
             </a:r>
           </a:p>
           <a:p>
             <a:pPr>
               <a:spcAft>
-                <a:spcPts val="1000"/>
+                <a:spcPts val="1100"/>
               </a:spcAft>
             </a:pPr>
             <a:r>
               <a:rPr sz="1600" b="1" i="0">
                 <a:solidFill>
-                  <a:srgbClr val="2E3A80"/>
-                </a:solidFill>
-                <a:latin typeface="Montserrat"/>
-              </a:rPr>
-              <a:t>•  </a:t>
+                  <a:srgbClr val="E8801A"/>
+                </a:solidFill>
+                <a:latin typeface="Montserrat"/>
+              </a:rPr>
+              <a:t>▸  </a:t>
             </a:r>
             <a:r>
               <a:rPr sz="1600" b="0" i="0">
@@ -13194,14 +14676,14 @@
                 </a:solidFill>
                 <a:latin typeface="Montserrat"/>
               </a:rPr>
-              <a:t>Hasta 2,40 m en módulos, con escalera</a:t>
-            </a:r>
-          </a:p>
-        </p:txBody>
-      </p:sp>
-      <p:sp>
-        <p:nvSpPr>
-          <p:cNvPr id="8" name="imgph" descr="IMGQ:person reading gas meter dial"/>
+              <a:t>Ligero sube, pesado se arrastra</a:t>
+            </a:r>
+          </a:p>
+        </p:txBody>
+      </p:sp>
+      <p:sp>
+        <p:nvSpPr>
+          <p:cNvPr id="9" name="imgph" descr="IMGQ:gas meter room in apartment building"/>
           <p:cNvSpPr/>
           <p:nvPr/>
         </p:nvSpPr>
@@ -13247,7 +14729,7 @@
       </p:sp>
       <p:sp>
         <p:nvSpPr>
-          <p:cNvPr id="9" name="TextBox 8"/>
+          <p:cNvPr id="10" name="TextBox 9"/>
           <p:cNvSpPr txBox="1"/>
           <p:nvPr/>
         </p:nvSpPr>
@@ -13287,7 +14769,7 @@
                 </a:solidFill>
                 <a:latin typeface="Montserrat"/>
               </a:rPr>
-              <a:t>person reading gas meter dial</a:t>
+              <a:t>gas meter room in apartment building</a:t>
             </a:r>
           </a:p>
         </p:txBody>
@@ -13384,7 +14866,7 @@
                 </a:solidFill>
                 <a:latin typeface="Montserrat"/>
               </a:rPr>
-              <a:t>007 / 024</a:t>
+              <a:t>007 / 025</a:t>
             </a:r>
           </a:p>
         </p:txBody>
@@ -13432,7 +14914,7 @@
         <p:spPr>
           <a:xfrm>
             <a:off x="822960" y="457200"/>
-            <a:ext cx="8229600" cy="365760"/>
+            <a:ext cx="10058400" cy="365760"/>
           </a:xfrm>
           <a:prstGeom prst="rect">
             <a:avLst/>
@@ -13446,13 +14928,13 @@
           <a:lstStyle/>
           <a:p>
             <a:r>
-              <a:rPr sz="1200" b="1" i="0">
-                <a:solidFill>
-                  <a:srgbClr val="64748B"/>
-                </a:solidFill>
-                <a:latin typeface="Montserrat"/>
-              </a:rPr>
-              <a:t>NUEVA CONSTRUCCIÓN · PLURIFAMILIAR</a:t>
+              <a:rPr sz="1300" b="1" i="0">
+                <a:solidFill>
+                  <a:srgbClr val="E8801A"/>
+                </a:solidFill>
+                <a:latin typeface="Montserrat"/>
+              </a:rPr>
+              <a:t>GENERALIDADES</a:t>
             </a:r>
           </a:p>
         </p:txBody>
@@ -13480,26 +14962,70 @@
           <a:lstStyle/>
           <a:p>
             <a:r>
-              <a:rPr sz="2700" b="1" i="0">
+              <a:rPr sz="2800" b="1" i="0">
                 <a:solidFill>
                   <a:srgbClr val="1E2761"/>
                 </a:solidFill>
                 <a:latin typeface="Montserrat"/>
               </a:rPr>
-              <a:t>Bloque de pisos: centralizado</a:t>
-            </a:r>
-          </a:p>
-        </p:txBody>
-      </p:sp>
-      <p:sp>
-        <p:nvSpPr>
-          <p:cNvPr id="7" name="TextBox 6"/>
+              <a:t>Solo para gas y a la vista</a:t>
+            </a:r>
+          </a:p>
+        </p:txBody>
+      </p:sp>
+      <p:sp>
+        <p:nvSpPr>
+          <p:cNvPr id="7" name="Rounded Rectangle 6"/>
+          <p:cNvSpPr/>
+          <p:nvPr/>
+        </p:nvSpPr>
+        <p:spPr>
+          <a:xfrm>
+            <a:off x="868680" y="1627632"/>
+            <a:ext cx="2011680" cy="73152"/>
+          </a:xfrm>
+          <a:prstGeom prst="roundRect">
+            <a:avLst/>
+          </a:prstGeom>
+          <a:solidFill>
+            <a:srgbClr val="E8801A"/>
+          </a:solidFill>
+          <a:ln>
+            <a:noFill/>
+          </a:ln>
+          <a:effectLst/>
+        </p:spPr>
+        <p:style>
+          <a:lnRef idx="1">
+            <a:schemeClr val="accent1"/>
+          </a:lnRef>
+          <a:fillRef idx="3">
+            <a:schemeClr val="accent1"/>
+          </a:fillRef>
+          <a:effectRef idx="2">
+            <a:schemeClr val="accent1"/>
+          </a:effectRef>
+          <a:fontRef idx="minor">
+            <a:schemeClr val="lt1"/>
+          </a:fontRef>
+        </p:style>
+        <p:txBody>
+          <a:bodyPr rtlCol="0" anchor="ctr"/>
+          <a:lstStyle/>
+          <a:p>
+            <a:pPr algn="ctr"/>
+          </a:p>
+        </p:txBody>
+      </p:sp>
+      <p:sp>
+        <p:nvSpPr>
+          <p:cNvPr id="8" name="TextBox 7"/>
           <p:cNvSpPr txBox="1"/>
           <p:nvPr/>
         </p:nvSpPr>
         <p:spPr>
           <a:xfrm>
-            <a:off x="822960" y="1920240"/>
+            <a:off x="822960" y="1965960"/>
             <a:ext cx="4983480" cy="4206240"/>
           </a:xfrm>
           <a:prstGeom prst="rect">
@@ -13515,17 +15041,17 @@
           <a:p>
             <a:pPr>
               <a:spcAft>
-                <a:spcPts val="1000"/>
+                <a:spcPts val="1100"/>
               </a:spcAft>
             </a:pPr>
             <a:r>
               <a:rPr sz="1600" b="1" i="0">
                 <a:solidFill>
-                  <a:srgbClr val="2E3A80"/>
-                </a:solidFill>
-                <a:latin typeface="Montserrat"/>
-              </a:rPr>
-              <a:t>•  </a:t>
+                  <a:srgbClr val="E8801A"/>
+                </a:solidFill>
+                <a:latin typeface="Montserrat"/>
+              </a:rPr>
+              <a:t>▸  </a:t>
             </a:r>
             <a:r>
               <a:rPr sz="1600" b="0" i="0">
@@ -13534,23 +15060,23 @@
                 </a:solidFill>
                 <a:latin typeface="Montserrat"/>
               </a:rPr>
-              <a:t>Contadores centralizados en zona común</a:t>
+              <a:t>Recinto reservado solo a gas</a:t>
             </a:r>
           </a:p>
           <a:p>
             <a:pPr>
               <a:spcAft>
-                <a:spcPts val="1000"/>
+                <a:spcPts val="1100"/>
               </a:spcAft>
             </a:pPr>
             <a:r>
               <a:rPr sz="1600" b="1" i="0">
                 <a:solidFill>
-                  <a:srgbClr val="2E3A80"/>
-                </a:solidFill>
-                <a:latin typeface="Montserrat"/>
-              </a:rPr>
-              <a:t>•  </a:t>
+                  <a:srgbClr val="E8801A"/>
+                </a:solidFill>
+                <a:latin typeface="Montserrat"/>
+              </a:rPr>
+              <a:t>▸  </a:t>
             </a:r>
             <a:r>
               <a:rPr sz="1600" b="0" i="0">
@@ -13559,23 +15085,23 @@
                 </a:solidFill>
                 <a:latin typeface="Montserrat"/>
               </a:rPr>
-              <a:t>Accesibilidad de grado 2</a:t>
+              <a:t>Totalizador a menos de 2 m</a:t>
             </a:r>
           </a:p>
           <a:p>
             <a:pPr>
               <a:spcAft>
-                <a:spcPts val="1000"/>
+                <a:spcPts val="1100"/>
               </a:spcAft>
             </a:pPr>
             <a:r>
               <a:rPr sz="1600" b="1" i="0">
                 <a:solidFill>
-                  <a:srgbClr val="2E3A80"/>
-                </a:solidFill>
-                <a:latin typeface="Montserrat"/>
-              </a:rPr>
-              <a:t>•  </a:t>
+                  <a:srgbClr val="E8801A"/>
+                </a:solidFill>
+                <a:latin typeface="Montserrat"/>
+              </a:rPr>
+              <a:t>▸  </a:t>
             </a:r>
             <a:r>
               <a:rPr sz="1600" b="0" i="0">
@@ -13584,14 +15110,14 @@
                 </a:solidFill>
                 <a:latin typeface="Montserrat"/>
               </a:rPr>
-              <a:t>Grado 3 excepcional: no bajo planta baja</a:t>
-            </a:r>
-          </a:p>
-        </p:txBody>
-      </p:sp>
-      <p:sp>
-        <p:nvSpPr>
-          <p:cNvPr id="8" name="imgph" descr="IMGQ:row of centralized gas meters cabinet"/>
+              <a:t>Hasta 2,40 m en módulos, con escalera</a:t>
+            </a:r>
+          </a:p>
+        </p:txBody>
+      </p:sp>
+      <p:sp>
+        <p:nvSpPr>
+          <p:cNvPr id="9" name="imgph" descr="IMGQ:person reading gas meter dial"/>
           <p:cNvSpPr/>
           <p:nvPr/>
         </p:nvSpPr>
@@ -13637,7 +15163,7 @@
       </p:sp>
       <p:sp>
         <p:nvSpPr>
-          <p:cNvPr id="9" name="TextBox 8"/>
+          <p:cNvPr id="10" name="TextBox 9"/>
           <p:cNvSpPr txBox="1"/>
           <p:nvPr/>
         </p:nvSpPr>
@@ -13677,7 +15203,7 @@
                 </a:solidFill>
                 <a:latin typeface="Montserrat"/>
               </a:rPr>
-              <a:t>row of centralized gas meters cabinet</a:t>
+              <a:t>person reading gas meter dial</a:t>
             </a:r>
           </a:p>
         </p:txBody>
@@ -13774,7 +15300,7 @@
                 </a:solidFill>
                 <a:latin typeface="Montserrat"/>
               </a:rPr>
-              <a:t>008 / 024</a:t>
+              <a:t>008 / 025</a:t>
             </a:r>
           </a:p>
         </p:txBody>
@@ -13822,7 +15348,7 @@
         <p:spPr>
           <a:xfrm>
             <a:off x="822960" y="457200"/>
-            <a:ext cx="8229600" cy="365760"/>
+            <a:ext cx="10058400" cy="365760"/>
           </a:xfrm>
           <a:prstGeom prst="rect">
             <a:avLst/>
@@ -13836,13 +15362,13 @@
           <a:lstStyle/>
           <a:p>
             <a:r>
-              <a:rPr sz="1200" b="1" i="0">
-                <a:solidFill>
-                  <a:srgbClr val="64748B"/>
-                </a:solidFill>
-                <a:latin typeface="Montserrat"/>
-              </a:rPr>
-              <a:t>NUEVA CONSTRUCCIÓN · UNIFAMILIAR</a:t>
+              <a:rPr sz="1300" b="1" i="0">
+                <a:solidFill>
+                  <a:srgbClr val="E8801A"/>
+                </a:solidFill>
+                <a:latin typeface="Montserrat"/>
+              </a:rPr>
+              <a:t>NUEVA CONSTRUCCIÓN · PLURIFAMILIAR</a:t>
             </a:r>
           </a:p>
         </p:txBody>
@@ -13870,26 +15396,70 @@
           <a:lstStyle/>
           <a:p>
             <a:r>
-              <a:rPr sz="2700" b="1" i="0">
+              <a:rPr sz="2800" b="1" i="0">
                 <a:solidFill>
                   <a:srgbClr val="1E2761"/>
                 </a:solidFill>
                 <a:latin typeface="Montserrat"/>
               </a:rPr>
-              <a:t>Chalé o local: armario en fachada</a:t>
-            </a:r>
-          </a:p>
-        </p:txBody>
-      </p:sp>
-      <p:sp>
-        <p:nvSpPr>
-          <p:cNvPr id="7" name="TextBox 6"/>
+              <a:t>Bloque de pisos: centralizado</a:t>
+            </a:r>
+          </a:p>
+        </p:txBody>
+      </p:sp>
+      <p:sp>
+        <p:nvSpPr>
+          <p:cNvPr id="7" name="Rounded Rectangle 6"/>
+          <p:cNvSpPr/>
+          <p:nvPr/>
+        </p:nvSpPr>
+        <p:spPr>
+          <a:xfrm>
+            <a:off x="868680" y="1627632"/>
+            <a:ext cx="2011680" cy="73152"/>
+          </a:xfrm>
+          <a:prstGeom prst="roundRect">
+            <a:avLst/>
+          </a:prstGeom>
+          <a:solidFill>
+            <a:srgbClr val="E8801A"/>
+          </a:solidFill>
+          <a:ln>
+            <a:noFill/>
+          </a:ln>
+          <a:effectLst/>
+        </p:spPr>
+        <p:style>
+          <a:lnRef idx="1">
+            <a:schemeClr val="accent1"/>
+          </a:lnRef>
+          <a:fillRef idx="3">
+            <a:schemeClr val="accent1"/>
+          </a:fillRef>
+          <a:effectRef idx="2">
+            <a:schemeClr val="accent1"/>
+          </a:effectRef>
+          <a:fontRef idx="minor">
+            <a:schemeClr val="lt1"/>
+          </a:fontRef>
+        </p:style>
+        <p:txBody>
+          <a:bodyPr rtlCol="0" anchor="ctr"/>
+          <a:lstStyle/>
+          <a:p>
+            <a:pPr algn="ctr"/>
+          </a:p>
+        </p:txBody>
+      </p:sp>
+      <p:sp>
+        <p:nvSpPr>
+          <p:cNvPr id="8" name="TextBox 7"/>
           <p:cNvSpPr txBox="1"/>
           <p:nvPr/>
         </p:nvSpPr>
         <p:spPr>
           <a:xfrm>
-            <a:off x="822960" y="1920240"/>
+            <a:off x="822960" y="1965960"/>
             <a:ext cx="4983480" cy="4206240"/>
           </a:xfrm>
           <a:prstGeom prst="rect">
@@ -13905,17 +15475,17 @@
           <a:p>
             <a:pPr>
               <a:spcAft>
-                <a:spcPts val="1000"/>
+                <a:spcPts val="1100"/>
               </a:spcAft>
             </a:pPr>
             <a:r>
               <a:rPr sz="1600" b="1" i="0">
                 <a:solidFill>
-                  <a:srgbClr val="2E3A80"/>
-                </a:solidFill>
-                <a:latin typeface="Montserrat"/>
-              </a:rPr>
-              <a:t>•  </a:t>
+                  <a:srgbClr val="E8801A"/>
+                </a:solidFill>
+                <a:latin typeface="Montserrat"/>
+              </a:rPr>
+              <a:t>▸  </a:t>
             </a:r>
             <a:r>
               <a:rPr sz="1600" b="0" i="0">
@@ -13924,23 +15494,23 @@
                 </a:solidFill>
                 <a:latin typeface="Montserrat"/>
               </a:rPr>
-              <a:t>Recinto tipo armario o nicho</a:t>
+              <a:t>Contadores centralizados en zona común</a:t>
             </a:r>
           </a:p>
           <a:p>
             <a:pPr>
               <a:spcAft>
-                <a:spcPts val="1000"/>
+                <a:spcPts val="1100"/>
               </a:spcAft>
             </a:pPr>
             <a:r>
               <a:rPr sz="1600" b="1" i="0">
                 <a:solidFill>
-                  <a:srgbClr val="2E3A80"/>
-                </a:solidFill>
-                <a:latin typeface="Montserrat"/>
-              </a:rPr>
-              <a:t>•  </a:t>
+                  <a:srgbClr val="E8801A"/>
+                </a:solidFill>
+                <a:latin typeface="Montserrat"/>
+              </a:rPr>
+              <a:t>▸  </a:t>
             </a:r>
             <a:r>
               <a:rPr sz="1600" b="0" i="0">
@@ -13949,23 +15519,23 @@
                 </a:solidFill>
                 <a:latin typeface="Montserrat"/>
               </a:rPr>
-              <a:t>Preferente en fachada o muro límite</a:t>
+              <a:t>Accesibilidad de grado 2</a:t>
             </a:r>
           </a:p>
           <a:p>
             <a:pPr>
               <a:spcAft>
-                <a:spcPts val="1000"/>
+                <a:spcPts val="1100"/>
               </a:spcAft>
             </a:pPr>
             <a:r>
               <a:rPr sz="1600" b="1" i="0">
                 <a:solidFill>
-                  <a:srgbClr val="2E3A80"/>
-                </a:solidFill>
-                <a:latin typeface="Montserrat"/>
-              </a:rPr>
-              <a:t>•  </a:t>
+                  <a:srgbClr val="E8801A"/>
+                </a:solidFill>
+                <a:latin typeface="Montserrat"/>
+              </a:rPr>
+              <a:t>▸  </a:t>
             </a:r>
             <a:r>
               <a:rPr sz="1600" b="0" i="0">
@@ -13974,14 +15544,14 @@
                 </a:solidFill>
                 <a:latin typeface="Montserrat"/>
               </a:rPr>
-              <a:t>Grado 2 desde el exterior</a:t>
-            </a:r>
-          </a:p>
-        </p:txBody>
-      </p:sp>
-      <p:sp>
-        <p:nvSpPr>
-          <p:cNvPr id="8" name="imgph" descr="IMGQ:gas meter box on house facade"/>
+              <a:t>Grado 3 excepcional: no bajo planta baja</a:t>
+            </a:r>
+          </a:p>
+        </p:txBody>
+      </p:sp>
+      <p:sp>
+        <p:nvSpPr>
+          <p:cNvPr id="9" name="imgph" descr="IMGQ:row of centralized gas meters cabinet"/>
           <p:cNvSpPr/>
           <p:nvPr/>
         </p:nvSpPr>
@@ -14027,7 +15597,7 @@
       </p:sp>
       <p:sp>
         <p:nvSpPr>
-          <p:cNvPr id="9" name="TextBox 8"/>
+          <p:cNvPr id="10" name="TextBox 9"/>
           <p:cNvSpPr txBox="1"/>
           <p:nvPr/>
         </p:nvSpPr>
@@ -14067,7 +15637,7 @@
                 </a:solidFill>
                 <a:latin typeface="Montserrat"/>
               </a:rPr>
-              <a:t>gas meter box on house facade</a:t>
+              <a:t>row of centralized gas meters cabinet</a:t>
             </a:r>
           </a:p>
         </p:txBody>
@@ -14164,7 +15734,7 @@
                 </a:solidFill>
                 <a:latin typeface="Montserrat"/>
               </a:rPr>
-              <a:t>009 / 024</a:t>
+              <a:t>009 / 025</a:t>
             </a:r>
           </a:p>
         </p:txBody>
@@ -14212,7 +15782,7 @@
         <p:spPr>
           <a:xfrm>
             <a:off x="822960" y="457200"/>
-            <a:ext cx="8229600" cy="365760"/>
+            <a:ext cx="10058400" cy="365760"/>
           </a:xfrm>
           <a:prstGeom prst="rect">
             <a:avLst/>
@@ -14226,13 +15796,13 @@
           <a:lstStyle/>
           <a:p>
             <a:r>
-              <a:rPr sz="1200" b="1" i="0">
-                <a:solidFill>
-                  <a:srgbClr val="64748B"/>
-                </a:solidFill>
-                <a:latin typeface="Montserrat"/>
-              </a:rPr>
-              <a:t>EDIFICIO YA CONSTRUIDO</a:t>
+              <a:rPr sz="1300" b="1" i="0">
+                <a:solidFill>
+                  <a:srgbClr val="E8801A"/>
+                </a:solidFill>
+                <a:latin typeface="Montserrat"/>
+              </a:rPr>
+              <a:t>NUEVA CONSTRUCCIÓN · UNIFAMILIAR</a:t>
             </a:r>
           </a:p>
         </p:txBody>
@@ -14260,26 +15830,70 @@
           <a:lstStyle/>
           <a:p>
             <a:r>
-              <a:rPr sz="2700" b="1" i="0">
+              <a:rPr sz="2800" b="1" i="0">
                 <a:solidFill>
                   <a:srgbClr val="1E2761"/>
                 </a:solidFill>
                 <a:latin typeface="Montserrat"/>
               </a:rPr>
-              <a:t>El orden de preferencia</a:t>
-            </a:r>
-          </a:p>
-        </p:txBody>
-      </p:sp>
-      <p:sp>
-        <p:nvSpPr>
-          <p:cNvPr id="7" name="TextBox 6"/>
+              <a:t>Chalé o local: armario en fachada</a:t>
+            </a:r>
+          </a:p>
+        </p:txBody>
+      </p:sp>
+      <p:sp>
+        <p:nvSpPr>
+          <p:cNvPr id="7" name="Rounded Rectangle 6"/>
+          <p:cNvSpPr/>
+          <p:nvPr/>
+        </p:nvSpPr>
+        <p:spPr>
+          <a:xfrm>
+            <a:off x="868680" y="1627632"/>
+            <a:ext cx="2011680" cy="73152"/>
+          </a:xfrm>
+          <a:prstGeom prst="roundRect">
+            <a:avLst/>
+          </a:prstGeom>
+          <a:solidFill>
+            <a:srgbClr val="E8801A"/>
+          </a:solidFill>
+          <a:ln>
+            <a:noFill/>
+          </a:ln>
+          <a:effectLst/>
+        </p:spPr>
+        <p:style>
+          <a:lnRef idx="1">
+            <a:schemeClr val="accent1"/>
+          </a:lnRef>
+          <a:fillRef idx="3">
+            <a:schemeClr val="accent1"/>
+          </a:fillRef>
+          <a:effectRef idx="2">
+            <a:schemeClr val="accent1"/>
+          </a:effectRef>
+          <a:fontRef idx="minor">
+            <a:schemeClr val="lt1"/>
+          </a:fontRef>
+        </p:style>
+        <p:txBody>
+          <a:bodyPr rtlCol="0" anchor="ctr"/>
+          <a:lstStyle/>
+          <a:p>
+            <a:pPr algn="ctr"/>
+          </a:p>
+        </p:txBody>
+      </p:sp>
+      <p:sp>
+        <p:nvSpPr>
+          <p:cNvPr id="8" name="TextBox 7"/>
           <p:cNvSpPr txBox="1"/>
           <p:nvPr/>
         </p:nvSpPr>
         <p:spPr>
           <a:xfrm>
-            <a:off x="822960" y="1920240"/>
+            <a:off x="822960" y="1965960"/>
             <a:ext cx="4983480" cy="4206240"/>
           </a:xfrm>
           <a:prstGeom prst="rect">
@@ -14295,17 +15909,17 @@
           <a:p>
             <a:pPr>
               <a:spcAft>
-                <a:spcPts val="1000"/>
+                <a:spcPts val="1100"/>
               </a:spcAft>
             </a:pPr>
             <a:r>
               <a:rPr sz="1600" b="1" i="0">
                 <a:solidFill>
-                  <a:srgbClr val="2E3A80"/>
-                </a:solidFill>
-                <a:latin typeface="Montserrat"/>
-              </a:rPr>
-              <a:t>•  </a:t>
+                  <a:srgbClr val="E8801A"/>
+                </a:solidFill>
+                <a:latin typeface="Montserrat"/>
+              </a:rPr>
+              <a:t>▸  </a:t>
             </a:r>
             <a:r>
               <a:rPr sz="1600" b="0" i="0">
@@ -14314,23 +15928,23 @@
                 </a:solidFill>
                 <a:latin typeface="Montserrat"/>
               </a:rPr>
-              <a:t>1º centralizado en zona común</a:t>
+              <a:t>Recinto tipo armario o nicho</a:t>
             </a:r>
           </a:p>
           <a:p>
             <a:pPr>
               <a:spcAft>
-                <a:spcPts val="1000"/>
+                <a:spcPts val="1100"/>
               </a:spcAft>
             </a:pPr>
             <a:r>
               <a:rPr sz="1600" b="1" i="0">
                 <a:solidFill>
-                  <a:srgbClr val="2E3A80"/>
-                </a:solidFill>
-                <a:latin typeface="Montserrat"/>
-              </a:rPr>
-              <a:t>•  </a:t>
+                  <a:srgbClr val="E8801A"/>
+                </a:solidFill>
+                <a:latin typeface="Montserrat"/>
+              </a:rPr>
+              <a:t>▸  </a:t>
             </a:r>
             <a:r>
               <a:rPr sz="1600" b="0" i="0">
@@ -14339,23 +15953,23 @@
                 </a:solidFill>
                 <a:latin typeface="Montserrat"/>
               </a:rPr>
-              <a:t>2º interior, llaves accesibles (grado 2)</a:t>
+              <a:t>Preferente en fachada o muro límite</a:t>
             </a:r>
           </a:p>
           <a:p>
             <a:pPr>
               <a:spcAft>
-                <a:spcPts val="1000"/>
+                <a:spcPts val="1100"/>
               </a:spcAft>
             </a:pPr>
             <a:r>
               <a:rPr sz="1600" b="1" i="0">
                 <a:solidFill>
-                  <a:srgbClr val="2E3A80"/>
-                </a:solidFill>
-                <a:latin typeface="Montserrat"/>
-              </a:rPr>
-              <a:t>•  </a:t>
+                  <a:srgbClr val="E8801A"/>
+                </a:solidFill>
+                <a:latin typeface="Montserrat"/>
+              </a:rPr>
+              <a:t>▸  </a:t>
             </a:r>
             <a:r>
               <a:rPr sz="1600" b="0" i="0">
@@ -14364,14 +15978,14 @@
                 </a:solidFill>
                 <a:latin typeface="Montserrat"/>
               </a:rPr>
-              <a:t>3º autorización expresa y obturador</a:t>
-            </a:r>
-          </a:p>
-        </p:txBody>
-      </p:sp>
-      <p:sp>
-        <p:nvSpPr>
-          <p:cNvPr id="8" name="imgph" descr="IMGQ:gas meter inside kitchen cupboard"/>
+              <a:t>Grado 2 desde el exterior</a:t>
+            </a:r>
+          </a:p>
+        </p:txBody>
+      </p:sp>
+      <p:sp>
+        <p:nvSpPr>
+          <p:cNvPr id="9" name="imgph" descr="IMGQ:gas meter box on house facade"/>
           <p:cNvSpPr/>
           <p:nvPr/>
         </p:nvSpPr>
@@ -14417,7 +16031,7 @@
       </p:sp>
       <p:sp>
         <p:nvSpPr>
-          <p:cNvPr id="9" name="TextBox 8"/>
+          <p:cNvPr id="10" name="TextBox 9"/>
           <p:cNvSpPr txBox="1"/>
           <p:nvPr/>
         </p:nvSpPr>
@@ -14457,7 +16071,7 @@
                 </a:solidFill>
                 <a:latin typeface="Montserrat"/>
               </a:rPr>
-              <a:t>gas meter inside kitchen cupboard</a:t>
+              <a:t>gas meter box on house facade</a:t>
             </a:r>
           </a:p>
         </p:txBody>

--- a/Curso Gas B/12 - UNE 60670 - Recintos de contadores/12 - UNE 60670 - Recintos de contadores - Vídeo 1.pptx
+++ b/Curso Gas B/12 - UNE 60670 - Recintos de contadores/12 - UNE 60670 - Recintos de contadores - Vídeo 1.pptx
@@ -1583,12 +1583,12 @@
           <a:lstStyle/>
           <a:p>
             <a:r>
-              <a:t>N1: Acabamos de ver la tabla, así que vamos a fijarla. Un local técnico, ese cuarto de contadores en el que entra una persona: ¿cuánta superficie de ventilación directa necesita arriba y abajo?</a:t>
-            </a:r>
-          </a:p>
-          <a:p>
-            <a:r>
-              <a:t>N2: Repasa la primera fila de la tabla. Es el recinto más grande, así que pide de las cifras más altas de la lista.</a:t>
+              <a:t>N1: Acabamos de ver la tabla, así que vamos a fijarla de oído. La pregunta: un local técnico, ese cuarto de contadores en el que entra una persona, ¿qué superficie mínima de ventilación directa necesita arriba y abajo? Escucha las opciones. Opción A: doscientos centímetros cuadrados arriba y doscientos abajo. Opción B: cinco centímetros cuadrados arriba y cinco abajo. Opción C: cincuenta arriba y cincuenta abajo. Opción D: ciento cincuenta arriba y ciento cincuenta abajo. Piénsalo un momento.</a:t>
+            </a:r>
+          </a:p>
+          <a:p>
+            <a:r>
+              <a:t>N2: Recuerda la primera fila de la tabla. Es el recinto más grande, así que le tocan de las cifras más altas de la lista.</a:t>
             </a:r>
           </a:p>
         </p:txBody>
@@ -1658,12 +1658,12 @@
           <a:lstStyle/>
           <a:p>
             <a:r>
-              <a:t>N1: ¿Por qué doscientos y no cinco o cincuenta?</a:t>
-            </a:r>
-          </a:p>
-          <a:p>
-            <a:r>
-              <a:t>N2: Porque cinco y cincuenta son los valores de los armarios, que son cajas pequeñas; y ciento cincuenta es el del conducto técnico. El local técnico, al ser un cuarto en el que se trabaja dentro, necesita las dos bocas de doscientos centímetros cuadrados cada una, arriba y abajo, y siempre directas. El truco: asocia cada recinto a su número, y recuerda que el cuarto de contadores es el más exigente.</a:t>
+              <a:t>N2: La respuesta correcta es la opción A: doscientos centímetros cuadrados arriba y doscientos abajo. Según la tabla uno, el local técnico exige esa superficie libre directa tanto en la abertura de arriba como en la de abajo. ¿Por qué no las otras? Porque cinco y cincuenta, las opciones B y C, son los valores de los armarios, que son cajas pequeñas; y ciento cincuenta, la opción D, es el del conducto técnico. El local técnico, al ser un cuarto en el que se trabaja dentro, necesita las dos bocas de doscientos centímetros cuadrados cada una, arriba y abajo, y siempre directas. El truco: asocia cada recinto a su número, y recuerda que el cuarto de contadores es el más exigente.</a:t>
+            </a:r>
+          </a:p>
+          <a:p>
+            <a:r>
+              <a:t>N1: Cada recinto, su cifra; y el más grande, la más alta.</a:t>
             </a:r>
           </a:p>
         </p:txBody>
@@ -1958,12 +1958,12 @@
           <a:lstStyle/>
           <a:p>
             <a:r>
-              <a:t>N1: Contador dentro de la cocina. Si no ponemos ninguna pantalla, ¿a qué distancia mínima de los fuegos tiene que quedar?</a:t>
-            </a:r>
-          </a:p>
-          <a:p>
-            <a:r>
-              <a:t>N2: Cuidado, que hay varias distancias parecidas rondando este tema. Esta es la del calor de la llama, la más grande de todas.</a:t>
+              <a:t>N1: Contador dentro de la cocina. La pregunta: si no ponemos ninguna pantalla, ¿a qué distancia mínima de los fuegos tiene que quedar el contador? Escucha las cuatro opciones. Opción A: cuarenta centímetros. Opción B: veinte centímetros. Opción C: quince centímetros. Opción D: setenta y cinco centímetros. Tómate un segundo para decidir.</a:t>
+            </a:r>
+          </a:p>
+          <a:p>
+            <a:r>
+              <a:t>N2: Cuidado, que hay varias distancias parecidas rondando este tema. Esta es la del calor de la llama, la más grande de las que suenan.</a:t>
             </a:r>
           </a:p>
         </p:txBody>
@@ -2033,12 +2033,12 @@
           <a:lstStyle/>
           <a:p>
             <a:r>
-              <a:t>N1: ¿Por qué cuarenta y no veinte?</a:t>
-            </a:r>
-          </a:p>
-          <a:p>
-            <a:r>
-              <a:t>N2: Ojo con no confundirlas. Los veinte centímetros son para los enchufes, interruptores y las calderas o calentadores. Los quince son el borde inferior de la rejilla con gas pesado. Y el setenta y cinco es el volumen del local para la excepción de baños. La distancia a los fuegos de la cocina son cuarenta centímetros, porque el calor directo deforma y envejece el contador y sus juntas, y eso acaba en fuga. Si no llegas a esa distancia, intercalas una pantalla de protección, que puede ser el lateral de un mueble.</a:t>
+              <a:t>N2: La respuesta correcta es la opción A: cuarenta centímetros. Es la distancia del contador a los fuegos de la cocina, porque el calor directo de la llama envejece y deforma el contador y sus juntas, y eso acaba en fuga. Ojo con no confundir las otras: los veinte centímetros, la opción B, son para los enchufes, interruptores y las calderas o calentadores; los quince, la opción C, son el borde inferior de la rejilla con gas pesado; y el setenta y cinco, la opción D, es el volumen del local para la excepción de baños. Si no llegas a esos cuarenta centímetros, intercalas una pantalla de protección, que puede ser el lateral de un mueble.</a:t>
+            </a:r>
+          </a:p>
+          <a:p>
+            <a:r>
+              <a:t>N1: Cuarenta a los fuegos; y todo lo demás son distractores de otras reglas.</a:t>
             </a:r>
           </a:p>
         </p:txBody>
@@ -2709,12 +2709,12 @@
           <a:lstStyle/>
           <a:p>
             <a:r>
-              <a:t>N1: Vamos con una pregunta que cae fijo. Tenemos un contador de butano o propano, o sea GLP. ¿Hasta qué altura del edificio nos deja bajarlo la norma?</a:t>
-            </a:r>
-          </a:p>
-          <a:p>
-            <a:r>
-              <a:t>N2: Piensa en cómo se comporta ese gas si se escapa. ¿Flota o se arrastra? Ahí está la clave de la respuesta.</a:t>
+              <a:t>N1: Vamos con una pregunta que cae fijo, y la jugamos solo de oído. Escucha bien: ¿hasta qué nivel se puede situar un contador de GLP, es decir, de butano o propano? Y estas son las cuatro opciones. Opción A: no por debajo de la planta baja. Opción B: no por debajo del semisótano. Opción C: no por debajo del primer sótano. Opción D: en cualquier nivel si hay ventilación. Párala un momento y piénsalo.</a:t>
+            </a:r>
+          </a:p>
+          <a:p>
+            <a:r>
+              <a:t>N2: La pista está en cómo se comporta ese gas si se escapa. ¿Flota o se arrastra por el suelo? Ahí tienes la respuesta.</a:t>
             </a:r>
           </a:p>
         </p:txBody>
@@ -2784,12 +2784,12 @@
           <a:lstStyle/>
           <a:p>
             <a:r>
-              <a:t>N1: ¿Por qué la planta baja y no el semisótano?</a:t>
-            </a:r>
-          </a:p>
-          <a:p>
-            <a:r>
-              <a:t>N2: Porque el GLP pesa más que el aire. Si hay una fuga, no sube: se derrama por el suelo y se acumula en el hueco más bajo que encuentre, formando una bolsa que a la mínima chispa deflagra. Por eso con gas pesado no bajamos del nivel de la planta baja. El truco para no fallar: ligero, como el gas natural, puede llegar al semisótano; pesado, solo de planta baja hacia arriba.</a:t>
+              <a:t>N2: La respuesta correcta es la opción A: no por debajo de la planta baja. ¿Por qué? Porque el GLP es más denso que el aire: si hay una fuga no sube, se derrama por el suelo y se acumula en el hueco más bajo que encuentre, formando una bolsa que a la mínima chispa deflagra. Por eso con gas pesado no bajamos del nivel de la planta baja. El truco para no fallar: ligero, como el gas natural, puede llegar al semisótano; pesado, solo de planta baja hacia arriba.</a:t>
+            </a:r>
+          </a:p>
+          <a:p>
+            <a:r>
+              <a:t>N1: Y ojo, la opción B, el semisótano, es justo la trampa: ese es el límite del gas ligero, no el del GLP.</a:t>
             </a:r>
           </a:p>
         </p:txBody>
